--- a/files/ia-no-seu-dia-urcamp.pptx
+++ b/files/ia-no-seu-dia-urcamp.pptx
@@ -40,6 +40,9 @@
     <p:sldId id="288" r:id="rId39"/>
     <p:sldId id="289" r:id="rId40"/>
     <p:sldId id="290" r:id="rId41"/>
+    <p:sldId id="291" r:id="rId42"/>
+    <p:sldId id="292" r:id="rId43"/>
+    <p:sldId id="293" r:id="rId44"/>
   </p:sldIdLst>
   <p:sldSz cx="12191695" cy="6858000" type="screen4x3"/>
   <p:notesSz cx="6858000" cy="9144000"/>
@@ -5511,15 +5514,39 @@
           </a:p>
         </p:txBody>
       </p:sp>
-      <p:sp>
-        <p:nvSpPr>
-          <p:cNvPr id="3" name="Rectangle 2"/>
+      <p:pic>
+        <p:nvPicPr>
+          <p:cNvPr id="3" name="Picture 2" descr="08_funcoes.png"/>
+          <p:cNvPicPr>
+            <a:picLocks noChangeAspect="1"/>
+          </p:cNvPicPr>
+          <p:nvPr/>
+        </p:nvPicPr>
+        <p:blipFill>
+          <a:blip r:embed="rId2"/>
+          <a:stretch>
+            <a:fillRect/>
+          </a:stretch>
+        </p:blipFill>
+        <p:spPr>
+          <a:xfrm>
+            <a:off x="777240" y="1920240"/>
+            <a:ext cx="10637215" cy="3840479"/>
+          </a:xfrm>
+          <a:prstGeom prst="rect">
+            <a:avLst/>
+          </a:prstGeom>
+        </p:spPr>
+      </p:pic>
+      <p:sp>
+        <p:nvSpPr>
+          <p:cNvPr id="4" name="Rectangle 3"/>
           <p:cNvSpPr/>
           <p:nvPr/>
         </p:nvSpPr>
         <p:spPr>
           <a:xfrm>
-            <a:off x="777240" y="1783080"/>
+            <a:off x="777240" y="5907024"/>
             <a:ext cx="10637215" cy="9525"/>
           </a:xfrm>
           <a:prstGeom prst="rect">
@@ -5557,677 +5584,7 @@
       </p:sp>
       <p:sp>
         <p:nvSpPr>
-          <p:cNvPr id="4" name="TextBox 3"/>
-          <p:cNvSpPr txBox="1"/>
-          <p:nvPr/>
-        </p:nvSpPr>
-        <p:spPr>
-          <a:xfrm>
-            <a:off x="777240" y="1920240"/>
-            <a:ext cx="3749039" cy="676655"/>
-          </a:xfrm>
-          <a:prstGeom prst="rect">
-            <a:avLst/>
-          </a:prstGeom>
-          <a:noFill/>
-        </p:spPr>
-        <p:txBody>
-          <a:bodyPr wrap="square" lIns="0" rIns="0" tIns="0" bIns="0">
-            <a:spAutoFit/>
-          </a:bodyPr>
-          <a:lstStyle/>
-          <a:p>
-            <a:pPr algn="l">
-              <a:lnSpc>
-                <a:spcPct val="105000"/>
-              </a:lnSpc>
-              <a:spcBef>
-                <a:spcPts val="0"/>
-              </a:spcBef>
-              <a:spcAft>
-                <a:spcPts val="0"/>
-              </a:spcAft>
-            </a:pPr>
-            <a:r>
-              <a:rPr sz="2100" b="1">
-                <a:solidFill>
-                  <a:srgbClr val="1E1E1E"/>
-                </a:solidFill>
-                <a:latin typeface="Roboto"/>
-              </a:rPr>
-              <a:t>Finanças</a:t>
-            </a:r>
-          </a:p>
-        </p:txBody>
-      </p:sp>
-      <p:sp>
-        <p:nvSpPr>
           <p:cNvPr id="5" name="TextBox 4"/>
-          <p:cNvSpPr txBox="1"/>
-          <p:nvPr/>
-        </p:nvSpPr>
-        <p:spPr>
-          <a:xfrm>
-            <a:off x="4846319" y="1920240"/>
-            <a:ext cx="6568135" cy="676655"/>
-          </a:xfrm>
-          <a:prstGeom prst="rect">
-            <a:avLst/>
-          </a:prstGeom>
-          <a:noFill/>
-        </p:spPr>
-        <p:txBody>
-          <a:bodyPr wrap="square" lIns="0" rIns="0" tIns="0" bIns="0">
-            <a:spAutoFit/>
-          </a:bodyPr>
-          <a:lstStyle/>
-          <a:p>
-            <a:pPr algn="l">
-              <a:lnSpc>
-                <a:spcPct val="105000"/>
-              </a:lnSpc>
-              <a:spcBef>
-                <a:spcPts val="0"/>
-              </a:spcBef>
-              <a:spcAft>
-                <a:spcPts val="0"/>
-              </a:spcAft>
-            </a:pPr>
-            <a:r>
-              <a:rPr sz="2100" b="0">
-                <a:solidFill>
-                  <a:srgbClr val="1E1E1E"/>
-                </a:solidFill>
-                <a:latin typeface="Roboto"/>
-              </a:rPr>
-              <a:t>Projeção de fluxo de caixa, conciliação, detecção de fraude</a:t>
-            </a:r>
-          </a:p>
-        </p:txBody>
-      </p:sp>
-      <p:sp>
-        <p:nvSpPr>
-          <p:cNvPr id="6" name="Rectangle 5"/>
-          <p:cNvSpPr/>
-          <p:nvPr/>
-        </p:nvSpPr>
-        <p:spPr>
-          <a:xfrm>
-            <a:off x="777240" y="2596164"/>
-            <a:ext cx="10637215" cy="9525"/>
-          </a:xfrm>
-          <a:prstGeom prst="rect">
-            <a:avLst/>
-          </a:prstGeom>
-          <a:solidFill>
-            <a:srgbClr val="D6D6D6"/>
-          </a:solidFill>
-          <a:ln>
-            <a:noFill/>
-          </a:ln>
-          <a:effectLst/>
-        </p:spPr>
-        <p:style>
-          <a:lnRef idx="1">
-            <a:schemeClr val="accent1"/>
-          </a:lnRef>
-          <a:fillRef idx="3">
-            <a:schemeClr val="accent1"/>
-          </a:fillRef>
-          <a:effectRef idx="2">
-            <a:schemeClr val="accent1"/>
-          </a:effectRef>
-          <a:fontRef idx="minor">
-            <a:schemeClr val="lt1"/>
-          </a:fontRef>
-        </p:style>
-        <p:txBody>
-          <a:bodyPr rtlCol="0" anchor="ctr"/>
-          <a:lstStyle/>
-          <a:p>
-            <a:pPr algn="ctr"/>
-          </a:p>
-        </p:txBody>
-      </p:sp>
-      <p:sp>
-        <p:nvSpPr>
-          <p:cNvPr id="7" name="TextBox 6"/>
-          <p:cNvSpPr txBox="1"/>
-          <p:nvPr/>
-        </p:nvSpPr>
-        <p:spPr>
-          <a:xfrm>
-            <a:off x="777240" y="2688336"/>
-            <a:ext cx="3749039" cy="676655"/>
-          </a:xfrm>
-          <a:prstGeom prst="rect">
-            <a:avLst/>
-          </a:prstGeom>
-          <a:noFill/>
-        </p:spPr>
-        <p:txBody>
-          <a:bodyPr wrap="square" lIns="0" rIns="0" tIns="0" bIns="0">
-            <a:spAutoFit/>
-          </a:bodyPr>
-          <a:lstStyle/>
-          <a:p>
-            <a:pPr algn="l">
-              <a:lnSpc>
-                <a:spcPct val="105000"/>
-              </a:lnSpc>
-              <a:spcBef>
-                <a:spcPts val="0"/>
-              </a:spcBef>
-              <a:spcAft>
-                <a:spcPts val="0"/>
-              </a:spcAft>
-            </a:pPr>
-            <a:r>
-              <a:rPr sz="2100" b="1">
-                <a:solidFill>
-                  <a:srgbClr val="1E1E1E"/>
-                </a:solidFill>
-                <a:latin typeface="Roboto"/>
-              </a:rPr>
-              <a:t>Pessoas</a:t>
-            </a:r>
-          </a:p>
-        </p:txBody>
-      </p:sp>
-      <p:sp>
-        <p:nvSpPr>
-          <p:cNvPr id="8" name="TextBox 7"/>
-          <p:cNvSpPr txBox="1"/>
-          <p:nvPr/>
-        </p:nvSpPr>
-        <p:spPr>
-          <a:xfrm>
-            <a:off x="4846319" y="2688336"/>
-            <a:ext cx="6568135" cy="676655"/>
-          </a:xfrm>
-          <a:prstGeom prst="rect">
-            <a:avLst/>
-          </a:prstGeom>
-          <a:noFill/>
-        </p:spPr>
-        <p:txBody>
-          <a:bodyPr wrap="square" lIns="0" rIns="0" tIns="0" bIns="0">
-            <a:spAutoFit/>
-          </a:bodyPr>
-          <a:lstStyle/>
-          <a:p>
-            <a:pPr algn="l">
-              <a:lnSpc>
-                <a:spcPct val="105000"/>
-              </a:lnSpc>
-              <a:spcBef>
-                <a:spcPts val="0"/>
-              </a:spcBef>
-              <a:spcAft>
-                <a:spcPts val="0"/>
-              </a:spcAft>
-            </a:pPr>
-            <a:r>
-              <a:rPr sz="2100" b="0">
-                <a:solidFill>
-                  <a:srgbClr val="1E1E1E"/>
-                </a:solidFill>
-                <a:latin typeface="Roboto"/>
-              </a:rPr>
-              <a:t>Triagem de candidatos, plano de treinamento, análise de clima</a:t>
-            </a:r>
-          </a:p>
-        </p:txBody>
-      </p:sp>
-      <p:sp>
-        <p:nvSpPr>
-          <p:cNvPr id="9" name="Rectangle 8"/>
-          <p:cNvSpPr/>
-          <p:nvPr/>
-        </p:nvSpPr>
-        <p:spPr>
-          <a:xfrm>
-            <a:off x="777240" y="3364260"/>
-            <a:ext cx="10637215" cy="9525"/>
-          </a:xfrm>
-          <a:prstGeom prst="rect">
-            <a:avLst/>
-          </a:prstGeom>
-          <a:solidFill>
-            <a:srgbClr val="D6D6D6"/>
-          </a:solidFill>
-          <a:ln>
-            <a:noFill/>
-          </a:ln>
-          <a:effectLst/>
-        </p:spPr>
-        <p:style>
-          <a:lnRef idx="1">
-            <a:schemeClr val="accent1"/>
-          </a:lnRef>
-          <a:fillRef idx="3">
-            <a:schemeClr val="accent1"/>
-          </a:fillRef>
-          <a:effectRef idx="2">
-            <a:schemeClr val="accent1"/>
-          </a:effectRef>
-          <a:fontRef idx="minor">
-            <a:schemeClr val="lt1"/>
-          </a:fontRef>
-        </p:style>
-        <p:txBody>
-          <a:bodyPr rtlCol="0" anchor="ctr"/>
-          <a:lstStyle/>
-          <a:p>
-            <a:pPr algn="ctr"/>
-          </a:p>
-        </p:txBody>
-      </p:sp>
-      <p:sp>
-        <p:nvSpPr>
-          <p:cNvPr id="10" name="TextBox 9"/>
-          <p:cNvSpPr txBox="1"/>
-          <p:nvPr/>
-        </p:nvSpPr>
-        <p:spPr>
-          <a:xfrm>
-            <a:off x="777240" y="3456432"/>
-            <a:ext cx="3749039" cy="676655"/>
-          </a:xfrm>
-          <a:prstGeom prst="rect">
-            <a:avLst/>
-          </a:prstGeom>
-          <a:noFill/>
-        </p:spPr>
-        <p:txBody>
-          <a:bodyPr wrap="square" lIns="0" rIns="0" tIns="0" bIns="0">
-            <a:spAutoFit/>
-          </a:bodyPr>
-          <a:lstStyle/>
-          <a:p>
-            <a:pPr algn="l">
-              <a:lnSpc>
-                <a:spcPct val="105000"/>
-              </a:lnSpc>
-              <a:spcBef>
-                <a:spcPts val="0"/>
-              </a:spcBef>
-              <a:spcAft>
-                <a:spcPts val="0"/>
-              </a:spcAft>
-            </a:pPr>
-            <a:r>
-              <a:rPr sz="2100" b="1">
-                <a:solidFill>
-                  <a:srgbClr val="1E1E1E"/>
-                </a:solidFill>
-                <a:latin typeface="Roboto"/>
-              </a:rPr>
-              <a:t>Marketing e vendas</a:t>
-            </a:r>
-          </a:p>
-        </p:txBody>
-      </p:sp>
-      <p:sp>
-        <p:nvSpPr>
-          <p:cNvPr id="11" name="TextBox 10"/>
-          <p:cNvSpPr txBox="1"/>
-          <p:nvPr/>
-        </p:nvSpPr>
-        <p:spPr>
-          <a:xfrm>
-            <a:off x="4846319" y="3456432"/>
-            <a:ext cx="6568135" cy="676655"/>
-          </a:xfrm>
-          <a:prstGeom prst="rect">
-            <a:avLst/>
-          </a:prstGeom>
-          <a:noFill/>
-        </p:spPr>
-        <p:txBody>
-          <a:bodyPr wrap="square" lIns="0" rIns="0" tIns="0" bIns="0">
-            <a:spAutoFit/>
-          </a:bodyPr>
-          <a:lstStyle/>
-          <a:p>
-            <a:pPr algn="l">
-              <a:lnSpc>
-                <a:spcPct val="105000"/>
-              </a:lnSpc>
-              <a:spcBef>
-                <a:spcPts val="0"/>
-              </a:spcBef>
-              <a:spcAft>
-                <a:spcPts val="0"/>
-              </a:spcAft>
-            </a:pPr>
-            <a:r>
-              <a:rPr sz="2100" b="0">
-                <a:solidFill>
-                  <a:srgbClr val="1E1E1E"/>
-                </a:solidFill>
-                <a:latin typeface="Roboto"/>
-              </a:rPr>
-              <a:t>Segmentação, produção de conteúdo, previsão de demanda</a:t>
-            </a:r>
-          </a:p>
-        </p:txBody>
-      </p:sp>
-      <p:sp>
-        <p:nvSpPr>
-          <p:cNvPr id="12" name="Rectangle 11"/>
-          <p:cNvSpPr/>
-          <p:nvPr/>
-        </p:nvSpPr>
-        <p:spPr>
-          <a:xfrm>
-            <a:off x="777240" y="4132356"/>
-            <a:ext cx="10637215" cy="9525"/>
-          </a:xfrm>
-          <a:prstGeom prst="rect">
-            <a:avLst/>
-          </a:prstGeom>
-          <a:solidFill>
-            <a:srgbClr val="D6D6D6"/>
-          </a:solidFill>
-          <a:ln>
-            <a:noFill/>
-          </a:ln>
-          <a:effectLst/>
-        </p:spPr>
-        <p:style>
-          <a:lnRef idx="1">
-            <a:schemeClr val="accent1"/>
-          </a:lnRef>
-          <a:fillRef idx="3">
-            <a:schemeClr val="accent1"/>
-          </a:fillRef>
-          <a:effectRef idx="2">
-            <a:schemeClr val="accent1"/>
-          </a:effectRef>
-          <a:fontRef idx="minor">
-            <a:schemeClr val="lt1"/>
-          </a:fontRef>
-        </p:style>
-        <p:txBody>
-          <a:bodyPr rtlCol="0" anchor="ctr"/>
-          <a:lstStyle/>
-          <a:p>
-            <a:pPr algn="ctr"/>
-          </a:p>
-        </p:txBody>
-      </p:sp>
-      <p:sp>
-        <p:nvSpPr>
-          <p:cNvPr id="13" name="TextBox 12"/>
-          <p:cNvSpPr txBox="1"/>
-          <p:nvPr/>
-        </p:nvSpPr>
-        <p:spPr>
-          <a:xfrm>
-            <a:off x="777240" y="4224527"/>
-            <a:ext cx="3749039" cy="676655"/>
-          </a:xfrm>
-          <a:prstGeom prst="rect">
-            <a:avLst/>
-          </a:prstGeom>
-          <a:noFill/>
-        </p:spPr>
-        <p:txBody>
-          <a:bodyPr wrap="square" lIns="0" rIns="0" tIns="0" bIns="0">
-            <a:spAutoFit/>
-          </a:bodyPr>
-          <a:lstStyle/>
-          <a:p>
-            <a:pPr algn="l">
-              <a:lnSpc>
-                <a:spcPct val="105000"/>
-              </a:lnSpc>
-              <a:spcBef>
-                <a:spcPts val="0"/>
-              </a:spcBef>
-              <a:spcAft>
-                <a:spcPts val="0"/>
-              </a:spcAft>
-            </a:pPr>
-            <a:r>
-              <a:rPr sz="2100" b="1">
-                <a:solidFill>
-                  <a:srgbClr val="1E1E1E"/>
-                </a:solidFill>
-                <a:latin typeface="Roboto"/>
-              </a:rPr>
-              <a:t>Operações</a:t>
-            </a:r>
-          </a:p>
-        </p:txBody>
-      </p:sp>
-      <p:sp>
-        <p:nvSpPr>
-          <p:cNvPr id="14" name="TextBox 13"/>
-          <p:cNvSpPr txBox="1"/>
-          <p:nvPr/>
-        </p:nvSpPr>
-        <p:spPr>
-          <a:xfrm>
-            <a:off x="4846319" y="4224527"/>
-            <a:ext cx="6568135" cy="676655"/>
-          </a:xfrm>
-          <a:prstGeom prst="rect">
-            <a:avLst/>
-          </a:prstGeom>
-          <a:noFill/>
-        </p:spPr>
-        <p:txBody>
-          <a:bodyPr wrap="square" lIns="0" rIns="0" tIns="0" bIns="0">
-            <a:spAutoFit/>
-          </a:bodyPr>
-          <a:lstStyle/>
-          <a:p>
-            <a:pPr algn="l">
-              <a:lnSpc>
-                <a:spcPct val="105000"/>
-              </a:lnSpc>
-              <a:spcBef>
-                <a:spcPts val="0"/>
-              </a:spcBef>
-              <a:spcAft>
-                <a:spcPts val="0"/>
-              </a:spcAft>
-            </a:pPr>
-            <a:r>
-              <a:rPr sz="2100" b="0">
-                <a:solidFill>
-                  <a:srgbClr val="1E1E1E"/>
-                </a:solidFill>
-                <a:latin typeface="Roboto"/>
-              </a:rPr>
-              <a:t>Roteirização, reposição de estoque, manutenção preditiva</a:t>
-            </a:r>
-          </a:p>
-        </p:txBody>
-      </p:sp>
-      <p:sp>
-        <p:nvSpPr>
-          <p:cNvPr id="15" name="Rectangle 14"/>
-          <p:cNvSpPr/>
-          <p:nvPr/>
-        </p:nvSpPr>
-        <p:spPr>
-          <a:xfrm>
-            <a:off x="777240" y="4900452"/>
-            <a:ext cx="10637215" cy="9525"/>
-          </a:xfrm>
-          <a:prstGeom prst="rect">
-            <a:avLst/>
-          </a:prstGeom>
-          <a:solidFill>
-            <a:srgbClr val="D6D6D6"/>
-          </a:solidFill>
-          <a:ln>
-            <a:noFill/>
-          </a:ln>
-          <a:effectLst/>
-        </p:spPr>
-        <p:style>
-          <a:lnRef idx="1">
-            <a:schemeClr val="accent1"/>
-          </a:lnRef>
-          <a:fillRef idx="3">
-            <a:schemeClr val="accent1"/>
-          </a:fillRef>
-          <a:effectRef idx="2">
-            <a:schemeClr val="accent1"/>
-          </a:effectRef>
-          <a:fontRef idx="minor">
-            <a:schemeClr val="lt1"/>
-          </a:fontRef>
-        </p:style>
-        <p:txBody>
-          <a:bodyPr rtlCol="0" anchor="ctr"/>
-          <a:lstStyle/>
-          <a:p>
-            <a:pPr algn="ctr"/>
-          </a:p>
-        </p:txBody>
-      </p:sp>
-      <p:sp>
-        <p:nvSpPr>
-          <p:cNvPr id="16" name="TextBox 15"/>
-          <p:cNvSpPr txBox="1"/>
-          <p:nvPr/>
-        </p:nvSpPr>
-        <p:spPr>
-          <a:xfrm>
-            <a:off x="777240" y="4992623"/>
-            <a:ext cx="3749039" cy="676655"/>
-          </a:xfrm>
-          <a:prstGeom prst="rect">
-            <a:avLst/>
-          </a:prstGeom>
-          <a:noFill/>
-        </p:spPr>
-        <p:txBody>
-          <a:bodyPr wrap="square" lIns="0" rIns="0" tIns="0" bIns="0">
-            <a:spAutoFit/>
-          </a:bodyPr>
-          <a:lstStyle/>
-          <a:p>
-            <a:pPr algn="l">
-              <a:lnSpc>
-                <a:spcPct val="105000"/>
-              </a:lnSpc>
-              <a:spcBef>
-                <a:spcPts val="0"/>
-              </a:spcBef>
-              <a:spcAft>
-                <a:spcPts val="0"/>
-              </a:spcAft>
-            </a:pPr>
-            <a:r>
-              <a:rPr sz="2100" b="1">
-                <a:solidFill>
-                  <a:srgbClr val="1E1E1E"/>
-                </a:solidFill>
-                <a:latin typeface="Roboto"/>
-              </a:rPr>
-              <a:t>Estratégia</a:t>
-            </a:r>
-          </a:p>
-        </p:txBody>
-      </p:sp>
-      <p:sp>
-        <p:nvSpPr>
-          <p:cNvPr id="17" name="TextBox 16"/>
-          <p:cNvSpPr txBox="1"/>
-          <p:nvPr/>
-        </p:nvSpPr>
-        <p:spPr>
-          <a:xfrm>
-            <a:off x="4846319" y="4992623"/>
-            <a:ext cx="6568135" cy="676655"/>
-          </a:xfrm>
-          <a:prstGeom prst="rect">
-            <a:avLst/>
-          </a:prstGeom>
-          <a:noFill/>
-        </p:spPr>
-        <p:txBody>
-          <a:bodyPr wrap="square" lIns="0" rIns="0" tIns="0" bIns="0">
-            <a:spAutoFit/>
-          </a:bodyPr>
-          <a:lstStyle/>
-          <a:p>
-            <a:pPr algn="l">
-              <a:lnSpc>
-                <a:spcPct val="105000"/>
-              </a:lnSpc>
-              <a:spcBef>
-                <a:spcPts val="0"/>
-              </a:spcBef>
-              <a:spcAft>
-                <a:spcPts val="0"/>
-              </a:spcAft>
-            </a:pPr>
-            <a:r>
-              <a:rPr sz="2100" b="0">
-                <a:solidFill>
-                  <a:srgbClr val="1E1E1E"/>
-                </a:solidFill>
-                <a:latin typeface="Roboto"/>
-              </a:rPr>
-              <a:t>Leitura de concorrência, cenários, síntese de mercado</a:t>
-            </a:r>
-          </a:p>
-        </p:txBody>
-      </p:sp>
-      <p:sp>
-        <p:nvSpPr>
-          <p:cNvPr id="18" name="Rectangle 17"/>
-          <p:cNvSpPr/>
-          <p:nvPr/>
-        </p:nvSpPr>
-        <p:spPr>
-          <a:xfrm>
-            <a:off x="777240" y="5907024"/>
-            <a:ext cx="10637215" cy="9525"/>
-          </a:xfrm>
-          <a:prstGeom prst="rect">
-            <a:avLst/>
-          </a:prstGeom>
-          <a:solidFill>
-            <a:srgbClr val="D6D6D6"/>
-          </a:solidFill>
-          <a:ln>
-            <a:noFill/>
-          </a:ln>
-          <a:effectLst/>
-        </p:spPr>
-        <p:style>
-          <a:lnRef idx="1">
-            <a:schemeClr val="accent1"/>
-          </a:lnRef>
-          <a:fillRef idx="3">
-            <a:schemeClr val="accent1"/>
-          </a:fillRef>
-          <a:effectRef idx="2">
-            <a:schemeClr val="accent1"/>
-          </a:effectRef>
-          <a:fontRef idx="minor">
-            <a:schemeClr val="lt1"/>
-          </a:fontRef>
-        </p:style>
-        <p:txBody>
-          <a:bodyPr rtlCol="0" anchor="ctr"/>
-          <a:lstStyle/>
-          <a:p>
-            <a:pPr algn="ctr"/>
-          </a:p>
-        </p:txBody>
-      </p:sp>
-      <p:sp>
-        <p:nvSpPr>
-          <p:cNvPr id="19" name="TextBox 18"/>
           <p:cNvSpPr txBox="1"/>
           <p:nvPr/>
         </p:nvSpPr>
@@ -6265,14 +5622,14 @@
                 </a:solidFill>
                 <a:latin typeface="Roboto"/>
               </a:rPr>
-              <a:t>Repare que nenhuma linha diz decidir. Esse verbo continua sendo seu.</a:t>
-            </a:r>
-          </a:p>
-        </p:txBody>
-      </p:sp>
-      <p:sp>
-        <p:nvSpPr>
-          <p:cNvPr id="20" name="TextBox 19"/>
+              <a:t>A IA assumiu a execução. Não assumiu a responsabilidade pela escolha.</a:t>
+            </a:r>
+          </a:p>
+        </p:txBody>
+      </p:sp>
+      <p:sp>
+        <p:nvSpPr>
+          <p:cNvPr id="6" name="TextBox 5"/>
           <p:cNvSpPr txBox="1"/>
           <p:nvPr/>
         </p:nvSpPr>
@@ -6378,409 +5735,33 @@
           </a:p>
         </p:txBody>
       </p:sp>
-      <p:sp>
-        <p:nvSpPr>
-          <p:cNvPr id="3" name="Rectangle 2"/>
-          <p:cNvSpPr/>
-          <p:nvPr/>
-        </p:nvSpPr>
+      <p:pic>
+        <p:nvPicPr>
+          <p:cNvPr id="3" name="Picture 2" descr="09_funil.png"/>
+          <p:cNvPicPr>
+            <a:picLocks noChangeAspect="1"/>
+          </p:cNvPicPr>
+          <p:nvPr/>
+        </p:nvPicPr>
+        <p:blipFill>
+          <a:blip r:embed="rId2"/>
+          <a:stretch>
+            <a:fillRect/>
+          </a:stretch>
+        </p:blipFill>
         <p:spPr>
           <a:xfrm>
             <a:off x="777240" y="1920240"/>
-            <a:ext cx="5067147" cy="57150"/>
-          </a:xfrm>
-          <a:prstGeom prst="rect">
-            <a:avLst/>
-          </a:prstGeom>
-          <a:solidFill>
-            <a:srgbClr val="E0A100"/>
-          </a:solidFill>
-          <a:ln>
-            <a:noFill/>
-          </a:ln>
-          <a:effectLst/>
-        </p:spPr>
-        <p:style>
-          <a:lnRef idx="1">
-            <a:schemeClr val="accent1"/>
-          </a:lnRef>
-          <a:fillRef idx="3">
-            <a:schemeClr val="accent1"/>
-          </a:fillRef>
-          <a:effectRef idx="2">
-            <a:schemeClr val="accent1"/>
-          </a:effectRef>
-          <a:fontRef idx="minor">
-            <a:schemeClr val="lt1"/>
-          </a:fontRef>
-        </p:style>
-        <p:txBody>
-          <a:bodyPr rtlCol="0" anchor="ctr"/>
-          <a:lstStyle/>
-          <a:p>
-            <a:pPr algn="ctr"/>
-          </a:p>
-        </p:txBody>
-      </p:sp>
-      <p:sp>
-        <p:nvSpPr>
-          <p:cNvPr id="4" name="TextBox 3"/>
-          <p:cNvSpPr txBox="1"/>
-          <p:nvPr/>
-        </p:nvSpPr>
-        <p:spPr>
-          <a:xfrm>
-            <a:off x="777240" y="2121408"/>
-            <a:ext cx="5067147" cy="378659"/>
-          </a:xfrm>
-          <a:prstGeom prst="rect">
-            <a:avLst/>
-          </a:prstGeom>
-          <a:noFill/>
-        </p:spPr>
-        <p:txBody>
-          <a:bodyPr wrap="square" lIns="0" rIns="0" tIns="0" bIns="0">
-            <a:spAutoFit/>
-          </a:bodyPr>
-          <a:lstStyle/>
-          <a:p>
-            <a:pPr algn="l">
-              <a:lnSpc>
-                <a:spcPct val="106000"/>
-              </a:lnSpc>
-              <a:spcBef>
-                <a:spcPts val="0"/>
-              </a:spcBef>
-              <a:spcAft>
-                <a:spcPts val="0"/>
-              </a:spcAft>
-            </a:pPr>
-            <a:r>
-              <a:rPr sz="2400" b="1">
-                <a:solidFill>
-                  <a:srgbClr val="1E1E1E"/>
-                </a:solidFill>
-                <a:latin typeface="Roboto"/>
-              </a:rPr>
-              <a:t>O que melhorou</a:t>
-            </a:r>
-          </a:p>
-        </p:txBody>
-      </p:sp>
-      <p:sp>
-        <p:nvSpPr>
-          <p:cNvPr id="5" name="TextBox 4"/>
-          <p:cNvSpPr txBox="1"/>
-          <p:nvPr/>
-        </p:nvSpPr>
-        <p:spPr>
-          <a:xfrm>
-            <a:off x="777240" y="2737811"/>
-            <a:ext cx="5067147" cy="3022908"/>
-          </a:xfrm>
-          <a:prstGeom prst="rect">
-            <a:avLst/>
-          </a:prstGeom>
-          <a:noFill/>
-        </p:spPr>
-        <p:txBody>
-          <a:bodyPr wrap="square" lIns="0" rIns="0" tIns="0" bIns="0">
-            <a:spAutoFit/>
-          </a:bodyPr>
-          <a:lstStyle/>
-          <a:p>
-            <a:pPr algn="l">
-              <a:lnSpc>
-                <a:spcPct val="105000"/>
-              </a:lnSpc>
-              <a:spcBef>
-                <a:spcPts val="0"/>
-              </a:spcBef>
-              <a:spcAft>
-                <a:spcPts val="0"/>
-              </a:spcAft>
-            </a:pPr>
-            <a:r>
-              <a:rPr sz="2000" b="0">
-                <a:solidFill>
-                  <a:srgbClr val="1E1E1E"/>
-                </a:solidFill>
-                <a:latin typeface="Roboto"/>
-              </a:rPr>
-              <a:t>Decisão em minutos, não em semanas</a:t>
-            </a:r>
-          </a:p>
-          <a:p>
-            <a:pPr algn="l">
-              <a:lnSpc>
-                <a:spcPct val="105000"/>
-              </a:lnSpc>
-              <a:spcBef>
-                <a:spcPts val="1600"/>
-              </a:spcBef>
-              <a:spcAft>
-                <a:spcPts val="0"/>
-              </a:spcAft>
-            </a:pPr>
-            <a:r>
-              <a:rPr sz="2000" b="0">
-                <a:solidFill>
-                  <a:srgbClr val="1E1E1E"/>
-                </a:solidFill>
-                <a:latin typeface="Roboto"/>
-              </a:rPr>
-              <a:t>Painel no lugar do achismo</a:t>
-            </a:r>
-          </a:p>
-          <a:p>
-            <a:pPr algn="l">
-              <a:lnSpc>
-                <a:spcPct val="105000"/>
-              </a:lnSpc>
-              <a:spcBef>
-                <a:spcPts val="1600"/>
-              </a:spcBef>
-              <a:spcAft>
-                <a:spcPts val="0"/>
-              </a:spcAft>
-            </a:pPr>
-            <a:r>
-              <a:rPr sz="2000" b="0">
-                <a:solidFill>
-                  <a:srgbClr val="1E1E1E"/>
-                </a:solidFill>
-                <a:latin typeface="Roboto"/>
-              </a:rPr>
-              <a:t>Previsão no lugar do retrovisor</a:t>
-            </a:r>
-          </a:p>
-          <a:p>
-            <a:pPr algn="l">
-              <a:lnSpc>
-                <a:spcPct val="105000"/>
-              </a:lnSpc>
-              <a:spcBef>
-                <a:spcPts val="1600"/>
-              </a:spcBef>
-              <a:spcAft>
-                <a:spcPts val="0"/>
-              </a:spcAft>
-            </a:pPr>
-            <a:r>
-              <a:rPr sz="2000" b="0">
-                <a:solidFill>
-                  <a:srgbClr val="1E1E1E"/>
-                </a:solidFill>
-                <a:latin typeface="Roboto"/>
-              </a:rPr>
-              <a:t>A equipe inteira olhando o mesmo número</a:t>
-            </a:r>
-          </a:p>
-        </p:txBody>
-      </p:sp>
-      <p:sp>
-        <p:nvSpPr>
-          <p:cNvPr id="6" name="Rectangle 5"/>
-          <p:cNvSpPr/>
-          <p:nvPr/>
-        </p:nvSpPr>
-        <p:spPr>
-          <a:xfrm>
-            <a:off x="6347307" y="1920240"/>
-            <a:ext cx="5067147" cy="57150"/>
-          </a:xfrm>
-          <a:prstGeom prst="rect">
-            <a:avLst/>
-          </a:prstGeom>
-          <a:solidFill>
-            <a:srgbClr val="1E1E1E"/>
-          </a:solidFill>
-          <a:ln>
-            <a:noFill/>
-          </a:ln>
-          <a:effectLst/>
-        </p:spPr>
-        <p:style>
-          <a:lnRef idx="1">
-            <a:schemeClr val="accent1"/>
-          </a:lnRef>
-          <a:fillRef idx="3">
-            <a:schemeClr val="accent1"/>
-          </a:fillRef>
-          <a:effectRef idx="2">
-            <a:schemeClr val="accent1"/>
-          </a:effectRef>
-          <a:fontRef idx="minor">
-            <a:schemeClr val="lt1"/>
-          </a:fontRef>
-        </p:style>
-        <p:txBody>
-          <a:bodyPr rtlCol="0" anchor="ctr"/>
-          <a:lstStyle/>
-          <a:p>
-            <a:pPr algn="ctr"/>
-          </a:p>
-        </p:txBody>
-      </p:sp>
-      <p:sp>
-        <p:nvSpPr>
-          <p:cNvPr id="7" name="TextBox 6"/>
-          <p:cNvSpPr txBox="1"/>
-          <p:nvPr/>
-        </p:nvSpPr>
-        <p:spPr>
-          <a:xfrm>
-            <a:off x="6347307" y="2121408"/>
-            <a:ext cx="5067147" cy="378659"/>
-          </a:xfrm>
-          <a:prstGeom prst="rect">
-            <a:avLst/>
-          </a:prstGeom>
-          <a:noFill/>
-        </p:spPr>
-        <p:txBody>
-          <a:bodyPr wrap="square" lIns="0" rIns="0" tIns="0" bIns="0">
-            <a:spAutoFit/>
-          </a:bodyPr>
-          <a:lstStyle/>
-          <a:p>
-            <a:pPr algn="l">
-              <a:lnSpc>
-                <a:spcPct val="106000"/>
-              </a:lnSpc>
-              <a:spcBef>
-                <a:spcPts val="0"/>
-              </a:spcBef>
-              <a:spcAft>
-                <a:spcPts val="0"/>
-              </a:spcAft>
-            </a:pPr>
-            <a:r>
-              <a:rPr sz="2400" b="1">
-                <a:solidFill>
-                  <a:srgbClr val="1E1E1E"/>
-                </a:solidFill>
-                <a:latin typeface="Roboto"/>
-              </a:rPr>
-              <a:t>O risco novo</a:t>
-            </a:r>
-          </a:p>
-        </p:txBody>
-      </p:sp>
-      <p:sp>
-        <p:nvSpPr>
-          <p:cNvPr id="8" name="TextBox 7"/>
-          <p:cNvSpPr txBox="1"/>
-          <p:nvPr/>
-        </p:nvSpPr>
-        <p:spPr>
-          <a:xfrm>
-            <a:off x="6347307" y="2737811"/>
-            <a:ext cx="5067147" cy="3022908"/>
-          </a:xfrm>
-          <a:prstGeom prst="rect">
-            <a:avLst/>
-          </a:prstGeom>
-          <a:noFill/>
-        </p:spPr>
-        <p:txBody>
-          <a:bodyPr wrap="square" lIns="0" rIns="0" tIns="0" bIns="0">
-            <a:spAutoFit/>
-          </a:bodyPr>
-          <a:lstStyle/>
-          <a:p>
-            <a:pPr algn="l">
-              <a:lnSpc>
-                <a:spcPct val="105000"/>
-              </a:lnSpc>
-              <a:spcBef>
-                <a:spcPts val="0"/>
-              </a:spcBef>
-              <a:spcAft>
-                <a:spcPts val="0"/>
-              </a:spcAft>
-            </a:pPr>
-            <a:r>
-              <a:rPr sz="2000" b="0">
-                <a:solidFill>
-                  <a:srgbClr val="1E1E1E"/>
-                </a:solidFill>
-                <a:latin typeface="Roboto"/>
-              </a:rPr>
-              <a:t>Errar mais rápido e em escala</a:t>
-            </a:r>
-          </a:p>
-          <a:p>
-            <a:pPr algn="l">
-              <a:lnSpc>
-                <a:spcPct val="105000"/>
-              </a:lnSpc>
-              <a:spcBef>
-                <a:spcPts val="1600"/>
-              </a:spcBef>
-              <a:spcAft>
-                <a:spcPts val="0"/>
-              </a:spcAft>
-            </a:pPr>
-            <a:r>
-              <a:rPr sz="2000" b="0">
-                <a:solidFill>
-                  <a:srgbClr val="1E1E1E"/>
-                </a:solidFill>
-                <a:latin typeface="Roboto"/>
-              </a:rPr>
-              <a:t>Um gráfico bonito provando o que você já queria</a:t>
-            </a:r>
-          </a:p>
-          <a:p>
-            <a:pPr algn="l">
-              <a:lnSpc>
-                <a:spcPct val="105000"/>
-              </a:lnSpc>
-              <a:spcBef>
-                <a:spcPts val="1600"/>
-              </a:spcBef>
-              <a:spcAft>
-                <a:spcPts val="0"/>
-              </a:spcAft>
-            </a:pPr>
-            <a:r>
-              <a:rPr sz="2000" b="0">
-                <a:solidFill>
-                  <a:srgbClr val="1E1E1E"/>
-                </a:solidFill>
-                <a:latin typeface="Roboto"/>
-              </a:rPr>
-              <a:t>Dado velho, incompleto ou enviesado</a:t>
-            </a:r>
-          </a:p>
-          <a:p>
-            <a:pPr algn="l">
-              <a:lnSpc>
-                <a:spcPct val="105000"/>
-              </a:lnSpc>
-              <a:spcBef>
-                <a:spcPts val="1600"/>
-              </a:spcBef>
-              <a:spcAft>
-                <a:spcPts val="0"/>
-              </a:spcAft>
-            </a:pPr>
-            <a:r>
-              <a:rPr sz="2000" b="0">
-                <a:solidFill>
-                  <a:srgbClr val="1E1E1E"/>
-                </a:solidFill>
-                <a:latin typeface="Roboto"/>
-              </a:rPr>
-              <a:t>Ninguém sabe explicar de onde veio o número</a:t>
-            </a:r>
-          </a:p>
-        </p:txBody>
-      </p:sp>
-      <p:sp>
-        <p:nvSpPr>
-          <p:cNvPr id="9" name="Rectangle 8"/>
+            <a:ext cx="10637215" cy="3840479"/>
+          </a:xfrm>
+          <a:prstGeom prst="rect">
+            <a:avLst/>
+          </a:prstGeom>
+        </p:spPr>
+      </p:pic>
+      <p:sp>
+        <p:nvSpPr>
+          <p:cNvPr id="4" name="Rectangle 3"/>
           <p:cNvSpPr/>
           <p:nvPr/>
         </p:nvSpPr>
@@ -6824,7 +5805,7 @@
       </p:sp>
       <p:sp>
         <p:nvSpPr>
-          <p:cNvPr id="10" name="TextBox 9"/>
+          <p:cNvPr id="5" name="TextBox 4"/>
           <p:cNvSpPr txBox="1"/>
           <p:nvPr/>
         </p:nvSpPr>
@@ -6862,14 +5843,14 @@
                 </a:solidFill>
                 <a:latin typeface="Roboto"/>
               </a:rPr>
-              <a:t>Antes de decidir: de onde veio o dado, quem ficou de fora, e se ele estiver errado?</a:t>
-            </a:r>
-          </a:p>
-        </p:txBody>
-      </p:sp>
-      <p:sp>
-        <p:nvSpPr>
-          <p:cNvPr id="11" name="TextBox 10"/>
+              <a:t>Com IA dá para errar mais rápido, em escala, e com um gráfico bonito provando.</a:t>
+            </a:r>
+          </a:p>
+        </p:txBody>
+      </p:sp>
+      <p:sp>
+        <p:nvSpPr>
+          <p:cNvPr id="6" name="TextBox 5"/>
           <p:cNvSpPr txBox="1"/>
           <p:nvPr/>
         </p:nvSpPr>
@@ -6975,15 +5956,39 @@
           </a:p>
         </p:txBody>
       </p:sp>
-      <p:sp>
-        <p:nvSpPr>
-          <p:cNvPr id="3" name="Rectangle 2"/>
+      <p:pic>
+        <p:nvPicPr>
+          <p:cNvPr id="3" name="Picture 2" descr="10_agro.png"/>
+          <p:cNvPicPr>
+            <a:picLocks noChangeAspect="1"/>
+          </p:cNvPicPr>
+          <p:nvPr/>
+        </p:nvPicPr>
+        <p:blipFill>
+          <a:blip r:embed="rId2"/>
+          <a:stretch>
+            <a:fillRect/>
+          </a:stretch>
+        </p:blipFill>
+        <p:spPr>
+          <a:xfrm>
+            <a:off x="777240" y="1920240"/>
+            <a:ext cx="10637215" cy="3840479"/>
+          </a:xfrm>
+          <a:prstGeom prst="rect">
+            <a:avLst/>
+          </a:prstGeom>
+        </p:spPr>
+      </p:pic>
+      <p:sp>
+        <p:nvSpPr>
+          <p:cNvPr id="4" name="Rectangle 3"/>
           <p:cNvSpPr/>
           <p:nvPr/>
         </p:nvSpPr>
         <p:spPr>
           <a:xfrm>
-            <a:off x="777240" y="1783080"/>
+            <a:off x="777240" y="5907024"/>
             <a:ext cx="10637215" cy="9525"/>
           </a:xfrm>
           <a:prstGeom prst="rect">
@@ -7021,543 +6026,7 @@
       </p:sp>
       <p:sp>
         <p:nvSpPr>
-          <p:cNvPr id="4" name="TextBox 3"/>
-          <p:cNvSpPr txBox="1"/>
-          <p:nvPr/>
-        </p:nvSpPr>
-        <p:spPr>
-          <a:xfrm>
-            <a:off x="777240" y="1920240"/>
-            <a:ext cx="3383280" cy="868679"/>
-          </a:xfrm>
-          <a:prstGeom prst="rect">
-            <a:avLst/>
-          </a:prstGeom>
-          <a:noFill/>
-        </p:spPr>
-        <p:txBody>
-          <a:bodyPr wrap="square" lIns="0" rIns="0" tIns="0" bIns="0">
-            <a:spAutoFit/>
-          </a:bodyPr>
-          <a:lstStyle/>
-          <a:p>
-            <a:pPr algn="l">
-              <a:lnSpc>
-                <a:spcPct val="105000"/>
-              </a:lnSpc>
-              <a:spcBef>
-                <a:spcPts val="0"/>
-              </a:spcBef>
-              <a:spcAft>
-                <a:spcPts val="0"/>
-              </a:spcAft>
-            </a:pPr>
-            <a:r>
-              <a:rPr sz="2100" b="1">
-                <a:solidFill>
-                  <a:srgbClr val="1E1E1E"/>
-                </a:solidFill>
-                <a:latin typeface="Roboto"/>
-              </a:rPr>
-              <a:t>Satélite e drone</a:t>
-            </a:r>
-          </a:p>
-        </p:txBody>
-      </p:sp>
-      <p:sp>
-        <p:nvSpPr>
           <p:cNvPr id="5" name="TextBox 4"/>
-          <p:cNvSpPr txBox="1"/>
-          <p:nvPr/>
-        </p:nvSpPr>
-        <p:spPr>
-          <a:xfrm>
-            <a:off x="4480559" y="1920240"/>
-            <a:ext cx="6933895" cy="868679"/>
-          </a:xfrm>
-          <a:prstGeom prst="rect">
-            <a:avLst/>
-          </a:prstGeom>
-          <a:noFill/>
-        </p:spPr>
-        <p:txBody>
-          <a:bodyPr wrap="square" lIns="0" rIns="0" tIns="0" bIns="0">
-            <a:spAutoFit/>
-          </a:bodyPr>
-          <a:lstStyle/>
-          <a:p>
-            <a:pPr algn="l">
-              <a:lnSpc>
-                <a:spcPct val="105000"/>
-              </a:lnSpc>
-              <a:spcBef>
-                <a:spcPts val="0"/>
-              </a:spcBef>
-              <a:spcAft>
-                <a:spcPts val="0"/>
-              </a:spcAft>
-            </a:pPr>
-            <a:r>
-              <a:rPr sz="2100" b="0">
-                <a:solidFill>
-                  <a:srgbClr val="1E1E1E"/>
-                </a:solidFill>
-                <a:latin typeface="Roboto"/>
-              </a:rPr>
-              <a:t>Mapa de produtividade por talhão, detecção de falha e de praga</a:t>
-            </a:r>
-          </a:p>
-        </p:txBody>
-      </p:sp>
-      <p:sp>
-        <p:nvSpPr>
-          <p:cNvPr id="6" name="Rectangle 5"/>
-          <p:cNvSpPr/>
-          <p:nvPr/>
-        </p:nvSpPr>
-        <p:spPr>
-          <a:xfrm>
-            <a:off x="777240" y="2765145"/>
-            <a:ext cx="10637215" cy="9525"/>
-          </a:xfrm>
-          <a:prstGeom prst="rect">
-            <a:avLst/>
-          </a:prstGeom>
-          <a:solidFill>
-            <a:srgbClr val="D6D6D6"/>
-          </a:solidFill>
-          <a:ln>
-            <a:noFill/>
-          </a:ln>
-          <a:effectLst/>
-        </p:spPr>
-        <p:style>
-          <a:lnRef idx="1">
-            <a:schemeClr val="accent1"/>
-          </a:lnRef>
-          <a:fillRef idx="3">
-            <a:schemeClr val="accent1"/>
-          </a:fillRef>
-          <a:effectRef idx="2">
-            <a:schemeClr val="accent1"/>
-          </a:effectRef>
-          <a:fontRef idx="minor">
-            <a:schemeClr val="lt1"/>
-          </a:fontRef>
-        </p:style>
-        <p:txBody>
-          <a:bodyPr rtlCol="0" anchor="ctr"/>
-          <a:lstStyle/>
-          <a:p>
-            <a:pPr algn="ctr"/>
-          </a:p>
-        </p:txBody>
-      </p:sp>
-      <p:sp>
-        <p:nvSpPr>
-          <p:cNvPr id="7" name="TextBox 6"/>
-          <p:cNvSpPr txBox="1"/>
-          <p:nvPr/>
-        </p:nvSpPr>
-        <p:spPr>
-          <a:xfrm>
-            <a:off x="777240" y="2880360"/>
-            <a:ext cx="3383280" cy="868679"/>
-          </a:xfrm>
-          <a:prstGeom prst="rect">
-            <a:avLst/>
-          </a:prstGeom>
-          <a:noFill/>
-        </p:spPr>
-        <p:txBody>
-          <a:bodyPr wrap="square" lIns="0" rIns="0" tIns="0" bIns="0">
-            <a:spAutoFit/>
-          </a:bodyPr>
-          <a:lstStyle/>
-          <a:p>
-            <a:pPr algn="l">
-              <a:lnSpc>
-                <a:spcPct val="105000"/>
-              </a:lnSpc>
-              <a:spcBef>
-                <a:spcPts val="0"/>
-              </a:spcBef>
-              <a:spcAft>
-                <a:spcPts val="0"/>
-              </a:spcAft>
-            </a:pPr>
-            <a:r>
-              <a:rPr sz="2100" b="1">
-                <a:solidFill>
-                  <a:srgbClr val="1E1E1E"/>
-                </a:solidFill>
-                <a:latin typeface="Roboto"/>
-              </a:rPr>
-              <a:t>Previsão</a:t>
-            </a:r>
-          </a:p>
-        </p:txBody>
-      </p:sp>
-      <p:sp>
-        <p:nvSpPr>
-          <p:cNvPr id="8" name="TextBox 7"/>
-          <p:cNvSpPr txBox="1"/>
-          <p:nvPr/>
-        </p:nvSpPr>
-        <p:spPr>
-          <a:xfrm>
-            <a:off x="4480559" y="2880360"/>
-            <a:ext cx="6933895" cy="868679"/>
-          </a:xfrm>
-          <a:prstGeom prst="rect">
-            <a:avLst/>
-          </a:prstGeom>
-          <a:noFill/>
-        </p:spPr>
-        <p:txBody>
-          <a:bodyPr wrap="square" lIns="0" rIns="0" tIns="0" bIns="0">
-            <a:spAutoFit/>
-          </a:bodyPr>
-          <a:lstStyle/>
-          <a:p>
-            <a:pPr algn="l">
-              <a:lnSpc>
-                <a:spcPct val="105000"/>
-              </a:lnSpc>
-              <a:spcBef>
-                <a:spcPts val="0"/>
-              </a:spcBef>
-              <a:spcAft>
-                <a:spcPts val="0"/>
-              </a:spcAft>
-            </a:pPr>
-            <a:r>
-              <a:rPr sz="2100" b="0">
-                <a:solidFill>
-                  <a:srgbClr val="1E1E1E"/>
-                </a:solidFill>
-                <a:latin typeface="Roboto"/>
-              </a:rPr>
-              <a:t>Clima e safra: quando plantar, quando colher, quanto esperar</a:t>
-            </a:r>
-          </a:p>
-        </p:txBody>
-      </p:sp>
-      <p:sp>
-        <p:nvSpPr>
-          <p:cNvPr id="9" name="Rectangle 8"/>
-          <p:cNvSpPr/>
-          <p:nvPr/>
-        </p:nvSpPr>
-        <p:spPr>
-          <a:xfrm>
-            <a:off x="777240" y="3725265"/>
-            <a:ext cx="10637215" cy="9525"/>
-          </a:xfrm>
-          <a:prstGeom prst="rect">
-            <a:avLst/>
-          </a:prstGeom>
-          <a:solidFill>
-            <a:srgbClr val="D6D6D6"/>
-          </a:solidFill>
-          <a:ln>
-            <a:noFill/>
-          </a:ln>
-          <a:effectLst/>
-        </p:spPr>
-        <p:style>
-          <a:lnRef idx="1">
-            <a:schemeClr val="accent1"/>
-          </a:lnRef>
-          <a:fillRef idx="3">
-            <a:schemeClr val="accent1"/>
-          </a:fillRef>
-          <a:effectRef idx="2">
-            <a:schemeClr val="accent1"/>
-          </a:effectRef>
-          <a:fontRef idx="minor">
-            <a:schemeClr val="lt1"/>
-          </a:fontRef>
-        </p:style>
-        <p:txBody>
-          <a:bodyPr rtlCol="0" anchor="ctr"/>
-          <a:lstStyle/>
-          <a:p>
-            <a:pPr algn="ctr"/>
-          </a:p>
-        </p:txBody>
-      </p:sp>
-      <p:sp>
-        <p:nvSpPr>
-          <p:cNvPr id="10" name="TextBox 9"/>
-          <p:cNvSpPr txBox="1"/>
-          <p:nvPr/>
-        </p:nvSpPr>
-        <p:spPr>
-          <a:xfrm>
-            <a:off x="777240" y="3840479"/>
-            <a:ext cx="3383280" cy="868679"/>
-          </a:xfrm>
-          <a:prstGeom prst="rect">
-            <a:avLst/>
-          </a:prstGeom>
-          <a:noFill/>
-        </p:spPr>
-        <p:txBody>
-          <a:bodyPr wrap="square" lIns="0" rIns="0" tIns="0" bIns="0">
-            <a:spAutoFit/>
-          </a:bodyPr>
-          <a:lstStyle/>
-          <a:p>
-            <a:pPr algn="l">
-              <a:lnSpc>
-                <a:spcPct val="105000"/>
-              </a:lnSpc>
-              <a:spcBef>
-                <a:spcPts val="0"/>
-              </a:spcBef>
-              <a:spcAft>
-                <a:spcPts val="0"/>
-              </a:spcAft>
-            </a:pPr>
-            <a:r>
-              <a:rPr sz="2100" b="1">
-                <a:solidFill>
-                  <a:srgbClr val="1E1E1E"/>
-                </a:solidFill>
-                <a:latin typeface="Roboto"/>
-              </a:rPr>
-              <a:t>Sensor e irrigação</a:t>
-            </a:r>
-          </a:p>
-        </p:txBody>
-      </p:sp>
-      <p:sp>
-        <p:nvSpPr>
-          <p:cNvPr id="11" name="TextBox 10"/>
-          <p:cNvSpPr txBox="1"/>
-          <p:nvPr/>
-        </p:nvSpPr>
-        <p:spPr>
-          <a:xfrm>
-            <a:off x="4480559" y="3840479"/>
-            <a:ext cx="6933895" cy="868679"/>
-          </a:xfrm>
-          <a:prstGeom prst="rect">
-            <a:avLst/>
-          </a:prstGeom>
-          <a:noFill/>
-        </p:spPr>
-        <p:txBody>
-          <a:bodyPr wrap="square" lIns="0" rIns="0" tIns="0" bIns="0">
-            <a:spAutoFit/>
-          </a:bodyPr>
-          <a:lstStyle/>
-          <a:p>
-            <a:pPr algn="l">
-              <a:lnSpc>
-                <a:spcPct val="105000"/>
-              </a:lnSpc>
-              <a:spcBef>
-                <a:spcPts val="0"/>
-              </a:spcBef>
-              <a:spcAft>
-                <a:spcPts val="0"/>
-              </a:spcAft>
-            </a:pPr>
-            <a:r>
-              <a:rPr sz="2100" b="0">
-                <a:solidFill>
-                  <a:srgbClr val="1E1E1E"/>
-                </a:solidFill>
-                <a:latin typeface="Roboto"/>
-              </a:rPr>
-              <a:t>Água e insumo na dose certa, no ponto certo da lavoura</a:t>
-            </a:r>
-          </a:p>
-        </p:txBody>
-      </p:sp>
-      <p:sp>
-        <p:nvSpPr>
-          <p:cNvPr id="12" name="Rectangle 11"/>
-          <p:cNvSpPr/>
-          <p:nvPr/>
-        </p:nvSpPr>
-        <p:spPr>
-          <a:xfrm>
-            <a:off x="777240" y="4685385"/>
-            <a:ext cx="10637215" cy="9525"/>
-          </a:xfrm>
-          <a:prstGeom prst="rect">
-            <a:avLst/>
-          </a:prstGeom>
-          <a:solidFill>
-            <a:srgbClr val="D6D6D6"/>
-          </a:solidFill>
-          <a:ln>
-            <a:noFill/>
-          </a:ln>
-          <a:effectLst/>
-        </p:spPr>
-        <p:style>
-          <a:lnRef idx="1">
-            <a:schemeClr val="accent1"/>
-          </a:lnRef>
-          <a:fillRef idx="3">
-            <a:schemeClr val="accent1"/>
-          </a:fillRef>
-          <a:effectRef idx="2">
-            <a:schemeClr val="accent1"/>
-          </a:effectRef>
-          <a:fontRef idx="minor">
-            <a:schemeClr val="lt1"/>
-          </a:fontRef>
-        </p:style>
-        <p:txBody>
-          <a:bodyPr rtlCol="0" anchor="ctr"/>
-          <a:lstStyle/>
-          <a:p>
-            <a:pPr algn="ctr"/>
-          </a:p>
-        </p:txBody>
-      </p:sp>
-      <p:sp>
-        <p:nvSpPr>
-          <p:cNvPr id="13" name="TextBox 12"/>
-          <p:cNvSpPr txBox="1"/>
-          <p:nvPr/>
-        </p:nvSpPr>
-        <p:spPr>
-          <a:xfrm>
-            <a:off x="777240" y="4800599"/>
-            <a:ext cx="3383280" cy="868679"/>
-          </a:xfrm>
-          <a:prstGeom prst="rect">
-            <a:avLst/>
-          </a:prstGeom>
-          <a:noFill/>
-        </p:spPr>
-        <p:txBody>
-          <a:bodyPr wrap="square" lIns="0" rIns="0" tIns="0" bIns="0">
-            <a:spAutoFit/>
-          </a:bodyPr>
-          <a:lstStyle/>
-          <a:p>
-            <a:pPr algn="l">
-              <a:lnSpc>
-                <a:spcPct val="105000"/>
-              </a:lnSpc>
-              <a:spcBef>
-                <a:spcPts val="0"/>
-              </a:spcBef>
-              <a:spcAft>
-                <a:spcPts val="0"/>
-              </a:spcAft>
-            </a:pPr>
-            <a:r>
-              <a:rPr sz="2100" b="1">
-                <a:solidFill>
-                  <a:srgbClr val="1E1E1E"/>
-                </a:solidFill>
-                <a:latin typeface="Roboto"/>
-              </a:rPr>
-              <a:t>Mercado</a:t>
-            </a:r>
-          </a:p>
-        </p:txBody>
-      </p:sp>
-      <p:sp>
-        <p:nvSpPr>
-          <p:cNvPr id="14" name="TextBox 13"/>
-          <p:cNvSpPr txBox="1"/>
-          <p:nvPr/>
-        </p:nvSpPr>
-        <p:spPr>
-          <a:xfrm>
-            <a:off x="4480559" y="4800599"/>
-            <a:ext cx="6933895" cy="868679"/>
-          </a:xfrm>
-          <a:prstGeom prst="rect">
-            <a:avLst/>
-          </a:prstGeom>
-          <a:noFill/>
-        </p:spPr>
-        <p:txBody>
-          <a:bodyPr wrap="square" lIns="0" rIns="0" tIns="0" bIns="0">
-            <a:spAutoFit/>
-          </a:bodyPr>
-          <a:lstStyle/>
-          <a:p>
-            <a:pPr algn="l">
-              <a:lnSpc>
-                <a:spcPct val="105000"/>
-              </a:lnSpc>
-              <a:spcBef>
-                <a:spcPts val="0"/>
-              </a:spcBef>
-              <a:spcAft>
-                <a:spcPts val="0"/>
-              </a:spcAft>
-            </a:pPr>
-            <a:r>
-              <a:rPr sz="2100" b="0">
-                <a:solidFill>
-                  <a:srgbClr val="1E1E1E"/>
-                </a:solidFill>
-                <a:latin typeface="Roboto"/>
-              </a:rPr>
-              <a:t>Tendência de preço de grão e de boi para decidir a hora de vender</a:t>
-            </a:r>
-          </a:p>
-        </p:txBody>
-      </p:sp>
-      <p:sp>
-        <p:nvSpPr>
-          <p:cNvPr id="15" name="Rectangle 14"/>
-          <p:cNvSpPr/>
-          <p:nvPr/>
-        </p:nvSpPr>
-        <p:spPr>
-          <a:xfrm>
-            <a:off x="777240" y="5907024"/>
-            <a:ext cx="10637215" cy="9525"/>
-          </a:xfrm>
-          <a:prstGeom prst="rect">
-            <a:avLst/>
-          </a:prstGeom>
-          <a:solidFill>
-            <a:srgbClr val="D6D6D6"/>
-          </a:solidFill>
-          <a:ln>
-            <a:noFill/>
-          </a:ln>
-          <a:effectLst/>
-        </p:spPr>
-        <p:style>
-          <a:lnRef idx="1">
-            <a:schemeClr val="accent1"/>
-          </a:lnRef>
-          <a:fillRef idx="3">
-            <a:schemeClr val="accent1"/>
-          </a:fillRef>
-          <a:effectRef idx="2">
-            <a:schemeClr val="accent1"/>
-          </a:effectRef>
-          <a:fontRef idx="minor">
-            <a:schemeClr val="lt1"/>
-          </a:fontRef>
-        </p:style>
-        <p:txBody>
-          <a:bodyPr rtlCol="0" anchor="ctr"/>
-          <a:lstStyle/>
-          <a:p>
-            <a:pPr algn="ctr"/>
-          </a:p>
-        </p:txBody>
-      </p:sp>
-      <p:sp>
-        <p:nvSpPr>
-          <p:cNvPr id="16" name="TextBox 15"/>
           <p:cNvSpPr txBox="1"/>
           <p:nvPr/>
         </p:nvSpPr>
@@ -7602,7 +6071,7 @@
       </p:sp>
       <p:sp>
         <p:nvSpPr>
-          <p:cNvPr id="17" name="TextBox 16"/>
+          <p:cNvPr id="6" name="TextBox 5"/>
           <p:cNvSpPr txBox="1"/>
           <p:nvPr/>
         </p:nvSpPr>
@@ -12455,201 +10924,70 @@
         </p:nvSpPr>
         <p:spPr>
           <a:xfrm>
-            <a:off x="777240" y="713232"/>
-            <a:ext cx="10637215" cy="2103120"/>
-          </a:xfrm>
-          <a:prstGeom prst="rect">
-            <a:avLst/>
-          </a:prstGeom>
-          <a:noFill/>
-        </p:spPr>
-        <p:txBody>
-          <a:bodyPr wrap="square" lIns="0" rIns="0" tIns="0" bIns="0">
-            <a:spAutoFit/>
-          </a:bodyPr>
-          <a:lstStyle/>
-          <a:p>
-            <a:pPr algn="l">
-              <a:lnSpc>
-                <a:spcPct val="106000"/>
-              </a:lnSpc>
-              <a:spcBef>
-                <a:spcPts val="0"/>
-              </a:spcBef>
-              <a:spcAft>
-                <a:spcPts val="0"/>
-              </a:spcAft>
-            </a:pPr>
-            <a:r>
-              <a:rPr sz="4400" b="1">
+            <a:off x="777240" y="411480"/>
+            <a:ext cx="10637215" cy="1325880"/>
+          </a:xfrm>
+          <a:prstGeom prst="rect">
+            <a:avLst/>
+          </a:prstGeom>
+          <a:noFill/>
+        </p:spPr>
+        <p:txBody>
+          <a:bodyPr wrap="square" lIns="0" rIns="0" tIns="0" bIns="0">
+            <a:spAutoFit/>
+          </a:bodyPr>
+          <a:lstStyle/>
+          <a:p>
+            <a:pPr algn="l">
+              <a:lnSpc>
+                <a:spcPct val="104000"/>
+              </a:lnSpc>
+              <a:spcBef>
+                <a:spcPts val="0"/>
+              </a:spcBef>
+              <a:spcAft>
+                <a:spcPts val="0"/>
+              </a:spcAft>
+            </a:pPr>
+            <a:r>
+              <a:rPr sz="4000" b="1">
                 <a:solidFill>
                   <a:srgbClr val="1E1E1E"/>
                 </a:solidFill>
                 <a:latin typeface="Roboto"/>
               </a:rPr>
-              <a:t>A mudança do administrador</a:t>
-            </a:r>
-          </a:p>
-          <a:p>
-            <a:pPr algn="l">
-              <a:lnSpc>
-                <a:spcPct val="106000"/>
-              </a:lnSpc>
-              <a:spcBef>
-                <a:spcPts val="0"/>
-              </a:spcBef>
-              <a:spcAft>
-                <a:spcPts val="0"/>
-              </a:spcAft>
-            </a:pPr>
-            <a:r>
-              <a:rPr sz="4400" b="1">
-                <a:solidFill>
-                  <a:srgbClr val="1E1E1E"/>
-                </a:solidFill>
-                <a:latin typeface="Roboto"/>
-              </a:rPr>
-              <a:t>começa na mudança da universidade.</a:t>
-            </a:r>
-          </a:p>
-        </p:txBody>
-      </p:sp>
-      <p:sp>
-        <p:nvSpPr>
-          <p:cNvPr id="3" name="Rectangle 2"/>
-          <p:cNvSpPr/>
-          <p:nvPr/>
-        </p:nvSpPr>
-        <p:spPr>
-          <a:xfrm>
-            <a:off x="777240" y="2944368"/>
-            <a:ext cx="2743200" cy="44450"/>
-          </a:xfrm>
-          <a:prstGeom prst="rect">
-            <a:avLst/>
-          </a:prstGeom>
-          <a:solidFill>
-            <a:srgbClr val="E0A100"/>
-          </a:solidFill>
-          <a:ln>
-            <a:noFill/>
-          </a:ln>
-          <a:effectLst/>
-        </p:spPr>
-        <p:style>
-          <a:lnRef idx="1">
-            <a:schemeClr val="accent1"/>
-          </a:lnRef>
-          <a:fillRef idx="3">
-            <a:schemeClr val="accent1"/>
-          </a:fillRef>
-          <a:effectRef idx="2">
-            <a:schemeClr val="accent1"/>
-          </a:effectRef>
-          <a:fontRef idx="minor">
-            <a:schemeClr val="lt1"/>
-          </a:fontRef>
-        </p:style>
-        <p:txBody>
-          <a:bodyPr rtlCol="0" anchor="ctr"/>
-          <a:lstStyle/>
-          <a:p>
-            <a:pPr algn="ctr"/>
-          </a:p>
-        </p:txBody>
-      </p:sp>
-      <p:sp>
-        <p:nvSpPr>
-          <p:cNvPr id="4" name="TextBox 3"/>
-          <p:cNvSpPr txBox="1"/>
-          <p:nvPr/>
-        </p:nvSpPr>
-        <p:spPr>
-          <a:xfrm>
-            <a:off x="777240" y="3310128"/>
-            <a:ext cx="10637215" cy="2450591"/>
-          </a:xfrm>
-          <a:prstGeom prst="rect">
-            <a:avLst/>
-          </a:prstGeom>
-          <a:noFill/>
-        </p:spPr>
-        <p:txBody>
-          <a:bodyPr wrap="square" lIns="0" rIns="0" tIns="0" bIns="0">
-            <a:spAutoFit/>
-          </a:bodyPr>
-          <a:lstStyle/>
-          <a:p>
-            <a:pPr algn="l">
-              <a:lnSpc>
-                <a:spcPct val="105000"/>
-              </a:lnSpc>
-              <a:spcBef>
-                <a:spcPts val="0"/>
-              </a:spcBef>
-              <a:spcAft>
-                <a:spcPts val="0"/>
-              </a:spcAft>
-            </a:pPr>
-            <a:r>
-              <a:rPr sz="2400" b="0">
-                <a:solidFill>
-                  <a:srgbClr val="1E1E1E"/>
-                </a:solidFill>
-                <a:latin typeface="Roboto"/>
-              </a:rPr>
-              <a:t>Ninguém se transforma sozinho. A pessoa chega pronta do curso que fez, ou não chega.</a:t>
-            </a:r>
-          </a:p>
-          <a:p>
-            <a:pPr algn="l">
-              <a:lnSpc>
-                <a:spcPct val="105000"/>
-              </a:lnSpc>
-              <a:spcBef>
-                <a:spcPts val="1800"/>
-              </a:spcBef>
-              <a:spcAft>
-                <a:spcPts val="0"/>
-              </a:spcAft>
-            </a:pPr>
-            <a:r>
-              <a:rPr sz="2400" b="0">
-                <a:solidFill>
-                  <a:srgbClr val="1E1E1E"/>
-                </a:solidFill>
-                <a:latin typeface="Roboto"/>
-              </a:rPr>
-              <a:t>Se a universidade formar para a tarefa que a máquina já faz, entrega gente desatualizada no dia da formatura.</a:t>
-            </a:r>
-          </a:p>
-          <a:p>
-            <a:pPr algn="l">
-              <a:lnSpc>
-                <a:spcPct val="105000"/>
-              </a:lnSpc>
-              <a:spcBef>
-                <a:spcPts val="1800"/>
-              </a:spcBef>
-              <a:spcAft>
-                <a:spcPts val="0"/>
-              </a:spcAft>
-            </a:pPr>
-            <a:r>
-              <a:rPr sz="2400" b="0">
-                <a:solidFill>
-                  <a:srgbClr val="1E1E1E"/>
-                </a:solidFill>
-                <a:latin typeface="Roboto"/>
-              </a:rPr>
-              <a:t>A transformação do mercado começa quatro anos antes, aqui dentro.</a:t>
-            </a:r>
-          </a:p>
-        </p:txBody>
-      </p:sp>
-      <p:sp>
-        <p:nvSpPr>
-          <p:cNvPr id="5" name="Rectangle 4"/>
+              <a:t>Doze meses de IA escrevendo código em produção</a:t>
+            </a:r>
+          </a:p>
+        </p:txBody>
+      </p:sp>
+      <p:pic>
+        <p:nvPicPr>
+          <p:cNvPr id="3" name="Picture 2" descr="11_juniores.png"/>
+          <p:cNvPicPr>
+            <a:picLocks noChangeAspect="1"/>
+          </p:cNvPicPr>
+          <p:nvPr/>
+        </p:nvPicPr>
+        <p:blipFill>
+          <a:blip r:embed="rId2"/>
+          <a:stretch>
+            <a:fillRect/>
+          </a:stretch>
+        </p:blipFill>
+        <p:spPr>
+          <a:xfrm>
+            <a:off x="777240" y="1920240"/>
+            <a:ext cx="10637215" cy="3840479"/>
+          </a:xfrm>
+          <a:prstGeom prst="rect">
+            <a:avLst/>
+          </a:prstGeom>
+        </p:spPr>
+      </p:pic>
+      <p:sp>
+        <p:nvSpPr>
+          <p:cNvPr id="4" name="Rectangle 3"/>
           <p:cNvSpPr/>
           <p:nvPr/>
         </p:nvSpPr>
@@ -12693,7 +11031,7 @@
       </p:sp>
       <p:sp>
         <p:nvSpPr>
-          <p:cNvPr id="6" name="TextBox 5"/>
+          <p:cNvPr id="5" name="TextBox 4"/>
           <p:cNvSpPr txBox="1"/>
           <p:nvPr/>
         </p:nvSpPr>
@@ -12725,20 +11063,20 @@
               </a:spcAft>
             </a:pPr>
             <a:r>
-              <a:rPr sz="1900" b="0">
-                <a:solidFill>
-                  <a:srgbClr val="6E6E6E"/>
-                </a:solidFill>
-                <a:latin typeface="Roboto"/>
-              </a:rPr>
-              <a:t>Isso não é previsão. Já aconteceu, e aconteceu na disciplina ao lado.</a:t>
-            </a:r>
-          </a:p>
-        </p:txBody>
-      </p:sp>
-      <p:sp>
-        <p:nvSpPr>
-          <p:cNvPr id="7" name="TextBox 6"/>
+              <a:rPr sz="1900" b="1">
+                <a:solidFill>
+                  <a:srgbClr val="9A6A00"/>
+                </a:solidFill>
+                <a:latin typeface="Roboto"/>
+              </a:rPr>
+              <a:t>Quanto mais código a IA escreve, mais gente entrega o que não sabe conferir.</a:t>
+            </a:r>
+          </a:p>
+        </p:txBody>
+      </p:sp>
+      <p:sp>
+        <p:nvSpPr>
+          <p:cNvPr id="6" name="TextBox 5"/>
           <p:cNvSpPr txBox="1"/>
           <p:nvPr/>
         </p:nvSpPr>
@@ -12839,7 +11177,7 @@
                 </a:solidFill>
                 <a:latin typeface="Roboto"/>
               </a:rPr>
-              <a:t>Algoritmos e Programação, primeiro semestre de Engenharia</a:t>
+              <a:t>O caso que virou notícia: Replit, julho de 2025</a:t>
             </a:r>
           </a:p>
         </p:txBody>
@@ -12852,519 +11190,7 @@
         </p:nvSpPr>
         <p:spPr>
           <a:xfrm>
-            <a:off x="777240" y="1920240"/>
-            <a:ext cx="3210458" cy="57150"/>
-          </a:xfrm>
-          <a:prstGeom prst="rect">
-            <a:avLst/>
-          </a:prstGeom>
-          <a:solidFill>
-            <a:srgbClr val="E0A100"/>
-          </a:solidFill>
-          <a:ln>
-            <a:noFill/>
-          </a:ln>
-          <a:effectLst/>
-        </p:spPr>
-        <p:style>
-          <a:lnRef idx="1">
-            <a:schemeClr val="accent1"/>
-          </a:lnRef>
-          <a:fillRef idx="3">
-            <a:schemeClr val="accent1"/>
-          </a:fillRef>
-          <a:effectRef idx="2">
-            <a:schemeClr val="accent1"/>
-          </a:effectRef>
-          <a:fontRef idx="minor">
-            <a:schemeClr val="lt1"/>
-          </a:fontRef>
-        </p:style>
-        <p:txBody>
-          <a:bodyPr rtlCol="0" anchor="ctr"/>
-          <a:lstStyle/>
-          <a:p>
-            <a:pPr algn="ctr"/>
-          </a:p>
-        </p:txBody>
-      </p:sp>
-      <p:sp>
-        <p:nvSpPr>
-          <p:cNvPr id="4" name="TextBox 3"/>
-          <p:cNvSpPr txBox="1"/>
-          <p:nvPr/>
-        </p:nvSpPr>
-        <p:spPr>
-          <a:xfrm>
-            <a:off x="777240" y="2121408"/>
-            <a:ext cx="3210458" cy="378659"/>
-          </a:xfrm>
-          <a:prstGeom prst="rect">
-            <a:avLst/>
-          </a:prstGeom>
-          <a:noFill/>
-        </p:spPr>
-        <p:txBody>
-          <a:bodyPr wrap="square" lIns="0" rIns="0" tIns="0" bIns="0">
-            <a:spAutoFit/>
-          </a:bodyPr>
-          <a:lstStyle/>
-          <a:p>
-            <a:pPr algn="l">
-              <a:lnSpc>
-                <a:spcPct val="106000"/>
-              </a:lnSpc>
-              <a:spcBef>
-                <a:spcPts val="0"/>
-              </a:spcBef>
-              <a:spcAft>
-                <a:spcPts val="0"/>
-              </a:spcAft>
-            </a:pPr>
-            <a:r>
-              <a:rPr sz="2400" b="1">
-                <a:solidFill>
-                  <a:srgbClr val="1E1E1E"/>
-                </a:solidFill>
-                <a:latin typeface="Roboto"/>
-              </a:rPr>
-              <a:t>Viabilidade solar</a:t>
-            </a:r>
-          </a:p>
-        </p:txBody>
-      </p:sp>
-      <p:sp>
-        <p:nvSpPr>
-          <p:cNvPr id="5" name="TextBox 4"/>
-          <p:cNvSpPr txBox="1"/>
-          <p:nvPr/>
-        </p:nvSpPr>
-        <p:spPr>
-          <a:xfrm>
-            <a:off x="777240" y="2737811"/>
-            <a:ext cx="3210458" cy="3022908"/>
-          </a:xfrm>
-          <a:prstGeom prst="rect">
-            <a:avLst/>
-          </a:prstGeom>
-          <a:noFill/>
-        </p:spPr>
-        <p:txBody>
-          <a:bodyPr wrap="square" lIns="0" rIns="0" tIns="0" bIns="0">
-            <a:spAutoFit/>
-          </a:bodyPr>
-          <a:lstStyle/>
-          <a:p>
-            <a:pPr algn="l">
-              <a:lnSpc>
-                <a:spcPct val="105000"/>
-              </a:lnSpc>
-              <a:spcBef>
-                <a:spcPts val="0"/>
-              </a:spcBef>
-              <a:spcAft>
-                <a:spcPts val="0"/>
-              </a:spcAft>
-            </a:pPr>
-            <a:r>
-              <a:rPr sz="2000" b="0">
-                <a:solidFill>
-                  <a:srgbClr val="1E1E1E"/>
-                </a:solidFill>
-                <a:latin typeface="Roboto"/>
-              </a:rPr>
-              <a:t>Kauã Lopes</a:t>
-            </a:r>
-          </a:p>
-          <a:p>
-            <a:pPr algn="l">
-              <a:lnSpc>
-                <a:spcPct val="105000"/>
-              </a:lnSpc>
-              <a:spcBef>
-                <a:spcPts val="1600"/>
-              </a:spcBef>
-              <a:spcAft>
-                <a:spcPts val="0"/>
-              </a:spcAft>
-            </a:pPr>
-            <a:r>
-              <a:rPr sz="2000" b="0">
-                <a:solidFill>
-                  <a:srgbClr val="1E1E1E"/>
-                </a:solidFill>
-                <a:latin typeface="Roboto"/>
-              </a:rPr>
-              <a:t>Calcula payback e economia de painéis fotovoltaicos</a:t>
-            </a:r>
-          </a:p>
-          <a:p>
-            <a:pPr algn="l">
-              <a:lnSpc>
-                <a:spcPct val="105000"/>
-              </a:lnSpc>
-              <a:spcBef>
-                <a:spcPts val="1600"/>
-              </a:spcBef>
-              <a:spcAft>
-                <a:spcPts val="0"/>
-              </a:spcAft>
-            </a:pPr>
-            <a:r>
-              <a:rPr sz="2000" b="0">
-                <a:solidFill>
-                  <a:srgbClr val="1E1E1E"/>
-                </a:solidFill>
-                <a:latin typeface="Roboto"/>
-              </a:rPr>
-              <a:t>ROI de 1392%</a:t>
-            </a:r>
-          </a:p>
-        </p:txBody>
-      </p:sp>
-      <p:sp>
-        <p:nvSpPr>
-          <p:cNvPr id="6" name="Rectangle 5"/>
-          <p:cNvSpPr/>
-          <p:nvPr/>
-        </p:nvSpPr>
-        <p:spPr>
-          <a:xfrm>
-            <a:off x="4490618" y="1920240"/>
-            <a:ext cx="3210458" cy="57150"/>
-          </a:xfrm>
-          <a:prstGeom prst="rect">
-            <a:avLst/>
-          </a:prstGeom>
-          <a:solidFill>
-            <a:srgbClr val="1E1E1E"/>
-          </a:solidFill>
-          <a:ln>
-            <a:noFill/>
-          </a:ln>
-          <a:effectLst/>
-        </p:spPr>
-        <p:style>
-          <a:lnRef idx="1">
-            <a:schemeClr val="accent1"/>
-          </a:lnRef>
-          <a:fillRef idx="3">
-            <a:schemeClr val="accent1"/>
-          </a:fillRef>
-          <a:effectRef idx="2">
-            <a:schemeClr val="accent1"/>
-          </a:effectRef>
-          <a:fontRef idx="minor">
-            <a:schemeClr val="lt1"/>
-          </a:fontRef>
-        </p:style>
-        <p:txBody>
-          <a:bodyPr rtlCol="0" anchor="ctr"/>
-          <a:lstStyle/>
-          <a:p>
-            <a:pPr algn="ctr"/>
-          </a:p>
-        </p:txBody>
-      </p:sp>
-      <p:sp>
-        <p:nvSpPr>
-          <p:cNvPr id="7" name="TextBox 6"/>
-          <p:cNvSpPr txBox="1"/>
-          <p:nvPr/>
-        </p:nvSpPr>
-        <p:spPr>
-          <a:xfrm>
-            <a:off x="4490618" y="2121408"/>
-            <a:ext cx="3210458" cy="378659"/>
-          </a:xfrm>
-          <a:prstGeom prst="rect">
-            <a:avLst/>
-          </a:prstGeom>
-          <a:noFill/>
-        </p:spPr>
-        <p:txBody>
-          <a:bodyPr wrap="square" lIns="0" rIns="0" tIns="0" bIns="0">
-            <a:spAutoFit/>
-          </a:bodyPr>
-          <a:lstStyle/>
-          <a:p>
-            <a:pPr algn="l">
-              <a:lnSpc>
-                <a:spcPct val="106000"/>
-              </a:lnSpc>
-              <a:spcBef>
-                <a:spcPts val="0"/>
-              </a:spcBef>
-              <a:spcAft>
-                <a:spcPts val="0"/>
-              </a:spcAft>
-            </a:pPr>
-            <a:r>
-              <a:rPr sz="2400" b="1">
-                <a:solidFill>
-                  <a:srgbClr val="1E1E1E"/>
-                </a:solidFill>
-                <a:latin typeface="Roboto"/>
-              </a:rPr>
-              <a:t>Simulador de motor</a:t>
-            </a:r>
-          </a:p>
-        </p:txBody>
-      </p:sp>
-      <p:sp>
-        <p:nvSpPr>
-          <p:cNvPr id="8" name="TextBox 7"/>
-          <p:cNvSpPr txBox="1"/>
-          <p:nvPr/>
-        </p:nvSpPr>
-        <p:spPr>
-          <a:xfrm>
-            <a:off x="4490618" y="2737811"/>
-            <a:ext cx="3210458" cy="3022908"/>
-          </a:xfrm>
-          <a:prstGeom prst="rect">
-            <a:avLst/>
-          </a:prstGeom>
-          <a:noFill/>
-        </p:spPr>
-        <p:txBody>
-          <a:bodyPr wrap="square" lIns="0" rIns="0" tIns="0" bIns="0">
-            <a:spAutoFit/>
-          </a:bodyPr>
-          <a:lstStyle/>
-          <a:p>
-            <a:pPr algn="l">
-              <a:lnSpc>
-                <a:spcPct val="105000"/>
-              </a:lnSpc>
-              <a:spcBef>
-                <a:spcPts val="0"/>
-              </a:spcBef>
-              <a:spcAft>
-                <a:spcPts val="0"/>
-              </a:spcAft>
-            </a:pPr>
-            <a:r>
-              <a:rPr sz="2000" b="0">
-                <a:solidFill>
-                  <a:srgbClr val="1E1E1E"/>
-                </a:solidFill>
-                <a:latin typeface="Roboto"/>
-              </a:rPr>
-              <a:t>Arthur Prates e Kauã Sander</a:t>
-            </a:r>
-          </a:p>
-          <a:p>
-            <a:pPr algn="l">
-              <a:lnSpc>
-                <a:spcPct val="105000"/>
-              </a:lnSpc>
-              <a:spcBef>
-                <a:spcPts val="1600"/>
-              </a:spcBef>
-              <a:spcAft>
-                <a:spcPts val="0"/>
-              </a:spcAft>
-            </a:pPr>
-            <a:r>
-              <a:rPr sz="2000" b="0">
-                <a:solidFill>
-                  <a:srgbClr val="1E1E1E"/>
-                </a:solidFill>
-                <a:latin typeface="Roboto"/>
-              </a:rPr>
-              <a:t>Calibração automotiva</a:t>
-            </a:r>
-          </a:p>
-          <a:p>
-            <a:pPr algn="l">
-              <a:lnSpc>
-                <a:spcPct val="105000"/>
-              </a:lnSpc>
-              <a:spcBef>
-                <a:spcPts val="1600"/>
-              </a:spcBef>
-              <a:spcAft>
-                <a:spcPts val="0"/>
-              </a:spcAft>
-            </a:pPr>
-            <a:r>
-              <a:rPr sz="2000" b="0">
-                <a:solidFill>
-                  <a:srgbClr val="1E1E1E"/>
-                </a:solidFill>
-                <a:latin typeface="Roboto"/>
-              </a:rPr>
-              <a:t>Ranger 3.2D a 259,6 cv</a:t>
-            </a:r>
-          </a:p>
-        </p:txBody>
-      </p:sp>
-      <p:sp>
-        <p:nvSpPr>
-          <p:cNvPr id="9" name="Rectangle 8"/>
-          <p:cNvSpPr/>
-          <p:nvPr/>
-        </p:nvSpPr>
-        <p:spPr>
-          <a:xfrm>
-            <a:off x="8203996" y="1920240"/>
-            <a:ext cx="3210458" cy="57150"/>
-          </a:xfrm>
-          <a:prstGeom prst="rect">
-            <a:avLst/>
-          </a:prstGeom>
-          <a:solidFill>
-            <a:srgbClr val="1E1E1E"/>
-          </a:solidFill>
-          <a:ln>
-            <a:noFill/>
-          </a:ln>
-          <a:effectLst/>
-        </p:spPr>
-        <p:style>
-          <a:lnRef idx="1">
-            <a:schemeClr val="accent1"/>
-          </a:lnRef>
-          <a:fillRef idx="3">
-            <a:schemeClr val="accent1"/>
-          </a:fillRef>
-          <a:effectRef idx="2">
-            <a:schemeClr val="accent1"/>
-          </a:effectRef>
-          <a:fontRef idx="minor">
-            <a:schemeClr val="lt1"/>
-          </a:fontRef>
-        </p:style>
-        <p:txBody>
-          <a:bodyPr rtlCol="0" anchor="ctr"/>
-          <a:lstStyle/>
-          <a:p>
-            <a:pPr algn="ctr"/>
-          </a:p>
-        </p:txBody>
-      </p:sp>
-      <p:sp>
-        <p:nvSpPr>
-          <p:cNvPr id="10" name="TextBox 9"/>
-          <p:cNvSpPr txBox="1"/>
-          <p:nvPr/>
-        </p:nvSpPr>
-        <p:spPr>
-          <a:xfrm>
-            <a:off x="8203996" y="2121408"/>
-            <a:ext cx="3210458" cy="378659"/>
-          </a:xfrm>
-          <a:prstGeom prst="rect">
-            <a:avLst/>
-          </a:prstGeom>
-          <a:noFill/>
-        </p:spPr>
-        <p:txBody>
-          <a:bodyPr wrap="square" lIns="0" rIns="0" tIns="0" bIns="0">
-            <a:spAutoFit/>
-          </a:bodyPr>
-          <a:lstStyle/>
-          <a:p>
-            <a:pPr algn="l">
-              <a:lnSpc>
-                <a:spcPct val="106000"/>
-              </a:lnSpc>
-              <a:spcBef>
-                <a:spcPts val="0"/>
-              </a:spcBef>
-              <a:spcAft>
-                <a:spcPts val="0"/>
-              </a:spcAft>
-            </a:pPr>
-            <a:r>
-              <a:rPr sz="2400" b="1">
-                <a:solidFill>
-                  <a:srgbClr val="1E1E1E"/>
-                </a:solidFill>
-                <a:latin typeface="Roboto"/>
-              </a:rPr>
-              <a:t>Análise de bombas</a:t>
-            </a:r>
-          </a:p>
-        </p:txBody>
-      </p:sp>
-      <p:sp>
-        <p:nvSpPr>
-          <p:cNvPr id="11" name="TextBox 10"/>
-          <p:cNvSpPr txBox="1"/>
-          <p:nvPr/>
-        </p:nvSpPr>
-        <p:spPr>
-          <a:xfrm>
-            <a:off x="8203996" y="2737811"/>
-            <a:ext cx="3210458" cy="3022908"/>
-          </a:xfrm>
-          <a:prstGeom prst="rect">
-            <a:avLst/>
-          </a:prstGeom>
-          <a:noFill/>
-        </p:spPr>
-        <p:txBody>
-          <a:bodyPr wrap="square" lIns="0" rIns="0" tIns="0" bIns="0">
-            <a:spAutoFit/>
-          </a:bodyPr>
-          <a:lstStyle/>
-          <a:p>
-            <a:pPr algn="l">
-              <a:lnSpc>
-                <a:spcPct val="105000"/>
-              </a:lnSpc>
-              <a:spcBef>
-                <a:spcPts val="0"/>
-              </a:spcBef>
-              <a:spcAft>
-                <a:spcPts val="0"/>
-              </a:spcAft>
-            </a:pPr>
-            <a:r>
-              <a:rPr sz="2000" b="0">
-                <a:solidFill>
-                  <a:srgbClr val="1E1E1E"/>
-                </a:solidFill>
-                <a:latin typeface="Roboto"/>
-              </a:rPr>
-              <a:t>Lorena Christello</a:t>
-            </a:r>
-          </a:p>
-          <a:p>
-            <a:pPr algn="l">
-              <a:lnSpc>
-                <a:spcPct val="105000"/>
-              </a:lnSpc>
-              <a:spcBef>
-                <a:spcPts val="1600"/>
-              </a:spcBef>
-              <a:spcAft>
-                <a:spcPts val="0"/>
-              </a:spcAft>
-            </a:pPr>
-            <a:r>
-              <a:rPr sz="2000" b="0">
-                <a:solidFill>
-                  <a:srgbClr val="1E1E1E"/>
-                </a:solidFill>
-                <a:latin typeface="Roboto"/>
-              </a:rPr>
-              <a:t>Desempenho e custo de frota industrial</a:t>
-            </a:r>
-          </a:p>
-        </p:txBody>
-      </p:sp>
-      <p:sp>
-        <p:nvSpPr>
-          <p:cNvPr id="12" name="Rectangle 11"/>
-          <p:cNvSpPr/>
-          <p:nvPr/>
-        </p:nvSpPr>
-        <p:spPr>
-          <a:xfrm>
-            <a:off x="777240" y="5907024"/>
+            <a:off x="777240" y="1783080"/>
             <a:ext cx="10637215" cy="9525"/>
           </a:xfrm>
           <a:prstGeom prst="rect">
@@ -13402,7 +11228,677 @@
       </p:sp>
       <p:sp>
         <p:nvSpPr>
+          <p:cNvPr id="4" name="TextBox 3"/>
+          <p:cNvSpPr txBox="1"/>
+          <p:nvPr/>
+        </p:nvSpPr>
+        <p:spPr>
+          <a:xfrm>
+            <a:off x="777240" y="1920240"/>
+            <a:ext cx="3657600" cy="676655"/>
+          </a:xfrm>
+          <a:prstGeom prst="rect">
+            <a:avLst/>
+          </a:prstGeom>
+          <a:noFill/>
+        </p:spPr>
+        <p:txBody>
+          <a:bodyPr wrap="square" lIns="0" rIns="0" tIns="0" bIns="0">
+            <a:spAutoFit/>
+          </a:bodyPr>
+          <a:lstStyle/>
+          <a:p>
+            <a:pPr algn="l">
+              <a:lnSpc>
+                <a:spcPct val="105000"/>
+              </a:lnSpc>
+              <a:spcBef>
+                <a:spcPts val="0"/>
+              </a:spcBef>
+              <a:spcAft>
+                <a:spcPts val="0"/>
+              </a:spcAft>
+            </a:pPr>
+            <a:r>
+              <a:rPr sz="2000" b="1">
+                <a:solidFill>
+                  <a:srgbClr val="9A6A00"/>
+                </a:solidFill>
+                <a:latin typeface="Roboto"/>
+              </a:rPr>
+              <a:t>O que aconteceu</a:t>
+            </a:r>
+          </a:p>
+        </p:txBody>
+      </p:sp>
+      <p:sp>
+        <p:nvSpPr>
+          <p:cNvPr id="5" name="TextBox 4"/>
+          <p:cNvSpPr txBox="1"/>
+          <p:nvPr/>
+        </p:nvSpPr>
+        <p:spPr>
+          <a:xfrm>
+            <a:off x="4754879" y="1920240"/>
+            <a:ext cx="6659575" cy="676655"/>
+          </a:xfrm>
+          <a:prstGeom prst="rect">
+            <a:avLst/>
+          </a:prstGeom>
+          <a:noFill/>
+        </p:spPr>
+        <p:txBody>
+          <a:bodyPr wrap="square" lIns="0" rIns="0" tIns="0" bIns="0">
+            <a:spAutoFit/>
+          </a:bodyPr>
+          <a:lstStyle/>
+          <a:p>
+            <a:pPr algn="l">
+              <a:lnSpc>
+                <a:spcPct val="105000"/>
+              </a:lnSpc>
+              <a:spcBef>
+                <a:spcPts val="0"/>
+              </a:spcBef>
+              <a:spcAft>
+                <a:spcPts val="0"/>
+              </a:spcAft>
+            </a:pPr>
+            <a:r>
+              <a:rPr sz="2000" b="0">
+                <a:solidFill>
+                  <a:srgbClr val="1E1E1E"/>
+                </a:solidFill>
+                <a:latin typeface="Roboto"/>
+              </a:rPr>
+              <a:t>O agente de IA apagou o banco de produção de um cliente, com mais de 2.400 registros.</a:t>
+            </a:r>
+          </a:p>
+        </p:txBody>
+      </p:sp>
+      <p:sp>
+        <p:nvSpPr>
+          <p:cNvPr id="6" name="Rectangle 5"/>
+          <p:cNvSpPr/>
+          <p:nvPr/>
+        </p:nvSpPr>
+        <p:spPr>
+          <a:xfrm>
+            <a:off x="777240" y="2596164"/>
+            <a:ext cx="10637215" cy="9525"/>
+          </a:xfrm>
+          <a:prstGeom prst="rect">
+            <a:avLst/>
+          </a:prstGeom>
+          <a:solidFill>
+            <a:srgbClr val="D6D6D6"/>
+          </a:solidFill>
+          <a:ln>
+            <a:noFill/>
+          </a:ln>
+          <a:effectLst/>
+        </p:spPr>
+        <p:style>
+          <a:lnRef idx="1">
+            <a:schemeClr val="accent1"/>
+          </a:lnRef>
+          <a:fillRef idx="3">
+            <a:schemeClr val="accent1"/>
+          </a:fillRef>
+          <a:effectRef idx="2">
+            <a:schemeClr val="accent1"/>
+          </a:effectRef>
+          <a:fontRef idx="minor">
+            <a:schemeClr val="lt1"/>
+          </a:fontRef>
+        </p:style>
+        <p:txBody>
+          <a:bodyPr rtlCol="0" anchor="ctr"/>
+          <a:lstStyle/>
+          <a:p>
+            <a:pPr algn="ctr"/>
+          </a:p>
+        </p:txBody>
+      </p:sp>
+      <p:sp>
+        <p:nvSpPr>
+          <p:cNvPr id="7" name="TextBox 6"/>
+          <p:cNvSpPr txBox="1"/>
+          <p:nvPr/>
+        </p:nvSpPr>
+        <p:spPr>
+          <a:xfrm>
+            <a:off x="777240" y="2688336"/>
+            <a:ext cx="3657600" cy="676655"/>
+          </a:xfrm>
+          <a:prstGeom prst="rect">
+            <a:avLst/>
+          </a:prstGeom>
+          <a:noFill/>
+        </p:spPr>
+        <p:txBody>
+          <a:bodyPr wrap="square" lIns="0" rIns="0" tIns="0" bIns="0">
+            <a:spAutoFit/>
+          </a:bodyPr>
+          <a:lstStyle/>
+          <a:p>
+            <a:pPr algn="l">
+              <a:lnSpc>
+                <a:spcPct val="105000"/>
+              </a:lnSpc>
+              <a:spcBef>
+                <a:spcPts val="0"/>
+              </a:spcBef>
+              <a:spcAft>
+                <a:spcPts val="0"/>
+              </a:spcAft>
+            </a:pPr>
+            <a:r>
+              <a:rPr sz="2000" b="1">
+                <a:solidFill>
+                  <a:srgbClr val="9A6A00"/>
+                </a:solidFill>
+                <a:latin typeface="Roboto"/>
+              </a:rPr>
+              <a:t>O agravante</a:t>
+            </a:r>
+          </a:p>
+        </p:txBody>
+      </p:sp>
+      <p:sp>
+        <p:nvSpPr>
+          <p:cNvPr id="8" name="TextBox 7"/>
+          <p:cNvSpPr txBox="1"/>
+          <p:nvPr/>
+        </p:nvSpPr>
+        <p:spPr>
+          <a:xfrm>
+            <a:off x="4754879" y="2688336"/>
+            <a:ext cx="6659575" cy="676655"/>
+          </a:xfrm>
+          <a:prstGeom prst="rect">
+            <a:avLst/>
+          </a:prstGeom>
+          <a:noFill/>
+        </p:spPr>
+        <p:txBody>
+          <a:bodyPr wrap="square" lIns="0" rIns="0" tIns="0" bIns="0">
+            <a:spAutoFit/>
+          </a:bodyPr>
+          <a:lstStyle/>
+          <a:p>
+            <a:pPr algn="l">
+              <a:lnSpc>
+                <a:spcPct val="105000"/>
+              </a:lnSpc>
+              <a:spcBef>
+                <a:spcPts val="0"/>
+              </a:spcBef>
+              <a:spcAft>
+                <a:spcPts val="0"/>
+              </a:spcAft>
+            </a:pPr>
+            <a:r>
+              <a:rPr sz="2000" b="0">
+                <a:solidFill>
+                  <a:srgbClr val="1E1E1E"/>
+                </a:solidFill>
+                <a:latin typeface="Roboto"/>
+              </a:rPr>
+              <a:t>Havia congelamento de código e ordem expressa de não alterar nada sem permissão.</a:t>
+            </a:r>
+          </a:p>
+        </p:txBody>
+      </p:sp>
+      <p:sp>
+        <p:nvSpPr>
+          <p:cNvPr id="9" name="Rectangle 8"/>
+          <p:cNvSpPr/>
+          <p:nvPr/>
+        </p:nvSpPr>
+        <p:spPr>
+          <a:xfrm>
+            <a:off x="777240" y="3364260"/>
+            <a:ext cx="10637215" cy="9525"/>
+          </a:xfrm>
+          <a:prstGeom prst="rect">
+            <a:avLst/>
+          </a:prstGeom>
+          <a:solidFill>
+            <a:srgbClr val="D6D6D6"/>
+          </a:solidFill>
+          <a:ln>
+            <a:noFill/>
+          </a:ln>
+          <a:effectLst/>
+        </p:spPr>
+        <p:style>
+          <a:lnRef idx="1">
+            <a:schemeClr val="accent1"/>
+          </a:lnRef>
+          <a:fillRef idx="3">
+            <a:schemeClr val="accent1"/>
+          </a:fillRef>
+          <a:effectRef idx="2">
+            <a:schemeClr val="accent1"/>
+          </a:effectRef>
+          <a:fontRef idx="minor">
+            <a:schemeClr val="lt1"/>
+          </a:fontRef>
+        </p:style>
+        <p:txBody>
+          <a:bodyPr rtlCol="0" anchor="ctr"/>
+          <a:lstStyle/>
+          <a:p>
+            <a:pPr algn="ctr"/>
+          </a:p>
+        </p:txBody>
+      </p:sp>
+      <p:sp>
+        <p:nvSpPr>
+          <p:cNvPr id="10" name="TextBox 9"/>
+          <p:cNvSpPr txBox="1"/>
+          <p:nvPr/>
+        </p:nvSpPr>
+        <p:spPr>
+          <a:xfrm>
+            <a:off x="777240" y="3456432"/>
+            <a:ext cx="3657600" cy="676655"/>
+          </a:xfrm>
+          <a:prstGeom prst="rect">
+            <a:avLst/>
+          </a:prstGeom>
+          <a:noFill/>
+        </p:spPr>
+        <p:txBody>
+          <a:bodyPr wrap="square" lIns="0" rIns="0" tIns="0" bIns="0">
+            <a:spAutoFit/>
+          </a:bodyPr>
+          <a:lstStyle/>
+          <a:p>
+            <a:pPr algn="l">
+              <a:lnSpc>
+                <a:spcPct val="105000"/>
+              </a:lnSpc>
+              <a:spcBef>
+                <a:spcPts val="0"/>
+              </a:spcBef>
+              <a:spcAft>
+                <a:spcPts val="0"/>
+              </a:spcAft>
+            </a:pPr>
+            <a:r>
+              <a:rPr sz="2000" b="1">
+                <a:solidFill>
+                  <a:srgbClr val="9A6A00"/>
+                </a:solidFill>
+                <a:latin typeface="Roboto"/>
+              </a:rPr>
+              <a:t>A mentira</a:t>
+            </a:r>
+          </a:p>
+        </p:txBody>
+      </p:sp>
+      <p:sp>
+        <p:nvSpPr>
+          <p:cNvPr id="11" name="TextBox 10"/>
+          <p:cNvSpPr txBox="1"/>
+          <p:nvPr/>
+        </p:nvSpPr>
+        <p:spPr>
+          <a:xfrm>
+            <a:off x="4754879" y="3456432"/>
+            <a:ext cx="6659575" cy="676655"/>
+          </a:xfrm>
+          <a:prstGeom prst="rect">
+            <a:avLst/>
+          </a:prstGeom>
+          <a:noFill/>
+        </p:spPr>
+        <p:txBody>
+          <a:bodyPr wrap="square" lIns="0" rIns="0" tIns="0" bIns="0">
+            <a:spAutoFit/>
+          </a:bodyPr>
+          <a:lstStyle/>
+          <a:p>
+            <a:pPr algn="l">
+              <a:lnSpc>
+                <a:spcPct val="105000"/>
+              </a:lnSpc>
+              <a:spcBef>
+                <a:spcPts val="0"/>
+              </a:spcBef>
+              <a:spcAft>
+                <a:spcPts val="0"/>
+              </a:spcAft>
+            </a:pPr>
+            <a:r>
+              <a:rPr sz="2000" b="0">
+                <a:solidFill>
+                  <a:srgbClr val="1E1E1E"/>
+                </a:solidFill>
+                <a:latin typeface="Roboto"/>
+              </a:rPr>
+              <a:t>O agente disse que não dava para desfazer. Dava: o rollback funcionou.</a:t>
+            </a:r>
+          </a:p>
+        </p:txBody>
+      </p:sp>
+      <p:sp>
+        <p:nvSpPr>
+          <p:cNvPr id="12" name="Rectangle 11"/>
+          <p:cNvSpPr/>
+          <p:nvPr/>
+        </p:nvSpPr>
+        <p:spPr>
+          <a:xfrm>
+            <a:off x="777240" y="4132356"/>
+            <a:ext cx="10637215" cy="9525"/>
+          </a:xfrm>
+          <a:prstGeom prst="rect">
+            <a:avLst/>
+          </a:prstGeom>
+          <a:solidFill>
+            <a:srgbClr val="D6D6D6"/>
+          </a:solidFill>
+          <a:ln>
+            <a:noFill/>
+          </a:ln>
+          <a:effectLst/>
+        </p:spPr>
+        <p:style>
+          <a:lnRef idx="1">
+            <a:schemeClr val="accent1"/>
+          </a:lnRef>
+          <a:fillRef idx="3">
+            <a:schemeClr val="accent1"/>
+          </a:fillRef>
+          <a:effectRef idx="2">
+            <a:schemeClr val="accent1"/>
+          </a:effectRef>
+          <a:fontRef idx="minor">
+            <a:schemeClr val="lt1"/>
+          </a:fontRef>
+        </p:style>
+        <p:txBody>
+          <a:bodyPr rtlCol="0" anchor="ctr"/>
+          <a:lstStyle/>
+          <a:p>
+            <a:pPr algn="ctr"/>
+          </a:p>
+        </p:txBody>
+      </p:sp>
+      <p:sp>
+        <p:nvSpPr>
           <p:cNvPr id="13" name="TextBox 12"/>
+          <p:cNvSpPr txBox="1"/>
+          <p:nvPr/>
+        </p:nvSpPr>
+        <p:spPr>
+          <a:xfrm>
+            <a:off x="777240" y="4224527"/>
+            <a:ext cx="3657600" cy="676655"/>
+          </a:xfrm>
+          <a:prstGeom prst="rect">
+            <a:avLst/>
+          </a:prstGeom>
+          <a:noFill/>
+        </p:spPr>
+        <p:txBody>
+          <a:bodyPr wrap="square" lIns="0" rIns="0" tIns="0" bIns="0">
+            <a:spAutoFit/>
+          </a:bodyPr>
+          <a:lstStyle/>
+          <a:p>
+            <a:pPr algn="l">
+              <a:lnSpc>
+                <a:spcPct val="105000"/>
+              </a:lnSpc>
+              <a:spcBef>
+                <a:spcPts val="0"/>
+              </a:spcBef>
+              <a:spcAft>
+                <a:spcPts val="0"/>
+              </a:spcAft>
+            </a:pPr>
+            <a:r>
+              <a:rPr sz="2000" b="1">
+                <a:solidFill>
+                  <a:srgbClr val="9A6A00"/>
+                </a:solidFill>
+                <a:latin typeface="Roboto"/>
+              </a:rPr>
+              <a:t>O desfecho</a:t>
+            </a:r>
+          </a:p>
+        </p:txBody>
+      </p:sp>
+      <p:sp>
+        <p:nvSpPr>
+          <p:cNvPr id="14" name="TextBox 13"/>
+          <p:cNvSpPr txBox="1"/>
+          <p:nvPr/>
+        </p:nvSpPr>
+        <p:spPr>
+          <a:xfrm>
+            <a:off x="4754879" y="4224527"/>
+            <a:ext cx="6659575" cy="676655"/>
+          </a:xfrm>
+          <a:prstGeom prst="rect">
+            <a:avLst/>
+          </a:prstGeom>
+          <a:noFill/>
+        </p:spPr>
+        <p:txBody>
+          <a:bodyPr wrap="square" lIns="0" rIns="0" tIns="0" bIns="0">
+            <a:spAutoFit/>
+          </a:bodyPr>
+          <a:lstStyle/>
+          <a:p>
+            <a:pPr algn="l">
+              <a:lnSpc>
+                <a:spcPct val="105000"/>
+              </a:lnSpc>
+              <a:spcBef>
+                <a:spcPts val="0"/>
+              </a:spcBef>
+              <a:spcAft>
+                <a:spcPts val="0"/>
+              </a:spcAft>
+            </a:pPr>
+            <a:r>
+              <a:rPr sz="2000" b="0">
+                <a:solidFill>
+                  <a:srgbClr val="1E1E1E"/>
+                </a:solidFill>
+                <a:latin typeface="Roboto"/>
+              </a:rPr>
+              <a:t>O presidente da Replit reconheceu em público, e a empresa separou os bancos.</a:t>
+            </a:r>
+          </a:p>
+        </p:txBody>
+      </p:sp>
+      <p:sp>
+        <p:nvSpPr>
+          <p:cNvPr id="15" name="Rectangle 14"/>
+          <p:cNvSpPr/>
+          <p:nvPr/>
+        </p:nvSpPr>
+        <p:spPr>
+          <a:xfrm>
+            <a:off x="777240" y="4900452"/>
+            <a:ext cx="10637215" cy="9525"/>
+          </a:xfrm>
+          <a:prstGeom prst="rect">
+            <a:avLst/>
+          </a:prstGeom>
+          <a:solidFill>
+            <a:srgbClr val="D6D6D6"/>
+          </a:solidFill>
+          <a:ln>
+            <a:noFill/>
+          </a:ln>
+          <a:effectLst/>
+        </p:spPr>
+        <p:style>
+          <a:lnRef idx="1">
+            <a:schemeClr val="accent1"/>
+          </a:lnRef>
+          <a:fillRef idx="3">
+            <a:schemeClr val="accent1"/>
+          </a:fillRef>
+          <a:effectRef idx="2">
+            <a:schemeClr val="accent1"/>
+          </a:effectRef>
+          <a:fontRef idx="minor">
+            <a:schemeClr val="lt1"/>
+          </a:fontRef>
+        </p:style>
+        <p:txBody>
+          <a:bodyPr rtlCol="0" anchor="ctr"/>
+          <a:lstStyle/>
+          <a:p>
+            <a:pPr algn="ctr"/>
+          </a:p>
+        </p:txBody>
+      </p:sp>
+      <p:sp>
+        <p:nvSpPr>
+          <p:cNvPr id="16" name="TextBox 15"/>
+          <p:cNvSpPr txBox="1"/>
+          <p:nvPr/>
+        </p:nvSpPr>
+        <p:spPr>
+          <a:xfrm>
+            <a:off x="777240" y="4992623"/>
+            <a:ext cx="3657600" cy="676655"/>
+          </a:xfrm>
+          <a:prstGeom prst="rect">
+            <a:avLst/>
+          </a:prstGeom>
+          <a:noFill/>
+        </p:spPr>
+        <p:txBody>
+          <a:bodyPr wrap="square" lIns="0" rIns="0" tIns="0" bIns="0">
+            <a:spAutoFit/>
+          </a:bodyPr>
+          <a:lstStyle/>
+          <a:p>
+            <a:pPr algn="l">
+              <a:lnSpc>
+                <a:spcPct val="105000"/>
+              </a:lnSpc>
+              <a:spcBef>
+                <a:spcPts val="0"/>
+              </a:spcBef>
+              <a:spcAft>
+                <a:spcPts val="0"/>
+              </a:spcAft>
+            </a:pPr>
+            <a:r>
+              <a:rPr sz="2000" b="1">
+                <a:solidFill>
+                  <a:srgbClr val="9A6A00"/>
+                </a:solidFill>
+                <a:latin typeface="Roboto"/>
+              </a:rPr>
+              <a:t>Onde foi publicado</a:t>
+            </a:r>
+          </a:p>
+        </p:txBody>
+      </p:sp>
+      <p:sp>
+        <p:nvSpPr>
+          <p:cNvPr id="17" name="TextBox 16"/>
+          <p:cNvSpPr txBox="1"/>
+          <p:nvPr/>
+        </p:nvSpPr>
+        <p:spPr>
+          <a:xfrm>
+            <a:off x="4754879" y="4992623"/>
+            <a:ext cx="6659575" cy="676655"/>
+          </a:xfrm>
+          <a:prstGeom prst="rect">
+            <a:avLst/>
+          </a:prstGeom>
+          <a:noFill/>
+        </p:spPr>
+        <p:txBody>
+          <a:bodyPr wrap="square" lIns="0" rIns="0" tIns="0" bIns="0">
+            <a:spAutoFit/>
+          </a:bodyPr>
+          <a:lstStyle/>
+          <a:p>
+            <a:pPr algn="l">
+              <a:lnSpc>
+                <a:spcPct val="105000"/>
+              </a:lnSpc>
+              <a:spcBef>
+                <a:spcPts val="0"/>
+              </a:spcBef>
+              <a:spcAft>
+                <a:spcPts val="0"/>
+              </a:spcAft>
+            </a:pPr>
+            <a:r>
+              <a:rPr sz="2000" b="0">
+                <a:solidFill>
+                  <a:srgbClr val="1E1E1E"/>
+                </a:solidFill>
+                <a:latin typeface="Roboto"/>
+              </a:rPr>
+              <a:t>The Register, 21 de julho de 2025, e a cobertura correu o mundo.</a:t>
+            </a:r>
+          </a:p>
+        </p:txBody>
+      </p:sp>
+      <p:sp>
+        <p:nvSpPr>
+          <p:cNvPr id="18" name="Rectangle 17"/>
+          <p:cNvSpPr/>
+          <p:nvPr/>
+        </p:nvSpPr>
+        <p:spPr>
+          <a:xfrm>
+            <a:off x="777240" y="5907024"/>
+            <a:ext cx="10637215" cy="9525"/>
+          </a:xfrm>
+          <a:prstGeom prst="rect">
+            <a:avLst/>
+          </a:prstGeom>
+          <a:solidFill>
+            <a:srgbClr val="D6D6D6"/>
+          </a:solidFill>
+          <a:ln>
+            <a:noFill/>
+          </a:ln>
+          <a:effectLst/>
+        </p:spPr>
+        <p:style>
+          <a:lnRef idx="1">
+            <a:schemeClr val="accent1"/>
+          </a:lnRef>
+          <a:fillRef idx="3">
+            <a:schemeClr val="accent1"/>
+          </a:fillRef>
+          <a:effectRef idx="2">
+            <a:schemeClr val="accent1"/>
+          </a:effectRef>
+          <a:fontRef idx="minor">
+            <a:schemeClr val="lt1"/>
+          </a:fontRef>
+        </p:style>
+        <p:txBody>
+          <a:bodyPr rtlCol="0" anchor="ctr"/>
+          <a:lstStyle/>
+          <a:p>
+            <a:pPr algn="ctr"/>
+          </a:p>
+        </p:txBody>
+      </p:sp>
+      <p:sp>
+        <p:nvSpPr>
+          <p:cNvPr id="19" name="TextBox 18"/>
           <p:cNvSpPr txBox="1"/>
           <p:nvPr/>
         </p:nvSpPr>
@@ -13440,14 +11936,14 @@
                 </a:solidFill>
                 <a:latin typeface="Roboto"/>
               </a:rPr>
-              <a:t>Entregaram em duas horas aplicações que teriam sido trabalho de conclusão há cinco anos.</a:t>
-            </a:r>
-          </a:p>
-        </p:txBody>
-      </p:sp>
-      <p:sp>
-        <p:nvSpPr>
-          <p:cNvPr id="14" name="TextBox 13"/>
+              <a:t>O erro não foi comprar a ferramenta. Foi entregá-la a quem não sabia conferir.</a:t>
+            </a:r>
+          </a:p>
+        </p:txBody>
+      </p:sp>
+      <p:sp>
+        <p:nvSpPr>
+          <p:cNvPr id="20" name="TextBox 19"/>
           <p:cNvSpPr txBox="1"/>
           <p:nvPr/>
         </p:nvSpPr>
@@ -13553,409 +12049,33 @@
           </a:p>
         </p:txBody>
       </p:sp>
-      <p:sp>
-        <p:nvSpPr>
-          <p:cNvPr id="3" name="Rectangle 2"/>
-          <p:cNvSpPr/>
-          <p:nvPr/>
-        </p:nvSpPr>
+      <p:pic>
+        <p:nvPicPr>
+          <p:cNvPr id="3" name="Picture 2" descr="07_dia_invisivel.png"/>
+          <p:cNvPicPr>
+            <a:picLocks noChangeAspect="1"/>
+          </p:cNvPicPr>
+          <p:nvPr/>
+        </p:nvPicPr>
+        <p:blipFill>
+          <a:blip r:embed="rId2"/>
+          <a:stretch>
+            <a:fillRect/>
+          </a:stretch>
+        </p:blipFill>
         <p:spPr>
           <a:xfrm>
             <a:off x="777240" y="1920240"/>
-            <a:ext cx="5067147" cy="57150"/>
-          </a:xfrm>
-          <a:prstGeom prst="rect">
-            <a:avLst/>
-          </a:prstGeom>
-          <a:solidFill>
-            <a:srgbClr val="E0A100"/>
-          </a:solidFill>
-          <a:ln>
-            <a:noFill/>
-          </a:ln>
-          <a:effectLst/>
-        </p:spPr>
-        <p:style>
-          <a:lnRef idx="1">
-            <a:schemeClr val="accent1"/>
-          </a:lnRef>
-          <a:fillRef idx="3">
-            <a:schemeClr val="accent1"/>
-          </a:fillRef>
-          <a:effectRef idx="2">
-            <a:schemeClr val="accent1"/>
-          </a:effectRef>
-          <a:fontRef idx="minor">
-            <a:schemeClr val="lt1"/>
-          </a:fontRef>
-        </p:style>
-        <p:txBody>
-          <a:bodyPr rtlCol="0" anchor="ctr"/>
-          <a:lstStyle/>
-          <a:p>
-            <a:pPr algn="ctr"/>
-          </a:p>
-        </p:txBody>
-      </p:sp>
-      <p:sp>
-        <p:nvSpPr>
-          <p:cNvPr id="4" name="TextBox 3"/>
-          <p:cNvSpPr txBox="1"/>
-          <p:nvPr/>
-        </p:nvSpPr>
-        <p:spPr>
-          <a:xfrm>
-            <a:off x="777240" y="2121408"/>
-            <a:ext cx="5067147" cy="378659"/>
-          </a:xfrm>
-          <a:prstGeom prst="rect">
-            <a:avLst/>
-          </a:prstGeom>
-          <a:noFill/>
-        </p:spPr>
-        <p:txBody>
-          <a:bodyPr wrap="square" lIns="0" rIns="0" tIns="0" bIns="0">
-            <a:spAutoFit/>
-          </a:bodyPr>
-          <a:lstStyle/>
-          <a:p>
-            <a:pPr algn="l">
-              <a:lnSpc>
-                <a:spcPct val="106000"/>
-              </a:lnSpc>
-              <a:spcBef>
-                <a:spcPts val="0"/>
-              </a:spcBef>
-              <a:spcAft>
-                <a:spcPts val="0"/>
-              </a:spcAft>
-            </a:pPr>
-            <a:r>
-              <a:rPr sz="2400" b="1">
-                <a:solidFill>
-                  <a:srgbClr val="1E1E1E"/>
-                </a:solidFill>
-                <a:latin typeface="Roboto"/>
-              </a:rPr>
-              <a:t>Você percebeu</a:t>
-            </a:r>
-          </a:p>
-        </p:txBody>
-      </p:sp>
-      <p:sp>
-        <p:nvSpPr>
-          <p:cNvPr id="5" name="TextBox 4"/>
-          <p:cNvSpPr txBox="1"/>
-          <p:nvPr/>
-        </p:nvSpPr>
-        <p:spPr>
-          <a:xfrm>
-            <a:off x="777240" y="2737811"/>
-            <a:ext cx="5067147" cy="3022908"/>
-          </a:xfrm>
-          <a:prstGeom prst="rect">
-            <a:avLst/>
-          </a:prstGeom>
-          <a:noFill/>
-        </p:spPr>
-        <p:txBody>
-          <a:bodyPr wrap="square" lIns="0" rIns="0" tIns="0" bIns="0">
-            <a:spAutoFit/>
-          </a:bodyPr>
-          <a:lstStyle/>
-          <a:p>
-            <a:pPr algn="l">
-              <a:lnSpc>
-                <a:spcPct val="105000"/>
-              </a:lnSpc>
-              <a:spcBef>
-                <a:spcPts val="0"/>
-              </a:spcBef>
-              <a:spcAft>
-                <a:spcPts val="0"/>
-              </a:spcAft>
-            </a:pPr>
-            <a:r>
-              <a:rPr sz="2000" b="0">
-                <a:solidFill>
-                  <a:srgbClr val="1E1E1E"/>
-                </a:solidFill>
-                <a:latin typeface="Roboto"/>
-              </a:rPr>
-              <a:t>O ChatGPT que resumiu o texto da aula</a:t>
-            </a:r>
-          </a:p>
-          <a:p>
-            <a:pPr algn="l">
-              <a:lnSpc>
-                <a:spcPct val="105000"/>
-              </a:lnSpc>
-              <a:spcBef>
-                <a:spcPts val="1600"/>
-              </a:spcBef>
-              <a:spcAft>
-                <a:spcPts val="0"/>
-              </a:spcAft>
-            </a:pPr>
-            <a:r>
-              <a:rPr sz="2000" b="0">
-                <a:solidFill>
-                  <a:srgbClr val="1E1E1E"/>
-                </a:solidFill>
-                <a:latin typeface="Roboto"/>
-              </a:rPr>
-              <a:t>O tradutor que salvou o artigo em inglês</a:t>
-            </a:r>
-          </a:p>
-          <a:p>
-            <a:pPr algn="l">
-              <a:lnSpc>
-                <a:spcPct val="105000"/>
-              </a:lnSpc>
-              <a:spcBef>
-                <a:spcPts val="1600"/>
-              </a:spcBef>
-              <a:spcAft>
-                <a:spcPts val="0"/>
-              </a:spcAft>
-            </a:pPr>
-            <a:r>
-              <a:rPr sz="2000" b="0">
-                <a:solidFill>
-                  <a:srgbClr val="1E1E1E"/>
-                </a:solidFill>
-                <a:latin typeface="Roboto"/>
-              </a:rPr>
-              <a:t>O corretor que terminou sua frase no WhatsApp</a:t>
-            </a:r>
-          </a:p>
-          <a:p>
-            <a:pPr algn="l">
-              <a:lnSpc>
-                <a:spcPct val="105000"/>
-              </a:lnSpc>
-              <a:spcBef>
-                <a:spcPts val="1600"/>
-              </a:spcBef>
-              <a:spcAft>
-                <a:spcPts val="0"/>
-              </a:spcAft>
-            </a:pPr>
-            <a:r>
-              <a:rPr sz="2000" b="0">
-                <a:solidFill>
-                  <a:srgbClr val="1E1E1E"/>
-                </a:solidFill>
-                <a:latin typeface="Roboto"/>
-              </a:rPr>
-              <a:t>A foto que o celular melhorou sozinho</a:t>
-            </a:r>
-          </a:p>
-        </p:txBody>
-      </p:sp>
-      <p:sp>
-        <p:nvSpPr>
-          <p:cNvPr id="6" name="Rectangle 5"/>
-          <p:cNvSpPr/>
-          <p:nvPr/>
-        </p:nvSpPr>
-        <p:spPr>
-          <a:xfrm>
-            <a:off x="6347307" y="1920240"/>
-            <a:ext cx="5067147" cy="57150"/>
-          </a:xfrm>
-          <a:prstGeom prst="rect">
-            <a:avLst/>
-          </a:prstGeom>
-          <a:solidFill>
-            <a:srgbClr val="1E1E1E"/>
-          </a:solidFill>
-          <a:ln>
-            <a:noFill/>
-          </a:ln>
-          <a:effectLst/>
-        </p:spPr>
-        <p:style>
-          <a:lnRef idx="1">
-            <a:schemeClr val="accent1"/>
-          </a:lnRef>
-          <a:fillRef idx="3">
-            <a:schemeClr val="accent1"/>
-          </a:fillRef>
-          <a:effectRef idx="2">
-            <a:schemeClr val="accent1"/>
-          </a:effectRef>
-          <a:fontRef idx="minor">
-            <a:schemeClr val="lt1"/>
-          </a:fontRef>
-        </p:style>
-        <p:txBody>
-          <a:bodyPr rtlCol="0" anchor="ctr"/>
-          <a:lstStyle/>
-          <a:p>
-            <a:pPr algn="ctr"/>
-          </a:p>
-        </p:txBody>
-      </p:sp>
-      <p:sp>
-        <p:nvSpPr>
-          <p:cNvPr id="7" name="TextBox 6"/>
-          <p:cNvSpPr txBox="1"/>
-          <p:nvPr/>
-        </p:nvSpPr>
-        <p:spPr>
-          <a:xfrm>
-            <a:off x="6347307" y="2121408"/>
-            <a:ext cx="5067147" cy="378659"/>
-          </a:xfrm>
-          <a:prstGeom prst="rect">
-            <a:avLst/>
-          </a:prstGeom>
-          <a:noFill/>
-        </p:spPr>
-        <p:txBody>
-          <a:bodyPr wrap="square" lIns="0" rIns="0" tIns="0" bIns="0">
-            <a:spAutoFit/>
-          </a:bodyPr>
-          <a:lstStyle/>
-          <a:p>
-            <a:pPr algn="l">
-              <a:lnSpc>
-                <a:spcPct val="106000"/>
-              </a:lnSpc>
-              <a:spcBef>
-                <a:spcPts val="0"/>
-              </a:spcBef>
-              <a:spcAft>
-                <a:spcPts val="0"/>
-              </a:spcAft>
-            </a:pPr>
-            <a:r>
-              <a:rPr sz="2400" b="1">
-                <a:solidFill>
-                  <a:srgbClr val="1E1E1E"/>
-                </a:solidFill>
-                <a:latin typeface="Roboto"/>
-              </a:rPr>
-              <a:t>Você não percebeu</a:t>
-            </a:r>
-          </a:p>
-        </p:txBody>
-      </p:sp>
-      <p:sp>
-        <p:nvSpPr>
-          <p:cNvPr id="8" name="TextBox 7"/>
-          <p:cNvSpPr txBox="1"/>
-          <p:nvPr/>
-        </p:nvSpPr>
-        <p:spPr>
-          <a:xfrm>
-            <a:off x="6347307" y="2737811"/>
-            <a:ext cx="5067147" cy="3022908"/>
-          </a:xfrm>
-          <a:prstGeom prst="rect">
-            <a:avLst/>
-          </a:prstGeom>
-          <a:noFill/>
-        </p:spPr>
-        <p:txBody>
-          <a:bodyPr wrap="square" lIns="0" rIns="0" tIns="0" bIns="0">
-            <a:spAutoFit/>
-          </a:bodyPr>
-          <a:lstStyle/>
-          <a:p>
-            <a:pPr algn="l">
-              <a:lnSpc>
-                <a:spcPct val="105000"/>
-              </a:lnSpc>
-              <a:spcBef>
-                <a:spcPts val="0"/>
-              </a:spcBef>
-              <a:spcAft>
-                <a:spcPts val="0"/>
-              </a:spcAft>
-            </a:pPr>
-            <a:r>
-              <a:rPr sz="2000" b="0">
-                <a:solidFill>
-                  <a:srgbClr val="1E1E1E"/>
-                </a:solidFill>
-                <a:latin typeface="Roboto"/>
-              </a:rPr>
-              <a:t>O feed que escolheu o que você viu hoje</a:t>
-            </a:r>
-          </a:p>
-          <a:p>
-            <a:pPr algn="l">
-              <a:lnSpc>
-                <a:spcPct val="105000"/>
-              </a:lnSpc>
-              <a:spcBef>
-                <a:spcPts val="1600"/>
-              </a:spcBef>
-              <a:spcAft>
-                <a:spcPts val="0"/>
-              </a:spcAft>
-            </a:pPr>
-            <a:r>
-              <a:rPr sz="2000" b="0">
-                <a:solidFill>
-                  <a:srgbClr val="1E1E1E"/>
-                </a:solidFill>
-                <a:latin typeface="Roboto"/>
-              </a:rPr>
-              <a:t>A compra que o banco liberou em 200 milissegundos</a:t>
-            </a:r>
-          </a:p>
-          <a:p>
-            <a:pPr algn="l">
-              <a:lnSpc>
-                <a:spcPct val="105000"/>
-              </a:lnSpc>
-              <a:spcBef>
-                <a:spcPts val="1600"/>
-              </a:spcBef>
-              <a:spcAft>
-                <a:spcPts val="0"/>
-              </a:spcAft>
-            </a:pPr>
-            <a:r>
-              <a:rPr sz="2000" b="0">
-                <a:solidFill>
-                  <a:srgbClr val="1E1E1E"/>
-                </a:solidFill>
-                <a:latin typeface="Roboto"/>
-              </a:rPr>
-              <a:t>A rota que o aplicativo recalculou no caminho até aqui</a:t>
-            </a:r>
-          </a:p>
-          <a:p>
-            <a:pPr algn="l">
-              <a:lnSpc>
-                <a:spcPct val="105000"/>
-              </a:lnSpc>
-              <a:spcBef>
-                <a:spcPts val="1600"/>
-              </a:spcBef>
-              <a:spcAft>
-                <a:spcPts val="0"/>
-              </a:spcAft>
-            </a:pPr>
-            <a:r>
-              <a:rPr sz="2000" b="0">
-                <a:solidFill>
-                  <a:srgbClr val="1E1E1E"/>
-                </a:solidFill>
-                <a:latin typeface="Roboto"/>
-              </a:rPr>
-              <a:t>O currículo que um software leu antes de qualquer pessoa</a:t>
-            </a:r>
-          </a:p>
-        </p:txBody>
-      </p:sp>
-      <p:sp>
-        <p:nvSpPr>
-          <p:cNvPr id="9" name="Rectangle 8"/>
+            <a:ext cx="10637215" cy="3840479"/>
+          </a:xfrm>
+          <a:prstGeom prst="rect">
+            <a:avLst/>
+          </a:prstGeom>
+        </p:spPr>
+      </p:pic>
+      <p:sp>
+        <p:nvSpPr>
+          <p:cNvPr id="4" name="Rectangle 3"/>
           <p:cNvSpPr/>
           <p:nvPr/>
         </p:nvSpPr>
@@ -13999,7 +12119,7 @@
       </p:sp>
       <p:sp>
         <p:nvSpPr>
-          <p:cNvPr id="10" name="TextBox 9"/>
+          <p:cNvPr id="5" name="TextBox 4"/>
           <p:cNvSpPr txBox="1"/>
           <p:nvPr/>
         </p:nvSpPr>
@@ -14044,7 +12164,7 @@
       </p:sp>
       <p:sp>
         <p:nvSpPr>
-          <p:cNvPr id="11" name="TextBox 10"/>
+          <p:cNvPr id="6" name="TextBox 5"/>
           <p:cNvSpPr txBox="1"/>
           <p:nvPr/>
         </p:nvSpPr>
@@ -14113,39 +12233,61 @@
         </p:nvSpPr>
         <p:spPr>
           <a:xfrm>
-            <a:off x="777240" y="411480"/>
-            <a:ext cx="10637215" cy="1325880"/>
-          </a:xfrm>
-          <a:prstGeom prst="rect">
-            <a:avLst/>
-          </a:prstGeom>
-          <a:noFill/>
-        </p:spPr>
-        <p:txBody>
-          <a:bodyPr wrap="square" lIns="0" rIns="0" tIns="0" bIns="0">
-            <a:spAutoFit/>
-          </a:bodyPr>
-          <a:lstStyle/>
-          <a:p>
-            <a:pPr algn="l">
-              <a:lnSpc>
-                <a:spcPct val="104000"/>
-              </a:lnSpc>
-              <a:spcBef>
-                <a:spcPts val="0"/>
-              </a:spcBef>
-              <a:spcAft>
-                <a:spcPts val="0"/>
-              </a:spcAft>
-            </a:pPr>
-            <a:r>
-              <a:rPr sz="4000" b="1">
+            <a:off x="777240" y="713232"/>
+            <a:ext cx="10637215" cy="2103120"/>
+          </a:xfrm>
+          <a:prstGeom prst="rect">
+            <a:avLst/>
+          </a:prstGeom>
+          <a:noFill/>
+        </p:spPr>
+        <p:txBody>
+          <a:bodyPr wrap="square" lIns="0" rIns="0" tIns="0" bIns="0">
+            <a:spAutoFit/>
+          </a:bodyPr>
+          <a:lstStyle/>
+          <a:p>
+            <a:pPr algn="l">
+              <a:lnSpc>
+                <a:spcPct val="106000"/>
+              </a:lnSpc>
+              <a:spcBef>
+                <a:spcPts val="0"/>
+              </a:spcBef>
+              <a:spcAft>
+                <a:spcPts val="0"/>
+              </a:spcAft>
+            </a:pPr>
+            <a:r>
+              <a:rPr sz="4400" b="1">
                 <a:solidFill>
                   <a:srgbClr val="1E1E1E"/>
                 </a:solidFill>
                 <a:latin typeface="Roboto"/>
               </a:rPr>
-              <a:t>O que a disciplina precisou virar</a:t>
+              <a:t>A mudança do administrador</a:t>
+            </a:r>
+          </a:p>
+          <a:p>
+            <a:pPr algn="l">
+              <a:lnSpc>
+                <a:spcPct val="106000"/>
+              </a:lnSpc>
+              <a:spcBef>
+                <a:spcPts val="0"/>
+              </a:spcBef>
+              <a:spcAft>
+                <a:spcPts val="0"/>
+              </a:spcAft>
+            </a:pPr>
+            <a:r>
+              <a:rPr sz="4400" b="1">
+                <a:solidFill>
+                  <a:srgbClr val="1E1E1E"/>
+                </a:solidFill>
+                <a:latin typeface="Roboto"/>
+              </a:rPr>
+              <a:t>começa na mudança da universidade.</a:t>
             </a:r>
           </a:p>
         </p:txBody>
@@ -14158,7 +12300,140 @@
         </p:nvSpPr>
         <p:spPr>
           <a:xfrm>
-            <a:off x="777240" y="1783080"/>
+            <a:off x="777240" y="2944368"/>
+            <a:ext cx="2743200" cy="44450"/>
+          </a:xfrm>
+          <a:prstGeom prst="rect">
+            <a:avLst/>
+          </a:prstGeom>
+          <a:solidFill>
+            <a:srgbClr val="E0A100"/>
+          </a:solidFill>
+          <a:ln>
+            <a:noFill/>
+          </a:ln>
+          <a:effectLst/>
+        </p:spPr>
+        <p:style>
+          <a:lnRef idx="1">
+            <a:schemeClr val="accent1"/>
+          </a:lnRef>
+          <a:fillRef idx="3">
+            <a:schemeClr val="accent1"/>
+          </a:fillRef>
+          <a:effectRef idx="2">
+            <a:schemeClr val="accent1"/>
+          </a:effectRef>
+          <a:fontRef idx="minor">
+            <a:schemeClr val="lt1"/>
+          </a:fontRef>
+        </p:style>
+        <p:txBody>
+          <a:bodyPr rtlCol="0" anchor="ctr"/>
+          <a:lstStyle/>
+          <a:p>
+            <a:pPr algn="ctr"/>
+          </a:p>
+        </p:txBody>
+      </p:sp>
+      <p:sp>
+        <p:nvSpPr>
+          <p:cNvPr id="4" name="TextBox 3"/>
+          <p:cNvSpPr txBox="1"/>
+          <p:nvPr/>
+        </p:nvSpPr>
+        <p:spPr>
+          <a:xfrm>
+            <a:off x="777240" y="3310128"/>
+            <a:ext cx="10637215" cy="2450591"/>
+          </a:xfrm>
+          <a:prstGeom prst="rect">
+            <a:avLst/>
+          </a:prstGeom>
+          <a:noFill/>
+        </p:spPr>
+        <p:txBody>
+          <a:bodyPr wrap="square" lIns="0" rIns="0" tIns="0" bIns="0">
+            <a:spAutoFit/>
+          </a:bodyPr>
+          <a:lstStyle/>
+          <a:p>
+            <a:pPr algn="l">
+              <a:lnSpc>
+                <a:spcPct val="105000"/>
+              </a:lnSpc>
+              <a:spcBef>
+                <a:spcPts val="0"/>
+              </a:spcBef>
+              <a:spcAft>
+                <a:spcPts val="0"/>
+              </a:spcAft>
+            </a:pPr>
+            <a:r>
+              <a:rPr sz="2400" b="0">
+                <a:solidFill>
+                  <a:srgbClr val="1E1E1E"/>
+                </a:solidFill>
+                <a:latin typeface="Roboto"/>
+              </a:rPr>
+              <a:t>Ninguém se transforma sozinho. A pessoa chega pronta do curso que fez, ou não chega.</a:t>
+            </a:r>
+          </a:p>
+          <a:p>
+            <a:pPr algn="l">
+              <a:lnSpc>
+                <a:spcPct val="105000"/>
+              </a:lnSpc>
+              <a:spcBef>
+                <a:spcPts val="1800"/>
+              </a:spcBef>
+              <a:spcAft>
+                <a:spcPts val="0"/>
+              </a:spcAft>
+            </a:pPr>
+            <a:r>
+              <a:rPr sz="2400" b="0">
+                <a:solidFill>
+                  <a:srgbClr val="1E1E1E"/>
+                </a:solidFill>
+                <a:latin typeface="Roboto"/>
+              </a:rPr>
+              <a:t>Se a universidade formar para a tarefa que a máquina já faz, entrega gente desatualizada no dia da formatura.</a:t>
+            </a:r>
+          </a:p>
+          <a:p>
+            <a:pPr algn="l">
+              <a:lnSpc>
+                <a:spcPct val="105000"/>
+              </a:lnSpc>
+              <a:spcBef>
+                <a:spcPts val="1800"/>
+              </a:spcBef>
+              <a:spcAft>
+                <a:spcPts val="0"/>
+              </a:spcAft>
+            </a:pPr>
+            <a:r>
+              <a:rPr sz="2400" b="0">
+                <a:solidFill>
+                  <a:srgbClr val="1E1E1E"/>
+                </a:solidFill>
+                <a:latin typeface="Roboto"/>
+              </a:rPr>
+              <a:t>A transformação do mercado começa quatro anos antes, aqui dentro.</a:t>
+            </a:r>
+          </a:p>
+        </p:txBody>
+      </p:sp>
+      <p:sp>
+        <p:nvSpPr>
+          <p:cNvPr id="5" name="Rectangle 4"/>
+          <p:cNvSpPr/>
+          <p:nvPr/>
+        </p:nvSpPr>
+        <p:spPr>
+          <a:xfrm>
+            <a:off x="777240" y="5907024"/>
             <a:ext cx="10637215" cy="9525"/>
           </a:xfrm>
           <a:prstGeom prst="rect">
@@ -14196,409 +12471,7 @@
       </p:sp>
       <p:sp>
         <p:nvSpPr>
-          <p:cNvPr id="4" name="TextBox 3"/>
-          <p:cNvSpPr txBox="1"/>
-          <p:nvPr/>
-        </p:nvSpPr>
-        <p:spPr>
-          <a:xfrm>
-            <a:off x="777240" y="1920240"/>
-            <a:ext cx="3931920" cy="1188719"/>
-          </a:xfrm>
-          <a:prstGeom prst="rect">
-            <a:avLst/>
-          </a:prstGeom>
-          <a:noFill/>
-        </p:spPr>
-        <p:txBody>
-          <a:bodyPr wrap="square" lIns="0" rIns="0" tIns="0" bIns="0">
-            <a:spAutoFit/>
-          </a:bodyPr>
-          <a:lstStyle/>
-          <a:p>
-            <a:pPr algn="l">
-              <a:lnSpc>
-                <a:spcPct val="105000"/>
-              </a:lnSpc>
-              <a:spcBef>
-                <a:spcPts val="0"/>
-              </a:spcBef>
-              <a:spcAft>
-                <a:spcPts val="0"/>
-              </a:spcAft>
-            </a:pPr>
-            <a:r>
-              <a:rPr sz="2100" b="1">
-                <a:solidFill>
-                  <a:srgbClr val="9A6A00"/>
-                </a:solidFill>
-                <a:latin typeface="Roboto"/>
-              </a:rPr>
-              <a:t>O que saiu de cena</a:t>
-            </a:r>
-          </a:p>
-        </p:txBody>
-      </p:sp>
-      <p:sp>
-        <p:nvSpPr>
-          <p:cNvPr id="5" name="TextBox 4"/>
-          <p:cNvSpPr txBox="1"/>
-          <p:nvPr/>
-        </p:nvSpPr>
-        <p:spPr>
-          <a:xfrm>
-            <a:off x="5029199" y="1920240"/>
-            <a:ext cx="6385255" cy="1188719"/>
-          </a:xfrm>
-          <a:prstGeom prst="rect">
-            <a:avLst/>
-          </a:prstGeom>
-          <a:noFill/>
-        </p:spPr>
-        <p:txBody>
-          <a:bodyPr wrap="square" lIns="0" rIns="0" tIns="0" bIns="0">
-            <a:spAutoFit/>
-          </a:bodyPr>
-          <a:lstStyle/>
-          <a:p>
-            <a:pPr algn="l">
-              <a:lnSpc>
-                <a:spcPct val="105000"/>
-              </a:lnSpc>
-              <a:spcBef>
-                <a:spcPts val="0"/>
-              </a:spcBef>
-              <a:spcAft>
-                <a:spcPts val="0"/>
-              </a:spcAft>
-            </a:pPr>
-            <a:r>
-              <a:rPr sz="2100" b="0">
-                <a:solidFill>
-                  <a:srgbClr val="1E1E1E"/>
-                </a:solidFill>
-                <a:latin typeface="Roboto"/>
-              </a:rPr>
-              <a:t>Decorar sintaxe, entregar código que compila, prova de papel e caneta.</a:t>
-            </a:r>
-          </a:p>
-        </p:txBody>
-      </p:sp>
-      <p:sp>
-        <p:nvSpPr>
-          <p:cNvPr id="6" name="Rectangle 5"/>
-          <p:cNvSpPr/>
-          <p:nvPr/>
-        </p:nvSpPr>
-        <p:spPr>
-          <a:xfrm>
-            <a:off x="777240" y="3046780"/>
-            <a:ext cx="10637215" cy="9525"/>
-          </a:xfrm>
-          <a:prstGeom prst="rect">
-            <a:avLst/>
-          </a:prstGeom>
-          <a:solidFill>
-            <a:srgbClr val="D6D6D6"/>
-          </a:solidFill>
-          <a:ln>
-            <a:noFill/>
-          </a:ln>
-          <a:effectLst/>
-        </p:spPr>
-        <p:style>
-          <a:lnRef idx="1">
-            <a:schemeClr val="accent1"/>
-          </a:lnRef>
-          <a:fillRef idx="3">
-            <a:schemeClr val="accent1"/>
-          </a:fillRef>
-          <a:effectRef idx="2">
-            <a:schemeClr val="accent1"/>
-          </a:effectRef>
-          <a:fontRef idx="minor">
-            <a:schemeClr val="lt1"/>
-          </a:fontRef>
-        </p:style>
-        <p:txBody>
-          <a:bodyPr rtlCol="0" anchor="ctr"/>
-          <a:lstStyle/>
-          <a:p>
-            <a:pPr algn="ctr"/>
-          </a:p>
-        </p:txBody>
-      </p:sp>
-      <p:sp>
-        <p:nvSpPr>
-          <p:cNvPr id="7" name="TextBox 6"/>
-          <p:cNvSpPr txBox="1"/>
-          <p:nvPr/>
-        </p:nvSpPr>
-        <p:spPr>
-          <a:xfrm>
-            <a:off x="777240" y="3200400"/>
-            <a:ext cx="3931920" cy="1188719"/>
-          </a:xfrm>
-          <a:prstGeom prst="rect">
-            <a:avLst/>
-          </a:prstGeom>
-          <a:noFill/>
-        </p:spPr>
-        <p:txBody>
-          <a:bodyPr wrap="square" lIns="0" rIns="0" tIns="0" bIns="0">
-            <a:spAutoFit/>
-          </a:bodyPr>
-          <a:lstStyle/>
-          <a:p>
-            <a:pPr algn="l">
-              <a:lnSpc>
-                <a:spcPct val="105000"/>
-              </a:lnSpc>
-              <a:spcBef>
-                <a:spcPts val="0"/>
-              </a:spcBef>
-              <a:spcAft>
-                <a:spcPts val="0"/>
-              </a:spcAft>
-            </a:pPr>
-            <a:r>
-              <a:rPr sz="2100" b="1">
-                <a:solidFill>
-                  <a:srgbClr val="9A6A00"/>
-                </a:solidFill>
-                <a:latin typeface="Roboto"/>
-              </a:rPr>
-              <a:t>O que entrou no lugar</a:t>
-            </a:r>
-          </a:p>
-        </p:txBody>
-      </p:sp>
-      <p:sp>
-        <p:nvSpPr>
-          <p:cNvPr id="8" name="TextBox 7"/>
-          <p:cNvSpPr txBox="1"/>
-          <p:nvPr/>
-        </p:nvSpPr>
-        <p:spPr>
-          <a:xfrm>
-            <a:off x="5029199" y="3200400"/>
-            <a:ext cx="6385255" cy="1188719"/>
-          </a:xfrm>
-          <a:prstGeom prst="rect">
-            <a:avLst/>
-          </a:prstGeom>
-          <a:noFill/>
-        </p:spPr>
-        <p:txBody>
-          <a:bodyPr wrap="square" lIns="0" rIns="0" tIns="0" bIns="0">
-            <a:spAutoFit/>
-          </a:bodyPr>
-          <a:lstStyle/>
-          <a:p>
-            <a:pPr algn="l">
-              <a:lnSpc>
-                <a:spcPct val="105000"/>
-              </a:lnSpc>
-              <a:spcBef>
-                <a:spcPts val="0"/>
-              </a:spcBef>
-              <a:spcAft>
-                <a:spcPts val="0"/>
-              </a:spcAft>
-            </a:pPr>
-            <a:r>
-              <a:rPr sz="2100" b="0">
-                <a:solidFill>
-                  <a:srgbClr val="1E1E1E"/>
-                </a:solidFill>
-                <a:latin typeface="Roboto"/>
-              </a:rPr>
-              <a:t>Especificar o problema, julgar o que a máquina devolveu, defender o resultado de viva-voz.</a:t>
-            </a:r>
-          </a:p>
-        </p:txBody>
-      </p:sp>
-      <p:sp>
-        <p:nvSpPr>
-          <p:cNvPr id="9" name="Rectangle 8"/>
-          <p:cNvSpPr/>
-          <p:nvPr/>
-        </p:nvSpPr>
-        <p:spPr>
-          <a:xfrm>
-            <a:off x="777240" y="4326940"/>
-            <a:ext cx="10637215" cy="9525"/>
-          </a:xfrm>
-          <a:prstGeom prst="rect">
-            <a:avLst/>
-          </a:prstGeom>
-          <a:solidFill>
-            <a:srgbClr val="D6D6D6"/>
-          </a:solidFill>
-          <a:ln>
-            <a:noFill/>
-          </a:ln>
-          <a:effectLst/>
-        </p:spPr>
-        <p:style>
-          <a:lnRef idx="1">
-            <a:schemeClr val="accent1"/>
-          </a:lnRef>
-          <a:fillRef idx="3">
-            <a:schemeClr val="accent1"/>
-          </a:fillRef>
-          <a:effectRef idx="2">
-            <a:schemeClr val="accent1"/>
-          </a:effectRef>
-          <a:fontRef idx="minor">
-            <a:schemeClr val="lt1"/>
-          </a:fontRef>
-        </p:style>
-        <p:txBody>
-          <a:bodyPr rtlCol="0" anchor="ctr"/>
-          <a:lstStyle/>
-          <a:p>
-            <a:pPr algn="ctr"/>
-          </a:p>
-        </p:txBody>
-      </p:sp>
-      <p:sp>
-        <p:nvSpPr>
-          <p:cNvPr id="10" name="TextBox 9"/>
-          <p:cNvSpPr txBox="1"/>
-          <p:nvPr/>
-        </p:nvSpPr>
-        <p:spPr>
-          <a:xfrm>
-            <a:off x="777240" y="4480559"/>
-            <a:ext cx="3931920" cy="1188719"/>
-          </a:xfrm>
-          <a:prstGeom prst="rect">
-            <a:avLst/>
-          </a:prstGeom>
-          <a:noFill/>
-        </p:spPr>
-        <p:txBody>
-          <a:bodyPr wrap="square" lIns="0" rIns="0" tIns="0" bIns="0">
-            <a:spAutoFit/>
-          </a:bodyPr>
-          <a:lstStyle/>
-          <a:p>
-            <a:pPr algn="l">
-              <a:lnSpc>
-                <a:spcPct val="105000"/>
-              </a:lnSpc>
-              <a:spcBef>
-                <a:spcPts val="0"/>
-              </a:spcBef>
-              <a:spcAft>
-                <a:spcPts val="0"/>
-              </a:spcAft>
-            </a:pPr>
-            <a:r>
-              <a:rPr sz="2100" b="1">
-                <a:solidFill>
-                  <a:srgbClr val="9A6A00"/>
-                </a:solidFill>
-                <a:latin typeface="Roboto"/>
-              </a:rPr>
-              <a:t>O que não mudou</a:t>
-            </a:r>
-          </a:p>
-        </p:txBody>
-      </p:sp>
-      <p:sp>
-        <p:nvSpPr>
-          <p:cNvPr id="11" name="TextBox 10"/>
-          <p:cNvSpPr txBox="1"/>
-          <p:nvPr/>
-        </p:nvSpPr>
-        <p:spPr>
-          <a:xfrm>
-            <a:off x="5029199" y="4480559"/>
-            <a:ext cx="6385255" cy="1188719"/>
-          </a:xfrm>
-          <a:prstGeom prst="rect">
-            <a:avLst/>
-          </a:prstGeom>
-          <a:noFill/>
-        </p:spPr>
-        <p:txBody>
-          <a:bodyPr wrap="square" lIns="0" rIns="0" tIns="0" bIns="0">
-            <a:spAutoFit/>
-          </a:bodyPr>
-          <a:lstStyle/>
-          <a:p>
-            <a:pPr algn="l">
-              <a:lnSpc>
-                <a:spcPct val="105000"/>
-              </a:lnSpc>
-              <a:spcBef>
-                <a:spcPts val="0"/>
-              </a:spcBef>
-              <a:spcAft>
-                <a:spcPts val="0"/>
-              </a:spcAft>
-            </a:pPr>
-            <a:r>
-              <a:rPr sz="2100" b="0">
-                <a:solidFill>
-                  <a:srgbClr val="1E1E1E"/>
-                </a:solidFill>
-                <a:latin typeface="Roboto"/>
-              </a:rPr>
-              <a:t>Quem não entende o problema não sabe dizer se a resposta está certa.</a:t>
-            </a:r>
-          </a:p>
-        </p:txBody>
-      </p:sp>
-      <p:sp>
-        <p:nvSpPr>
-          <p:cNvPr id="12" name="Rectangle 11"/>
-          <p:cNvSpPr/>
-          <p:nvPr/>
-        </p:nvSpPr>
-        <p:spPr>
-          <a:xfrm>
-            <a:off x="777240" y="5907024"/>
-            <a:ext cx="10637215" cy="9525"/>
-          </a:xfrm>
-          <a:prstGeom prst="rect">
-            <a:avLst/>
-          </a:prstGeom>
-          <a:solidFill>
-            <a:srgbClr val="D6D6D6"/>
-          </a:solidFill>
-          <a:ln>
-            <a:noFill/>
-          </a:ln>
-          <a:effectLst/>
-        </p:spPr>
-        <p:style>
-          <a:lnRef idx="1">
-            <a:schemeClr val="accent1"/>
-          </a:lnRef>
-          <a:fillRef idx="3">
-            <a:schemeClr val="accent1"/>
-          </a:fillRef>
-          <a:effectRef idx="2">
-            <a:schemeClr val="accent1"/>
-          </a:effectRef>
-          <a:fontRef idx="minor">
-            <a:schemeClr val="lt1"/>
-          </a:fontRef>
-        </p:style>
-        <p:txBody>
-          <a:bodyPr rtlCol="0" anchor="ctr"/>
-          <a:lstStyle/>
-          <a:p>
-            <a:pPr algn="ctr"/>
-          </a:p>
-        </p:txBody>
-      </p:sp>
-      <p:sp>
-        <p:nvSpPr>
-          <p:cNvPr id="13" name="TextBox 12"/>
+          <p:cNvPr id="6" name="TextBox 5"/>
           <p:cNvSpPr txBox="1"/>
           <p:nvPr/>
         </p:nvSpPr>
@@ -14630,20 +12503,20 @@
               </a:spcAft>
             </a:pPr>
             <a:r>
-              <a:rPr sz="1900" b="1">
-                <a:solidFill>
-                  <a:srgbClr val="9A6A00"/>
-                </a:solidFill>
-                <a:latin typeface="Roboto"/>
-              </a:rPr>
-              <a:t>Vale igual para Administração: a entrega ficou barata, o julgamento ficou caro.</a:t>
-            </a:r>
-          </a:p>
-        </p:txBody>
-      </p:sp>
-      <p:sp>
-        <p:nvSpPr>
-          <p:cNvPr id="14" name="TextBox 13"/>
+              <a:rPr sz="1900" b="0">
+                <a:solidFill>
+                  <a:srgbClr val="6E6E6E"/>
+                </a:solidFill>
+                <a:latin typeface="Roboto"/>
+              </a:rPr>
+              <a:t>Isso não é previsão. Já aconteceu, e aconteceu na disciplina ao lado.</a:t>
+            </a:r>
+          </a:p>
+        </p:txBody>
+      </p:sp>
+      <p:sp>
+        <p:nvSpPr>
+          <p:cNvPr id="7" name="TextBox 6"/>
           <p:cNvSpPr txBox="1"/>
           <p:nvPr/>
         </p:nvSpPr>
@@ -14744,7 +12617,7 @@
                 </a:solidFill>
                 <a:latin typeface="Roboto"/>
               </a:rPr>
-              <a:t>O novo papel da universidade, e o que a cidade ganha</a:t>
+              <a:t>Algoritmos e Programação, primeiro semestre de Engenharia</a:t>
             </a:r>
           </a:p>
         </p:txBody>
@@ -14757,7 +12630,519 @@
         </p:nvSpPr>
         <p:spPr>
           <a:xfrm>
-            <a:off x="777240" y="1783080"/>
+            <a:off x="777240" y="1920240"/>
+            <a:ext cx="3210458" cy="57150"/>
+          </a:xfrm>
+          <a:prstGeom prst="rect">
+            <a:avLst/>
+          </a:prstGeom>
+          <a:solidFill>
+            <a:srgbClr val="E0A100"/>
+          </a:solidFill>
+          <a:ln>
+            <a:noFill/>
+          </a:ln>
+          <a:effectLst/>
+        </p:spPr>
+        <p:style>
+          <a:lnRef idx="1">
+            <a:schemeClr val="accent1"/>
+          </a:lnRef>
+          <a:fillRef idx="3">
+            <a:schemeClr val="accent1"/>
+          </a:fillRef>
+          <a:effectRef idx="2">
+            <a:schemeClr val="accent1"/>
+          </a:effectRef>
+          <a:fontRef idx="minor">
+            <a:schemeClr val="lt1"/>
+          </a:fontRef>
+        </p:style>
+        <p:txBody>
+          <a:bodyPr rtlCol="0" anchor="ctr"/>
+          <a:lstStyle/>
+          <a:p>
+            <a:pPr algn="ctr"/>
+          </a:p>
+        </p:txBody>
+      </p:sp>
+      <p:sp>
+        <p:nvSpPr>
+          <p:cNvPr id="4" name="TextBox 3"/>
+          <p:cNvSpPr txBox="1"/>
+          <p:nvPr/>
+        </p:nvSpPr>
+        <p:spPr>
+          <a:xfrm>
+            <a:off x="777240" y="2121408"/>
+            <a:ext cx="3210458" cy="378659"/>
+          </a:xfrm>
+          <a:prstGeom prst="rect">
+            <a:avLst/>
+          </a:prstGeom>
+          <a:noFill/>
+        </p:spPr>
+        <p:txBody>
+          <a:bodyPr wrap="square" lIns="0" rIns="0" tIns="0" bIns="0">
+            <a:spAutoFit/>
+          </a:bodyPr>
+          <a:lstStyle/>
+          <a:p>
+            <a:pPr algn="l">
+              <a:lnSpc>
+                <a:spcPct val="106000"/>
+              </a:lnSpc>
+              <a:spcBef>
+                <a:spcPts val="0"/>
+              </a:spcBef>
+              <a:spcAft>
+                <a:spcPts val="0"/>
+              </a:spcAft>
+            </a:pPr>
+            <a:r>
+              <a:rPr sz="2400" b="1">
+                <a:solidFill>
+                  <a:srgbClr val="1E1E1E"/>
+                </a:solidFill>
+                <a:latin typeface="Roboto"/>
+              </a:rPr>
+              <a:t>Viabilidade solar</a:t>
+            </a:r>
+          </a:p>
+        </p:txBody>
+      </p:sp>
+      <p:sp>
+        <p:nvSpPr>
+          <p:cNvPr id="5" name="TextBox 4"/>
+          <p:cNvSpPr txBox="1"/>
+          <p:nvPr/>
+        </p:nvSpPr>
+        <p:spPr>
+          <a:xfrm>
+            <a:off x="777240" y="2737811"/>
+            <a:ext cx="3210458" cy="3022908"/>
+          </a:xfrm>
+          <a:prstGeom prst="rect">
+            <a:avLst/>
+          </a:prstGeom>
+          <a:noFill/>
+        </p:spPr>
+        <p:txBody>
+          <a:bodyPr wrap="square" lIns="0" rIns="0" tIns="0" bIns="0">
+            <a:spAutoFit/>
+          </a:bodyPr>
+          <a:lstStyle/>
+          <a:p>
+            <a:pPr algn="l">
+              <a:lnSpc>
+                <a:spcPct val="105000"/>
+              </a:lnSpc>
+              <a:spcBef>
+                <a:spcPts val="0"/>
+              </a:spcBef>
+              <a:spcAft>
+                <a:spcPts val="0"/>
+              </a:spcAft>
+            </a:pPr>
+            <a:r>
+              <a:rPr sz="2000" b="0">
+                <a:solidFill>
+                  <a:srgbClr val="1E1E1E"/>
+                </a:solidFill>
+                <a:latin typeface="Roboto"/>
+              </a:rPr>
+              <a:t>Kauã Lopes</a:t>
+            </a:r>
+          </a:p>
+          <a:p>
+            <a:pPr algn="l">
+              <a:lnSpc>
+                <a:spcPct val="105000"/>
+              </a:lnSpc>
+              <a:spcBef>
+                <a:spcPts val="1600"/>
+              </a:spcBef>
+              <a:spcAft>
+                <a:spcPts val="0"/>
+              </a:spcAft>
+            </a:pPr>
+            <a:r>
+              <a:rPr sz="2000" b="0">
+                <a:solidFill>
+                  <a:srgbClr val="1E1E1E"/>
+                </a:solidFill>
+                <a:latin typeface="Roboto"/>
+              </a:rPr>
+              <a:t>Calcula payback e economia de painéis fotovoltaicos</a:t>
+            </a:r>
+          </a:p>
+          <a:p>
+            <a:pPr algn="l">
+              <a:lnSpc>
+                <a:spcPct val="105000"/>
+              </a:lnSpc>
+              <a:spcBef>
+                <a:spcPts val="1600"/>
+              </a:spcBef>
+              <a:spcAft>
+                <a:spcPts val="0"/>
+              </a:spcAft>
+            </a:pPr>
+            <a:r>
+              <a:rPr sz="2000" b="0">
+                <a:solidFill>
+                  <a:srgbClr val="1E1E1E"/>
+                </a:solidFill>
+                <a:latin typeface="Roboto"/>
+              </a:rPr>
+              <a:t>ROI de 1392%</a:t>
+            </a:r>
+          </a:p>
+        </p:txBody>
+      </p:sp>
+      <p:sp>
+        <p:nvSpPr>
+          <p:cNvPr id="6" name="Rectangle 5"/>
+          <p:cNvSpPr/>
+          <p:nvPr/>
+        </p:nvSpPr>
+        <p:spPr>
+          <a:xfrm>
+            <a:off x="4490618" y="1920240"/>
+            <a:ext cx="3210458" cy="57150"/>
+          </a:xfrm>
+          <a:prstGeom prst="rect">
+            <a:avLst/>
+          </a:prstGeom>
+          <a:solidFill>
+            <a:srgbClr val="1E1E1E"/>
+          </a:solidFill>
+          <a:ln>
+            <a:noFill/>
+          </a:ln>
+          <a:effectLst/>
+        </p:spPr>
+        <p:style>
+          <a:lnRef idx="1">
+            <a:schemeClr val="accent1"/>
+          </a:lnRef>
+          <a:fillRef idx="3">
+            <a:schemeClr val="accent1"/>
+          </a:fillRef>
+          <a:effectRef idx="2">
+            <a:schemeClr val="accent1"/>
+          </a:effectRef>
+          <a:fontRef idx="minor">
+            <a:schemeClr val="lt1"/>
+          </a:fontRef>
+        </p:style>
+        <p:txBody>
+          <a:bodyPr rtlCol="0" anchor="ctr"/>
+          <a:lstStyle/>
+          <a:p>
+            <a:pPr algn="ctr"/>
+          </a:p>
+        </p:txBody>
+      </p:sp>
+      <p:sp>
+        <p:nvSpPr>
+          <p:cNvPr id="7" name="TextBox 6"/>
+          <p:cNvSpPr txBox="1"/>
+          <p:nvPr/>
+        </p:nvSpPr>
+        <p:spPr>
+          <a:xfrm>
+            <a:off x="4490618" y="2121408"/>
+            <a:ext cx="3210458" cy="378659"/>
+          </a:xfrm>
+          <a:prstGeom prst="rect">
+            <a:avLst/>
+          </a:prstGeom>
+          <a:noFill/>
+        </p:spPr>
+        <p:txBody>
+          <a:bodyPr wrap="square" lIns="0" rIns="0" tIns="0" bIns="0">
+            <a:spAutoFit/>
+          </a:bodyPr>
+          <a:lstStyle/>
+          <a:p>
+            <a:pPr algn="l">
+              <a:lnSpc>
+                <a:spcPct val="106000"/>
+              </a:lnSpc>
+              <a:spcBef>
+                <a:spcPts val="0"/>
+              </a:spcBef>
+              <a:spcAft>
+                <a:spcPts val="0"/>
+              </a:spcAft>
+            </a:pPr>
+            <a:r>
+              <a:rPr sz="2400" b="1">
+                <a:solidFill>
+                  <a:srgbClr val="1E1E1E"/>
+                </a:solidFill>
+                <a:latin typeface="Roboto"/>
+              </a:rPr>
+              <a:t>Simulador de motor</a:t>
+            </a:r>
+          </a:p>
+        </p:txBody>
+      </p:sp>
+      <p:sp>
+        <p:nvSpPr>
+          <p:cNvPr id="8" name="TextBox 7"/>
+          <p:cNvSpPr txBox="1"/>
+          <p:nvPr/>
+        </p:nvSpPr>
+        <p:spPr>
+          <a:xfrm>
+            <a:off x="4490618" y="2737811"/>
+            <a:ext cx="3210458" cy="3022908"/>
+          </a:xfrm>
+          <a:prstGeom prst="rect">
+            <a:avLst/>
+          </a:prstGeom>
+          <a:noFill/>
+        </p:spPr>
+        <p:txBody>
+          <a:bodyPr wrap="square" lIns="0" rIns="0" tIns="0" bIns="0">
+            <a:spAutoFit/>
+          </a:bodyPr>
+          <a:lstStyle/>
+          <a:p>
+            <a:pPr algn="l">
+              <a:lnSpc>
+                <a:spcPct val="105000"/>
+              </a:lnSpc>
+              <a:spcBef>
+                <a:spcPts val="0"/>
+              </a:spcBef>
+              <a:spcAft>
+                <a:spcPts val="0"/>
+              </a:spcAft>
+            </a:pPr>
+            <a:r>
+              <a:rPr sz="2000" b="0">
+                <a:solidFill>
+                  <a:srgbClr val="1E1E1E"/>
+                </a:solidFill>
+                <a:latin typeface="Roboto"/>
+              </a:rPr>
+              <a:t>Arthur Prates e Kauã Sander</a:t>
+            </a:r>
+          </a:p>
+          <a:p>
+            <a:pPr algn="l">
+              <a:lnSpc>
+                <a:spcPct val="105000"/>
+              </a:lnSpc>
+              <a:spcBef>
+                <a:spcPts val="1600"/>
+              </a:spcBef>
+              <a:spcAft>
+                <a:spcPts val="0"/>
+              </a:spcAft>
+            </a:pPr>
+            <a:r>
+              <a:rPr sz="2000" b="0">
+                <a:solidFill>
+                  <a:srgbClr val="1E1E1E"/>
+                </a:solidFill>
+                <a:latin typeface="Roboto"/>
+              </a:rPr>
+              <a:t>Calibração automotiva</a:t>
+            </a:r>
+          </a:p>
+          <a:p>
+            <a:pPr algn="l">
+              <a:lnSpc>
+                <a:spcPct val="105000"/>
+              </a:lnSpc>
+              <a:spcBef>
+                <a:spcPts val="1600"/>
+              </a:spcBef>
+              <a:spcAft>
+                <a:spcPts val="0"/>
+              </a:spcAft>
+            </a:pPr>
+            <a:r>
+              <a:rPr sz="2000" b="0">
+                <a:solidFill>
+                  <a:srgbClr val="1E1E1E"/>
+                </a:solidFill>
+                <a:latin typeface="Roboto"/>
+              </a:rPr>
+              <a:t>Ranger 3.2D a 259,6 cv</a:t>
+            </a:r>
+          </a:p>
+        </p:txBody>
+      </p:sp>
+      <p:sp>
+        <p:nvSpPr>
+          <p:cNvPr id="9" name="Rectangle 8"/>
+          <p:cNvSpPr/>
+          <p:nvPr/>
+        </p:nvSpPr>
+        <p:spPr>
+          <a:xfrm>
+            <a:off x="8203996" y="1920240"/>
+            <a:ext cx="3210458" cy="57150"/>
+          </a:xfrm>
+          <a:prstGeom prst="rect">
+            <a:avLst/>
+          </a:prstGeom>
+          <a:solidFill>
+            <a:srgbClr val="1E1E1E"/>
+          </a:solidFill>
+          <a:ln>
+            <a:noFill/>
+          </a:ln>
+          <a:effectLst/>
+        </p:spPr>
+        <p:style>
+          <a:lnRef idx="1">
+            <a:schemeClr val="accent1"/>
+          </a:lnRef>
+          <a:fillRef idx="3">
+            <a:schemeClr val="accent1"/>
+          </a:fillRef>
+          <a:effectRef idx="2">
+            <a:schemeClr val="accent1"/>
+          </a:effectRef>
+          <a:fontRef idx="minor">
+            <a:schemeClr val="lt1"/>
+          </a:fontRef>
+        </p:style>
+        <p:txBody>
+          <a:bodyPr rtlCol="0" anchor="ctr"/>
+          <a:lstStyle/>
+          <a:p>
+            <a:pPr algn="ctr"/>
+          </a:p>
+        </p:txBody>
+      </p:sp>
+      <p:sp>
+        <p:nvSpPr>
+          <p:cNvPr id="10" name="TextBox 9"/>
+          <p:cNvSpPr txBox="1"/>
+          <p:nvPr/>
+        </p:nvSpPr>
+        <p:spPr>
+          <a:xfrm>
+            <a:off x="8203996" y="2121408"/>
+            <a:ext cx="3210458" cy="378659"/>
+          </a:xfrm>
+          <a:prstGeom prst="rect">
+            <a:avLst/>
+          </a:prstGeom>
+          <a:noFill/>
+        </p:spPr>
+        <p:txBody>
+          <a:bodyPr wrap="square" lIns="0" rIns="0" tIns="0" bIns="0">
+            <a:spAutoFit/>
+          </a:bodyPr>
+          <a:lstStyle/>
+          <a:p>
+            <a:pPr algn="l">
+              <a:lnSpc>
+                <a:spcPct val="106000"/>
+              </a:lnSpc>
+              <a:spcBef>
+                <a:spcPts val="0"/>
+              </a:spcBef>
+              <a:spcAft>
+                <a:spcPts val="0"/>
+              </a:spcAft>
+            </a:pPr>
+            <a:r>
+              <a:rPr sz="2400" b="1">
+                <a:solidFill>
+                  <a:srgbClr val="1E1E1E"/>
+                </a:solidFill>
+                <a:latin typeface="Roboto"/>
+              </a:rPr>
+              <a:t>Análise de bombas</a:t>
+            </a:r>
+          </a:p>
+        </p:txBody>
+      </p:sp>
+      <p:sp>
+        <p:nvSpPr>
+          <p:cNvPr id="11" name="TextBox 10"/>
+          <p:cNvSpPr txBox="1"/>
+          <p:nvPr/>
+        </p:nvSpPr>
+        <p:spPr>
+          <a:xfrm>
+            <a:off x="8203996" y="2737811"/>
+            <a:ext cx="3210458" cy="3022908"/>
+          </a:xfrm>
+          <a:prstGeom prst="rect">
+            <a:avLst/>
+          </a:prstGeom>
+          <a:noFill/>
+        </p:spPr>
+        <p:txBody>
+          <a:bodyPr wrap="square" lIns="0" rIns="0" tIns="0" bIns="0">
+            <a:spAutoFit/>
+          </a:bodyPr>
+          <a:lstStyle/>
+          <a:p>
+            <a:pPr algn="l">
+              <a:lnSpc>
+                <a:spcPct val="105000"/>
+              </a:lnSpc>
+              <a:spcBef>
+                <a:spcPts val="0"/>
+              </a:spcBef>
+              <a:spcAft>
+                <a:spcPts val="0"/>
+              </a:spcAft>
+            </a:pPr>
+            <a:r>
+              <a:rPr sz="2000" b="0">
+                <a:solidFill>
+                  <a:srgbClr val="1E1E1E"/>
+                </a:solidFill>
+                <a:latin typeface="Roboto"/>
+              </a:rPr>
+              <a:t>Lorena Christello</a:t>
+            </a:r>
+          </a:p>
+          <a:p>
+            <a:pPr algn="l">
+              <a:lnSpc>
+                <a:spcPct val="105000"/>
+              </a:lnSpc>
+              <a:spcBef>
+                <a:spcPts val="1600"/>
+              </a:spcBef>
+              <a:spcAft>
+                <a:spcPts val="0"/>
+              </a:spcAft>
+            </a:pPr>
+            <a:r>
+              <a:rPr sz="2000" b="0">
+                <a:solidFill>
+                  <a:srgbClr val="1E1E1E"/>
+                </a:solidFill>
+                <a:latin typeface="Roboto"/>
+              </a:rPr>
+              <a:t>Desempenho e custo de frota industrial</a:t>
+            </a:r>
+          </a:p>
+        </p:txBody>
+      </p:sp>
+      <p:sp>
+        <p:nvSpPr>
+          <p:cNvPr id="12" name="Rectangle 11"/>
+          <p:cNvSpPr/>
+          <p:nvPr/>
+        </p:nvSpPr>
+        <p:spPr>
+          <a:xfrm>
+            <a:off x="777240" y="5907024"/>
             <a:ext cx="10637215" cy="9525"/>
           </a:xfrm>
           <a:prstGeom prst="rect">
@@ -14795,543 +13180,7 @@
       </p:sp>
       <p:sp>
         <p:nvSpPr>
-          <p:cNvPr id="4" name="TextBox 3"/>
-          <p:cNvSpPr txBox="1"/>
-          <p:nvPr/>
-        </p:nvSpPr>
-        <p:spPr>
-          <a:xfrm>
-            <a:off x="777240" y="1920240"/>
-            <a:ext cx="4206240" cy="868679"/>
-          </a:xfrm>
-          <a:prstGeom prst="rect">
-            <a:avLst/>
-          </a:prstGeom>
-          <a:noFill/>
-        </p:spPr>
-        <p:txBody>
-          <a:bodyPr wrap="square" lIns="0" rIns="0" tIns="0" bIns="0">
-            <a:spAutoFit/>
-          </a:bodyPr>
-          <a:lstStyle/>
-          <a:p>
-            <a:pPr algn="l">
-              <a:lnSpc>
-                <a:spcPct val="105000"/>
-              </a:lnSpc>
-              <a:spcBef>
-                <a:spcPts val="0"/>
-              </a:spcBef>
-              <a:spcAft>
-                <a:spcPts val="0"/>
-              </a:spcAft>
-            </a:pPr>
-            <a:r>
-              <a:rPr sz="2100" b="1">
-                <a:solidFill>
-                  <a:srgbClr val="9A6A00"/>
-                </a:solidFill>
-                <a:latin typeface="Roboto"/>
-              </a:rPr>
-              <a:t>Deixa de ser</a:t>
-            </a:r>
-          </a:p>
-        </p:txBody>
-      </p:sp>
-      <p:sp>
-        <p:nvSpPr>
-          <p:cNvPr id="5" name="TextBox 4"/>
-          <p:cNvSpPr txBox="1"/>
-          <p:nvPr/>
-        </p:nvSpPr>
-        <p:spPr>
-          <a:xfrm>
-            <a:off x="5303519" y="1920240"/>
-            <a:ext cx="6110935" cy="868679"/>
-          </a:xfrm>
-          <a:prstGeom prst="rect">
-            <a:avLst/>
-          </a:prstGeom>
-          <a:noFill/>
-        </p:spPr>
-        <p:txBody>
-          <a:bodyPr wrap="square" lIns="0" rIns="0" tIns="0" bIns="0">
-            <a:spAutoFit/>
-          </a:bodyPr>
-          <a:lstStyle/>
-          <a:p>
-            <a:pPr algn="l">
-              <a:lnSpc>
-                <a:spcPct val="105000"/>
-              </a:lnSpc>
-              <a:spcBef>
-                <a:spcPts val="0"/>
-              </a:spcBef>
-              <a:spcAft>
-                <a:spcPts val="0"/>
-              </a:spcAft>
-            </a:pPr>
-            <a:r>
-              <a:rPr sz="2100" b="0">
-                <a:solidFill>
-                  <a:srgbClr val="1E1E1E"/>
-                </a:solidFill>
-                <a:latin typeface="Roboto"/>
-              </a:rPr>
-              <a:t>O lugar que guarda o conteúdo e distribui a resposta certa.</a:t>
-            </a:r>
-          </a:p>
-        </p:txBody>
-      </p:sp>
-      <p:sp>
-        <p:nvSpPr>
-          <p:cNvPr id="6" name="Rectangle 5"/>
-          <p:cNvSpPr/>
-          <p:nvPr/>
-        </p:nvSpPr>
-        <p:spPr>
-          <a:xfrm>
-            <a:off x="777240" y="2765145"/>
-            <a:ext cx="10637215" cy="9525"/>
-          </a:xfrm>
-          <a:prstGeom prst="rect">
-            <a:avLst/>
-          </a:prstGeom>
-          <a:solidFill>
-            <a:srgbClr val="D6D6D6"/>
-          </a:solidFill>
-          <a:ln>
-            <a:noFill/>
-          </a:ln>
-          <a:effectLst/>
-        </p:spPr>
-        <p:style>
-          <a:lnRef idx="1">
-            <a:schemeClr val="accent1"/>
-          </a:lnRef>
-          <a:fillRef idx="3">
-            <a:schemeClr val="accent1"/>
-          </a:fillRef>
-          <a:effectRef idx="2">
-            <a:schemeClr val="accent1"/>
-          </a:effectRef>
-          <a:fontRef idx="minor">
-            <a:schemeClr val="lt1"/>
-          </a:fontRef>
-        </p:style>
-        <p:txBody>
-          <a:bodyPr rtlCol="0" anchor="ctr"/>
-          <a:lstStyle/>
-          <a:p>
-            <a:pPr algn="ctr"/>
-          </a:p>
-        </p:txBody>
-      </p:sp>
-      <p:sp>
-        <p:nvSpPr>
-          <p:cNvPr id="7" name="TextBox 6"/>
-          <p:cNvSpPr txBox="1"/>
-          <p:nvPr/>
-        </p:nvSpPr>
-        <p:spPr>
-          <a:xfrm>
-            <a:off x="777240" y="2880360"/>
-            <a:ext cx="4206240" cy="868679"/>
-          </a:xfrm>
-          <a:prstGeom prst="rect">
-            <a:avLst/>
-          </a:prstGeom>
-          <a:noFill/>
-        </p:spPr>
-        <p:txBody>
-          <a:bodyPr wrap="square" lIns="0" rIns="0" tIns="0" bIns="0">
-            <a:spAutoFit/>
-          </a:bodyPr>
-          <a:lstStyle/>
-          <a:p>
-            <a:pPr algn="l">
-              <a:lnSpc>
-                <a:spcPct val="105000"/>
-              </a:lnSpc>
-              <a:spcBef>
-                <a:spcPts val="0"/>
-              </a:spcBef>
-              <a:spcAft>
-                <a:spcPts val="0"/>
-              </a:spcAft>
-            </a:pPr>
-            <a:r>
-              <a:rPr sz="2100" b="1">
-                <a:solidFill>
-                  <a:srgbClr val="9A6A00"/>
-                </a:solidFill>
-                <a:latin typeface="Roboto"/>
-              </a:rPr>
-              <a:t>Passa a ser</a:t>
-            </a:r>
-          </a:p>
-        </p:txBody>
-      </p:sp>
-      <p:sp>
-        <p:nvSpPr>
-          <p:cNvPr id="8" name="TextBox 7"/>
-          <p:cNvSpPr txBox="1"/>
-          <p:nvPr/>
-        </p:nvSpPr>
-        <p:spPr>
-          <a:xfrm>
-            <a:off x="5303519" y="2880360"/>
-            <a:ext cx="6110935" cy="868679"/>
-          </a:xfrm>
-          <a:prstGeom prst="rect">
-            <a:avLst/>
-          </a:prstGeom>
-          <a:noFill/>
-        </p:spPr>
-        <p:txBody>
-          <a:bodyPr wrap="square" lIns="0" rIns="0" tIns="0" bIns="0">
-            <a:spAutoFit/>
-          </a:bodyPr>
-          <a:lstStyle/>
-          <a:p>
-            <a:pPr algn="l">
-              <a:lnSpc>
-                <a:spcPct val="105000"/>
-              </a:lnSpc>
-              <a:spcBef>
-                <a:spcPts val="0"/>
-              </a:spcBef>
-              <a:spcAft>
-                <a:spcPts val="0"/>
-              </a:spcAft>
-            </a:pPr>
-            <a:r>
-              <a:rPr sz="2100" b="0">
-                <a:solidFill>
-                  <a:srgbClr val="1E1E1E"/>
-                </a:solidFill>
-                <a:latin typeface="Roboto"/>
-              </a:rPr>
-              <a:t>O lugar que ensina a formular a pergunta, julgar a resposta e assumir a decisão.</a:t>
-            </a:r>
-          </a:p>
-        </p:txBody>
-      </p:sp>
-      <p:sp>
-        <p:nvSpPr>
-          <p:cNvPr id="9" name="Rectangle 8"/>
-          <p:cNvSpPr/>
-          <p:nvPr/>
-        </p:nvSpPr>
-        <p:spPr>
-          <a:xfrm>
-            <a:off x="777240" y="3725265"/>
-            <a:ext cx="10637215" cy="9525"/>
-          </a:xfrm>
-          <a:prstGeom prst="rect">
-            <a:avLst/>
-          </a:prstGeom>
-          <a:solidFill>
-            <a:srgbClr val="D6D6D6"/>
-          </a:solidFill>
-          <a:ln>
-            <a:noFill/>
-          </a:ln>
-          <a:effectLst/>
-        </p:spPr>
-        <p:style>
-          <a:lnRef idx="1">
-            <a:schemeClr val="accent1"/>
-          </a:lnRef>
-          <a:fillRef idx="3">
-            <a:schemeClr val="accent1"/>
-          </a:fillRef>
-          <a:effectRef idx="2">
-            <a:schemeClr val="accent1"/>
-          </a:effectRef>
-          <a:fontRef idx="minor">
-            <a:schemeClr val="lt1"/>
-          </a:fontRef>
-        </p:style>
-        <p:txBody>
-          <a:bodyPr rtlCol="0" anchor="ctr"/>
-          <a:lstStyle/>
-          <a:p>
-            <a:pPr algn="ctr"/>
-          </a:p>
-        </p:txBody>
-      </p:sp>
-      <p:sp>
-        <p:nvSpPr>
-          <p:cNvPr id="10" name="TextBox 9"/>
-          <p:cNvSpPr txBox="1"/>
-          <p:nvPr/>
-        </p:nvSpPr>
-        <p:spPr>
-          <a:xfrm>
-            <a:off x="777240" y="3840479"/>
-            <a:ext cx="4206240" cy="868679"/>
-          </a:xfrm>
-          <a:prstGeom prst="rect">
-            <a:avLst/>
-          </a:prstGeom>
-          <a:noFill/>
-        </p:spPr>
-        <p:txBody>
-          <a:bodyPr wrap="square" lIns="0" rIns="0" tIns="0" bIns="0">
-            <a:spAutoFit/>
-          </a:bodyPr>
-          <a:lstStyle/>
-          <a:p>
-            <a:pPr algn="l">
-              <a:lnSpc>
-                <a:spcPct val="105000"/>
-              </a:lnSpc>
-              <a:spcBef>
-                <a:spcPts val="0"/>
-              </a:spcBef>
-              <a:spcAft>
-                <a:spcPts val="0"/>
-              </a:spcAft>
-            </a:pPr>
-            <a:r>
-              <a:rPr sz="2100" b="1">
-                <a:solidFill>
-                  <a:srgbClr val="9A6A00"/>
-                </a:solidFill>
-                <a:latin typeface="Roboto"/>
-              </a:rPr>
-              <a:t>A sociedade ganha</a:t>
-            </a:r>
-          </a:p>
-        </p:txBody>
-      </p:sp>
-      <p:sp>
-        <p:nvSpPr>
-          <p:cNvPr id="11" name="TextBox 10"/>
-          <p:cNvSpPr txBox="1"/>
-          <p:nvPr/>
-        </p:nvSpPr>
-        <p:spPr>
-          <a:xfrm>
-            <a:off x="5303519" y="3840479"/>
-            <a:ext cx="6110935" cy="868679"/>
-          </a:xfrm>
-          <a:prstGeom prst="rect">
-            <a:avLst/>
-          </a:prstGeom>
-          <a:noFill/>
-        </p:spPr>
-        <p:txBody>
-          <a:bodyPr wrap="square" lIns="0" rIns="0" tIns="0" bIns="0">
-            <a:spAutoFit/>
-          </a:bodyPr>
-          <a:lstStyle/>
-          <a:p>
-            <a:pPr algn="l">
-              <a:lnSpc>
-                <a:spcPct val="105000"/>
-              </a:lnSpc>
-              <a:spcBef>
-                <a:spcPts val="0"/>
-              </a:spcBef>
-              <a:spcAft>
-                <a:spcPts val="0"/>
-              </a:spcAft>
-            </a:pPr>
-            <a:r>
-              <a:rPr sz="2100" b="0">
-                <a:solidFill>
-                  <a:srgbClr val="1E1E1E"/>
-                </a:solidFill>
-                <a:latin typeface="Roboto"/>
-              </a:rPr>
-              <a:t>Problema real da região resolvido por aluno de primeiro semestre, e não daqui a quatro anos.</a:t>
-            </a:r>
-          </a:p>
-        </p:txBody>
-      </p:sp>
-      <p:sp>
-        <p:nvSpPr>
-          <p:cNvPr id="12" name="Rectangle 11"/>
-          <p:cNvSpPr/>
-          <p:nvPr/>
-        </p:nvSpPr>
-        <p:spPr>
-          <a:xfrm>
-            <a:off x="777240" y="4685385"/>
-            <a:ext cx="10637215" cy="9525"/>
-          </a:xfrm>
-          <a:prstGeom prst="rect">
-            <a:avLst/>
-          </a:prstGeom>
-          <a:solidFill>
-            <a:srgbClr val="D6D6D6"/>
-          </a:solidFill>
-          <a:ln>
-            <a:noFill/>
-          </a:ln>
-          <a:effectLst/>
-        </p:spPr>
-        <p:style>
-          <a:lnRef idx="1">
-            <a:schemeClr val="accent1"/>
-          </a:lnRef>
-          <a:fillRef idx="3">
-            <a:schemeClr val="accent1"/>
-          </a:fillRef>
-          <a:effectRef idx="2">
-            <a:schemeClr val="accent1"/>
-          </a:effectRef>
-          <a:fontRef idx="minor">
-            <a:schemeClr val="lt1"/>
-          </a:fontRef>
-        </p:style>
-        <p:txBody>
-          <a:bodyPr rtlCol="0" anchor="ctr"/>
-          <a:lstStyle/>
-          <a:p>
-            <a:pPr algn="ctr"/>
-          </a:p>
-        </p:txBody>
-      </p:sp>
-      <p:sp>
-        <p:nvSpPr>
           <p:cNvPr id="13" name="TextBox 12"/>
-          <p:cNvSpPr txBox="1"/>
-          <p:nvPr/>
-        </p:nvSpPr>
-        <p:spPr>
-          <a:xfrm>
-            <a:off x="777240" y="4800599"/>
-            <a:ext cx="4206240" cy="868679"/>
-          </a:xfrm>
-          <a:prstGeom prst="rect">
-            <a:avLst/>
-          </a:prstGeom>
-          <a:noFill/>
-        </p:spPr>
-        <p:txBody>
-          <a:bodyPr wrap="square" lIns="0" rIns="0" tIns="0" bIns="0">
-            <a:spAutoFit/>
-          </a:bodyPr>
-          <a:lstStyle/>
-          <a:p>
-            <a:pPr algn="l">
-              <a:lnSpc>
-                <a:spcPct val="105000"/>
-              </a:lnSpc>
-              <a:spcBef>
-                <a:spcPts val="0"/>
-              </a:spcBef>
-              <a:spcAft>
-                <a:spcPts val="0"/>
-              </a:spcAft>
-            </a:pPr>
-            <a:r>
-              <a:rPr sz="2100" b="1">
-                <a:solidFill>
-                  <a:srgbClr val="9A6A00"/>
-                </a:solidFill>
-                <a:latin typeface="Roboto"/>
-              </a:rPr>
-              <a:t>A sociedade perde se nada mudar</a:t>
-            </a:r>
-          </a:p>
-        </p:txBody>
-      </p:sp>
-      <p:sp>
-        <p:nvSpPr>
-          <p:cNvPr id="14" name="TextBox 13"/>
-          <p:cNvSpPr txBox="1"/>
-          <p:nvPr/>
-        </p:nvSpPr>
-        <p:spPr>
-          <a:xfrm>
-            <a:off x="5303519" y="4800599"/>
-            <a:ext cx="6110935" cy="868679"/>
-          </a:xfrm>
-          <a:prstGeom prst="rect">
-            <a:avLst/>
-          </a:prstGeom>
-          <a:noFill/>
-        </p:spPr>
-        <p:txBody>
-          <a:bodyPr wrap="square" lIns="0" rIns="0" tIns="0" bIns="0">
-            <a:spAutoFit/>
-          </a:bodyPr>
-          <a:lstStyle/>
-          <a:p>
-            <a:pPr algn="l">
-              <a:lnSpc>
-                <a:spcPct val="105000"/>
-              </a:lnSpc>
-              <a:spcBef>
-                <a:spcPts val="0"/>
-              </a:spcBef>
-              <a:spcAft>
-                <a:spcPts val="0"/>
-              </a:spcAft>
-            </a:pPr>
-            <a:r>
-              <a:rPr sz="2100" b="0">
-                <a:solidFill>
-                  <a:srgbClr val="1E1E1E"/>
-                </a:solidFill>
-                <a:latin typeface="Roboto"/>
-              </a:rPr>
-              <a:t>Forma-se gente qualificada para a tarefa que a máquina já faz por centavos.</a:t>
-            </a:r>
-          </a:p>
-        </p:txBody>
-      </p:sp>
-      <p:sp>
-        <p:nvSpPr>
-          <p:cNvPr id="15" name="Rectangle 14"/>
-          <p:cNvSpPr/>
-          <p:nvPr/>
-        </p:nvSpPr>
-        <p:spPr>
-          <a:xfrm>
-            <a:off x="777240" y="5907024"/>
-            <a:ext cx="10637215" cy="9525"/>
-          </a:xfrm>
-          <a:prstGeom prst="rect">
-            <a:avLst/>
-          </a:prstGeom>
-          <a:solidFill>
-            <a:srgbClr val="D6D6D6"/>
-          </a:solidFill>
-          <a:ln>
-            <a:noFill/>
-          </a:ln>
-          <a:effectLst/>
-        </p:spPr>
-        <p:style>
-          <a:lnRef idx="1">
-            <a:schemeClr val="accent1"/>
-          </a:lnRef>
-          <a:fillRef idx="3">
-            <a:schemeClr val="accent1"/>
-          </a:fillRef>
-          <a:effectRef idx="2">
-            <a:schemeClr val="accent1"/>
-          </a:effectRef>
-          <a:fontRef idx="minor">
-            <a:schemeClr val="lt1"/>
-          </a:fontRef>
-        </p:style>
-        <p:txBody>
-          <a:bodyPr rtlCol="0" anchor="ctr"/>
-          <a:lstStyle/>
-          <a:p>
-            <a:pPr algn="ctr"/>
-          </a:p>
-        </p:txBody>
-      </p:sp>
-      <p:sp>
-        <p:nvSpPr>
-          <p:cNvPr id="16" name="TextBox 15"/>
           <p:cNvSpPr txBox="1"/>
           <p:nvPr/>
         </p:nvSpPr>
@@ -15369,14 +13218,14 @@
                 </a:solidFill>
                 <a:latin typeface="Roboto"/>
               </a:rPr>
-              <a:t>Ou a universidade puxa a região, ou a região fica esperando.</a:t>
-            </a:r>
-          </a:p>
-        </p:txBody>
-      </p:sp>
-      <p:sp>
-        <p:nvSpPr>
-          <p:cNvPr id="17" name="TextBox 16"/>
+              <a:t>Entregaram em duas horas aplicações que teriam sido trabalho de conclusão há cinco anos.</a:t>
+            </a:r>
+          </a:p>
+        </p:txBody>
+      </p:sp>
+      <p:sp>
+        <p:nvSpPr>
+          <p:cNvPr id="14" name="TextBox 13"/>
           <p:cNvSpPr txBox="1"/>
           <p:nvPr/>
         </p:nvSpPr>
@@ -15445,59 +13294,83 @@
         </p:nvSpPr>
         <p:spPr>
           <a:xfrm>
-            <a:off x="777240" y="1051560"/>
-            <a:ext cx="10637215" cy="365760"/>
-          </a:xfrm>
-          <a:prstGeom prst="rect">
-            <a:avLst/>
-          </a:prstGeom>
-          <a:noFill/>
-        </p:spPr>
-        <p:txBody>
-          <a:bodyPr wrap="square" lIns="0" rIns="0" tIns="0" bIns="0">
-            <a:spAutoFit/>
-          </a:bodyPr>
-          <a:lstStyle/>
-          <a:p>
-            <a:pPr algn="l">
-              <a:lnSpc>
-                <a:spcPct val="105000"/>
-              </a:lnSpc>
-              <a:spcBef>
-                <a:spcPts val="0"/>
-              </a:spcBef>
-              <a:spcAft>
-                <a:spcPts val="0"/>
-              </a:spcAft>
-            </a:pPr>
-            <a:r>
-              <a:rPr sz="1900" b="1">
-                <a:solidFill>
-                  <a:srgbClr val="9A6A00"/>
-                </a:solidFill>
-                <a:latin typeface="Roboto"/>
-              </a:rPr>
-              <a:t>PERGUNTA 6 PARA A PLATEIA</a:t>
-            </a:r>
-          </a:p>
-        </p:txBody>
-      </p:sp>
-      <p:sp>
-        <p:nvSpPr>
-          <p:cNvPr id="3" name="Rectangle 2"/>
+            <a:off x="777240" y="411480"/>
+            <a:ext cx="10637215" cy="1325880"/>
+          </a:xfrm>
+          <a:prstGeom prst="rect">
+            <a:avLst/>
+          </a:prstGeom>
+          <a:noFill/>
+        </p:spPr>
+        <p:txBody>
+          <a:bodyPr wrap="square" lIns="0" rIns="0" tIns="0" bIns="0">
+            <a:spAutoFit/>
+          </a:bodyPr>
+          <a:lstStyle/>
+          <a:p>
+            <a:pPr algn="l">
+              <a:lnSpc>
+                <a:spcPct val="104000"/>
+              </a:lnSpc>
+              <a:spcBef>
+                <a:spcPts val="0"/>
+              </a:spcBef>
+              <a:spcAft>
+                <a:spcPts val="0"/>
+              </a:spcAft>
+            </a:pPr>
+            <a:r>
+              <a:rPr sz="4000" b="1">
+                <a:solidFill>
+                  <a:srgbClr val="1E1E1E"/>
+                </a:solidFill>
+                <a:latin typeface="Roboto"/>
+              </a:rPr>
+              <a:t>O mesmo entregável, cinco anos depois</a:t>
+            </a:r>
+          </a:p>
+        </p:txBody>
+      </p:sp>
+      <p:pic>
+        <p:nvPicPr>
+          <p:cNvPr id="3" name="Picture 2" descr="12_tcc.png"/>
+          <p:cNvPicPr>
+            <a:picLocks noChangeAspect="1"/>
+          </p:cNvPicPr>
+          <p:nvPr/>
+        </p:nvPicPr>
+        <p:blipFill>
+          <a:blip r:embed="rId2"/>
+          <a:stretch>
+            <a:fillRect/>
+          </a:stretch>
+        </p:blipFill>
+        <p:spPr>
+          <a:xfrm>
+            <a:off x="777240" y="1920240"/>
+            <a:ext cx="10637215" cy="3840479"/>
+          </a:xfrm>
+          <a:prstGeom prst="rect">
+            <a:avLst/>
+          </a:prstGeom>
+        </p:spPr>
+      </p:pic>
+      <p:sp>
+        <p:nvSpPr>
+          <p:cNvPr id="4" name="Rectangle 3"/>
           <p:cNvSpPr/>
           <p:nvPr/>
         </p:nvSpPr>
         <p:spPr>
           <a:xfrm>
-            <a:off x="777240" y="1627632"/>
-            <a:ext cx="2743200" cy="44450"/>
+            <a:off x="777240" y="5907024"/>
+            <a:ext cx="10637215" cy="9525"/>
           </a:xfrm>
           <a:prstGeom prst="rect">
             <a:avLst/>
           </a:prstGeom>
           <a:solidFill>
-            <a:srgbClr val="E0A100"/>
+            <a:srgbClr val="D6D6D6"/>
           </a:solidFill>
           <a:ln>
             <a:noFill/>
@@ -15528,90 +13401,45 @@
       </p:sp>
       <p:sp>
         <p:nvSpPr>
-          <p:cNvPr id="4" name="TextBox 3"/>
-          <p:cNvSpPr txBox="1"/>
-          <p:nvPr/>
-        </p:nvSpPr>
-        <p:spPr>
-          <a:xfrm>
-            <a:off x="777240" y="2057400"/>
-            <a:ext cx="10637215" cy="2743200"/>
-          </a:xfrm>
-          <a:prstGeom prst="rect">
-            <a:avLst/>
-          </a:prstGeom>
-          <a:noFill/>
-        </p:spPr>
-        <p:txBody>
-          <a:bodyPr wrap="square" lIns="0" rIns="0" tIns="0" bIns="0">
-            <a:spAutoFit/>
-          </a:bodyPr>
-          <a:lstStyle/>
-          <a:p>
-            <a:pPr algn="l">
-              <a:lnSpc>
-                <a:spcPct val="108000"/>
-              </a:lnSpc>
-              <a:spcBef>
-                <a:spcPts val="0"/>
-              </a:spcBef>
-              <a:spcAft>
-                <a:spcPts val="0"/>
-              </a:spcAft>
-            </a:pPr>
-            <a:r>
-              <a:rPr sz="4600" b="1">
-                <a:solidFill>
-                  <a:srgbClr val="1E1E1E"/>
-                </a:solidFill>
-                <a:latin typeface="Roboto"/>
-              </a:rPr>
-              <a:t>Se eu te devolvesse uma hora por dia, o que você faria com ela?</a:t>
-            </a:r>
-          </a:p>
-        </p:txBody>
-      </p:sp>
-      <p:sp>
-        <p:nvSpPr>
           <p:cNvPr id="5" name="TextBox 4"/>
           <p:cNvSpPr txBox="1"/>
           <p:nvPr/>
         </p:nvSpPr>
         <p:spPr>
           <a:xfrm>
-            <a:off x="777240" y="4983480"/>
-            <a:ext cx="10637215" cy="731520"/>
-          </a:xfrm>
-          <a:prstGeom prst="rect">
-            <a:avLst/>
-          </a:prstGeom>
-          <a:noFill/>
-        </p:spPr>
-        <p:txBody>
-          <a:bodyPr wrap="square" lIns="0" rIns="0" tIns="0" bIns="0">
-            <a:spAutoFit/>
-          </a:bodyPr>
-          <a:lstStyle/>
-          <a:p>
-            <a:pPr algn="l">
-              <a:lnSpc>
-                <a:spcPct val="105000"/>
-              </a:lnSpc>
-              <a:spcBef>
-                <a:spcPts val="0"/>
-              </a:spcBef>
-              <a:spcAft>
-                <a:spcPts val="0"/>
-              </a:spcAft>
-            </a:pPr>
-            <a:r>
-              <a:rPr sz="2400" b="0">
-                <a:solidFill>
-                  <a:srgbClr val="6E6E6E"/>
-                </a:solidFill>
-                <a:latin typeface="Roboto"/>
-              </a:rPr>
-              <a:t>Essa é a única pergunta que realmente importa sobre produtividade.</a:t>
+            <a:off x="777240" y="6016752"/>
+            <a:ext cx="10637215" cy="502920"/>
+          </a:xfrm>
+          <a:prstGeom prst="rect">
+            <a:avLst/>
+          </a:prstGeom>
+          <a:noFill/>
+        </p:spPr>
+        <p:txBody>
+          <a:bodyPr wrap="square" lIns="0" rIns="0" tIns="0" bIns="0">
+            <a:spAutoFit/>
+          </a:bodyPr>
+          <a:lstStyle/>
+          <a:p>
+            <a:pPr algn="l">
+              <a:lnSpc>
+                <a:spcPct val="105000"/>
+              </a:lnSpc>
+              <a:spcBef>
+                <a:spcPts val="0"/>
+              </a:spcBef>
+              <a:spcAft>
+                <a:spcPts val="0"/>
+              </a:spcAft>
+            </a:pPr>
+            <a:r>
+              <a:rPr sz="1900" b="1">
+                <a:solidFill>
+                  <a:srgbClr val="9A6A00"/>
+                </a:solidFill>
+                <a:latin typeface="Roboto"/>
+              </a:rPr>
+              <a:t>Não foi o aluno que ficou genial. Foi o custo de produzir que despencou.</a:t>
             </a:r>
           </a:p>
         </p:txBody>
@@ -15719,7 +13547,7 @@
                 </a:solidFill>
                 <a:latin typeface="Roboto"/>
               </a:rPr>
-              <a:t>Quatro hábitos para começar amanhã de manhã</a:t>
+              <a:t>O que a disciplina precisou virar</a:t>
             </a:r>
           </a:p>
         </p:txBody>
@@ -15777,38 +13605,38 @@
         <p:spPr>
           <a:xfrm>
             <a:off x="777240" y="1920240"/>
-            <a:ext cx="1051560" cy="868679"/>
-          </a:xfrm>
-          <a:prstGeom prst="rect">
-            <a:avLst/>
-          </a:prstGeom>
-          <a:noFill/>
-        </p:spPr>
-        <p:txBody>
-          <a:bodyPr wrap="square" lIns="0" rIns="0" tIns="0" bIns="0">
-            <a:spAutoFit/>
-          </a:bodyPr>
-          <a:lstStyle/>
-          <a:p>
-            <a:pPr algn="l">
-              <a:lnSpc>
-                <a:spcPct val="105000"/>
-              </a:lnSpc>
-              <a:spcBef>
-                <a:spcPts val="0"/>
-              </a:spcBef>
-              <a:spcAft>
-                <a:spcPts val="0"/>
-              </a:spcAft>
-            </a:pPr>
-            <a:r>
-              <a:rPr sz="3400" b="1">
-                <a:solidFill>
-                  <a:srgbClr val="E0A100"/>
-                </a:solidFill>
-                <a:latin typeface="Roboto"/>
-              </a:rPr>
-              <a:t>01</a:t>
+            <a:ext cx="3931920" cy="1188719"/>
+          </a:xfrm>
+          <a:prstGeom prst="rect">
+            <a:avLst/>
+          </a:prstGeom>
+          <a:noFill/>
+        </p:spPr>
+        <p:txBody>
+          <a:bodyPr wrap="square" lIns="0" rIns="0" tIns="0" bIns="0">
+            <a:spAutoFit/>
+          </a:bodyPr>
+          <a:lstStyle/>
+          <a:p>
+            <a:pPr algn="l">
+              <a:lnSpc>
+                <a:spcPct val="105000"/>
+              </a:lnSpc>
+              <a:spcBef>
+                <a:spcPts val="0"/>
+              </a:spcBef>
+              <a:spcAft>
+                <a:spcPts val="0"/>
+              </a:spcAft>
+            </a:pPr>
+            <a:r>
+              <a:rPr sz="2100" b="1">
+                <a:solidFill>
+                  <a:srgbClr val="9A6A00"/>
+                </a:solidFill>
+                <a:latin typeface="Roboto"/>
+              </a:rPr>
+              <a:t>O que saiu de cena</a:t>
             </a:r>
           </a:p>
         </p:txBody>
@@ -15821,8 +13649,8 @@
         </p:nvSpPr>
         <p:spPr>
           <a:xfrm>
-            <a:off x="1920240" y="2022602"/>
-            <a:ext cx="9494215" cy="766317"/>
+            <a:off x="5029199" y="1920240"/>
+            <a:ext cx="6385255" cy="1188719"/>
           </a:xfrm>
           <a:prstGeom prst="rect">
             <a:avLst/>
@@ -15853,290 +13681,20 @@
                 </a:solidFill>
                 <a:latin typeface="Roboto"/>
               </a:rPr>
-              <a:t>Dê contexto: quem você é, para quem é, qual a restrição. Pedido vago, resposta vaga.</a:t>
-            </a:r>
-          </a:p>
-        </p:txBody>
-      </p:sp>
-      <p:sp>
-        <p:nvSpPr>
-          <p:cNvPr id="6" name="TextBox 5"/>
-          <p:cNvSpPr txBox="1"/>
-          <p:nvPr/>
-        </p:nvSpPr>
-        <p:spPr>
-          <a:xfrm>
-            <a:off x="777240" y="2880360"/>
-            <a:ext cx="1051560" cy="868679"/>
-          </a:xfrm>
-          <a:prstGeom prst="rect">
-            <a:avLst/>
-          </a:prstGeom>
-          <a:noFill/>
-        </p:spPr>
-        <p:txBody>
-          <a:bodyPr wrap="square" lIns="0" rIns="0" tIns="0" bIns="0">
-            <a:spAutoFit/>
-          </a:bodyPr>
-          <a:lstStyle/>
-          <a:p>
-            <a:pPr algn="l">
-              <a:lnSpc>
-                <a:spcPct val="105000"/>
-              </a:lnSpc>
-              <a:spcBef>
-                <a:spcPts val="0"/>
-              </a:spcBef>
-              <a:spcAft>
-                <a:spcPts val="0"/>
-              </a:spcAft>
-            </a:pPr>
-            <a:r>
-              <a:rPr sz="3400" b="1">
-                <a:solidFill>
-                  <a:srgbClr val="E0A100"/>
-                </a:solidFill>
-                <a:latin typeface="Roboto"/>
-              </a:rPr>
-              <a:t>02</a:t>
-            </a:r>
-          </a:p>
-        </p:txBody>
-      </p:sp>
-      <p:sp>
-        <p:nvSpPr>
-          <p:cNvPr id="7" name="TextBox 6"/>
-          <p:cNvSpPr txBox="1"/>
-          <p:nvPr/>
-        </p:nvSpPr>
-        <p:spPr>
-          <a:xfrm>
-            <a:off x="1920240" y="2982722"/>
-            <a:ext cx="9494215" cy="766317"/>
-          </a:xfrm>
-          <a:prstGeom prst="rect">
-            <a:avLst/>
-          </a:prstGeom>
-          <a:noFill/>
-        </p:spPr>
-        <p:txBody>
-          <a:bodyPr wrap="square" lIns="0" rIns="0" tIns="0" bIns="0">
-            <a:spAutoFit/>
-          </a:bodyPr>
-          <a:lstStyle/>
-          <a:p>
-            <a:pPr algn="l">
-              <a:lnSpc>
-                <a:spcPct val="105000"/>
-              </a:lnSpc>
-              <a:spcBef>
-                <a:spcPts val="0"/>
-              </a:spcBef>
-              <a:spcAft>
-                <a:spcPts val="0"/>
-              </a:spcAft>
-            </a:pPr>
-            <a:r>
-              <a:rPr sz="2100" b="0">
-                <a:solidFill>
-                  <a:srgbClr val="1E1E1E"/>
-                </a:solidFill>
-                <a:latin typeface="Roboto"/>
-              </a:rPr>
-              <a:t>Peça três versões, nunca uma. A primeira quase nunca é a melhor.</a:t>
-            </a:r>
-          </a:p>
-        </p:txBody>
-      </p:sp>
-      <p:sp>
-        <p:nvSpPr>
-          <p:cNvPr id="8" name="TextBox 7"/>
-          <p:cNvSpPr txBox="1"/>
-          <p:nvPr/>
-        </p:nvSpPr>
-        <p:spPr>
-          <a:xfrm>
-            <a:off x="777240" y="3840479"/>
-            <a:ext cx="1051560" cy="868679"/>
-          </a:xfrm>
-          <a:prstGeom prst="rect">
-            <a:avLst/>
-          </a:prstGeom>
-          <a:noFill/>
-        </p:spPr>
-        <p:txBody>
-          <a:bodyPr wrap="square" lIns="0" rIns="0" tIns="0" bIns="0">
-            <a:spAutoFit/>
-          </a:bodyPr>
-          <a:lstStyle/>
-          <a:p>
-            <a:pPr algn="l">
-              <a:lnSpc>
-                <a:spcPct val="105000"/>
-              </a:lnSpc>
-              <a:spcBef>
-                <a:spcPts val="0"/>
-              </a:spcBef>
-              <a:spcAft>
-                <a:spcPts val="0"/>
-              </a:spcAft>
-            </a:pPr>
-            <a:r>
-              <a:rPr sz="3400" b="1">
-                <a:solidFill>
-                  <a:srgbClr val="E0A100"/>
-                </a:solidFill>
-                <a:latin typeface="Roboto"/>
-              </a:rPr>
-              <a:t>03</a:t>
-            </a:r>
-          </a:p>
-        </p:txBody>
-      </p:sp>
-      <p:sp>
-        <p:nvSpPr>
-          <p:cNvPr id="9" name="TextBox 8"/>
-          <p:cNvSpPr txBox="1"/>
-          <p:nvPr/>
-        </p:nvSpPr>
-        <p:spPr>
-          <a:xfrm>
-            <a:off x="1920240" y="3942841"/>
-            <a:ext cx="9494215" cy="766317"/>
-          </a:xfrm>
-          <a:prstGeom prst="rect">
-            <a:avLst/>
-          </a:prstGeom>
-          <a:noFill/>
-        </p:spPr>
-        <p:txBody>
-          <a:bodyPr wrap="square" lIns="0" rIns="0" tIns="0" bIns="0">
-            <a:spAutoFit/>
-          </a:bodyPr>
-          <a:lstStyle/>
-          <a:p>
-            <a:pPr algn="l">
-              <a:lnSpc>
-                <a:spcPct val="105000"/>
-              </a:lnSpc>
-              <a:spcBef>
-                <a:spcPts val="0"/>
-              </a:spcBef>
-              <a:spcAft>
-                <a:spcPts val="0"/>
-              </a:spcAft>
-            </a:pPr>
-            <a:r>
-              <a:rPr sz="2100" b="0">
-                <a:solidFill>
-                  <a:srgbClr val="1E1E1E"/>
-                </a:solidFill>
-                <a:latin typeface="Roboto"/>
-              </a:rPr>
-              <a:t>Verifique tudo que tem número, nome próprio ou fonte. Sem exceção.</a:t>
-            </a:r>
-          </a:p>
-        </p:txBody>
-      </p:sp>
-      <p:sp>
-        <p:nvSpPr>
-          <p:cNvPr id="10" name="TextBox 9"/>
-          <p:cNvSpPr txBox="1"/>
-          <p:nvPr/>
-        </p:nvSpPr>
-        <p:spPr>
-          <a:xfrm>
-            <a:off x="777240" y="4800599"/>
-            <a:ext cx="1051560" cy="868679"/>
-          </a:xfrm>
-          <a:prstGeom prst="rect">
-            <a:avLst/>
-          </a:prstGeom>
-          <a:noFill/>
-        </p:spPr>
-        <p:txBody>
-          <a:bodyPr wrap="square" lIns="0" rIns="0" tIns="0" bIns="0">
-            <a:spAutoFit/>
-          </a:bodyPr>
-          <a:lstStyle/>
-          <a:p>
-            <a:pPr algn="l">
-              <a:lnSpc>
-                <a:spcPct val="105000"/>
-              </a:lnSpc>
-              <a:spcBef>
-                <a:spcPts val="0"/>
-              </a:spcBef>
-              <a:spcAft>
-                <a:spcPts val="0"/>
-              </a:spcAft>
-            </a:pPr>
-            <a:r>
-              <a:rPr sz="3400" b="1">
-                <a:solidFill>
-                  <a:srgbClr val="E0A100"/>
-                </a:solidFill>
-                <a:latin typeface="Roboto"/>
-              </a:rPr>
-              <a:t>04</a:t>
-            </a:r>
-          </a:p>
-        </p:txBody>
-      </p:sp>
-      <p:sp>
-        <p:nvSpPr>
-          <p:cNvPr id="11" name="TextBox 10"/>
-          <p:cNvSpPr txBox="1"/>
-          <p:nvPr/>
-        </p:nvSpPr>
-        <p:spPr>
-          <a:xfrm>
-            <a:off x="1920240" y="4902961"/>
-            <a:ext cx="9494215" cy="766317"/>
-          </a:xfrm>
-          <a:prstGeom prst="rect">
-            <a:avLst/>
-          </a:prstGeom>
-          <a:noFill/>
-        </p:spPr>
-        <p:txBody>
-          <a:bodyPr wrap="square" lIns="0" rIns="0" tIns="0" bIns="0">
-            <a:spAutoFit/>
-          </a:bodyPr>
-          <a:lstStyle/>
-          <a:p>
-            <a:pPr algn="l">
-              <a:lnSpc>
-                <a:spcPct val="105000"/>
-              </a:lnSpc>
-              <a:spcBef>
-                <a:spcPts val="0"/>
-              </a:spcBef>
-              <a:spcAft>
-                <a:spcPts val="0"/>
-              </a:spcAft>
-            </a:pPr>
-            <a:r>
-              <a:rPr sz="2100" b="0">
-                <a:solidFill>
-                  <a:srgbClr val="1E1E1E"/>
-                </a:solidFill>
-                <a:latin typeface="Roboto"/>
-              </a:rPr>
-              <a:t>Nunca entregue o que você não conseguiria defender sozinho na sala.</a:t>
-            </a:r>
-          </a:p>
-        </p:txBody>
-      </p:sp>
-      <p:sp>
-        <p:nvSpPr>
-          <p:cNvPr id="12" name="Rectangle 11"/>
+              <a:t>Decorar sintaxe, entregar código que compila, prova de papel e caneta.</a:t>
+            </a:r>
+          </a:p>
+        </p:txBody>
+      </p:sp>
+      <p:sp>
+        <p:nvSpPr>
+          <p:cNvPr id="6" name="Rectangle 5"/>
           <p:cNvSpPr/>
           <p:nvPr/>
         </p:nvSpPr>
         <p:spPr>
           <a:xfrm>
-            <a:off x="777240" y="5907024"/>
+            <a:off x="777240" y="3046780"/>
             <a:ext cx="10637215" cy="9525"/>
           </a:xfrm>
           <a:prstGeom prst="rect">
@@ -16174,6 +13732,274 @@
       </p:sp>
       <p:sp>
         <p:nvSpPr>
+          <p:cNvPr id="7" name="TextBox 6"/>
+          <p:cNvSpPr txBox="1"/>
+          <p:nvPr/>
+        </p:nvSpPr>
+        <p:spPr>
+          <a:xfrm>
+            <a:off x="777240" y="3200400"/>
+            <a:ext cx="3931920" cy="1188719"/>
+          </a:xfrm>
+          <a:prstGeom prst="rect">
+            <a:avLst/>
+          </a:prstGeom>
+          <a:noFill/>
+        </p:spPr>
+        <p:txBody>
+          <a:bodyPr wrap="square" lIns="0" rIns="0" tIns="0" bIns="0">
+            <a:spAutoFit/>
+          </a:bodyPr>
+          <a:lstStyle/>
+          <a:p>
+            <a:pPr algn="l">
+              <a:lnSpc>
+                <a:spcPct val="105000"/>
+              </a:lnSpc>
+              <a:spcBef>
+                <a:spcPts val="0"/>
+              </a:spcBef>
+              <a:spcAft>
+                <a:spcPts val="0"/>
+              </a:spcAft>
+            </a:pPr>
+            <a:r>
+              <a:rPr sz="2100" b="1">
+                <a:solidFill>
+                  <a:srgbClr val="9A6A00"/>
+                </a:solidFill>
+                <a:latin typeface="Roboto"/>
+              </a:rPr>
+              <a:t>O que entrou no lugar</a:t>
+            </a:r>
+          </a:p>
+        </p:txBody>
+      </p:sp>
+      <p:sp>
+        <p:nvSpPr>
+          <p:cNvPr id="8" name="TextBox 7"/>
+          <p:cNvSpPr txBox="1"/>
+          <p:nvPr/>
+        </p:nvSpPr>
+        <p:spPr>
+          <a:xfrm>
+            <a:off x="5029199" y="3200400"/>
+            <a:ext cx="6385255" cy="1188719"/>
+          </a:xfrm>
+          <a:prstGeom prst="rect">
+            <a:avLst/>
+          </a:prstGeom>
+          <a:noFill/>
+        </p:spPr>
+        <p:txBody>
+          <a:bodyPr wrap="square" lIns="0" rIns="0" tIns="0" bIns="0">
+            <a:spAutoFit/>
+          </a:bodyPr>
+          <a:lstStyle/>
+          <a:p>
+            <a:pPr algn="l">
+              <a:lnSpc>
+                <a:spcPct val="105000"/>
+              </a:lnSpc>
+              <a:spcBef>
+                <a:spcPts val="0"/>
+              </a:spcBef>
+              <a:spcAft>
+                <a:spcPts val="0"/>
+              </a:spcAft>
+            </a:pPr>
+            <a:r>
+              <a:rPr sz="2100" b="0">
+                <a:solidFill>
+                  <a:srgbClr val="1E1E1E"/>
+                </a:solidFill>
+                <a:latin typeface="Roboto"/>
+              </a:rPr>
+              <a:t>Especificar o problema, julgar o que a máquina devolveu, defender o resultado de viva-voz.</a:t>
+            </a:r>
+          </a:p>
+        </p:txBody>
+      </p:sp>
+      <p:sp>
+        <p:nvSpPr>
+          <p:cNvPr id="9" name="Rectangle 8"/>
+          <p:cNvSpPr/>
+          <p:nvPr/>
+        </p:nvSpPr>
+        <p:spPr>
+          <a:xfrm>
+            <a:off x="777240" y="4326940"/>
+            <a:ext cx="10637215" cy="9525"/>
+          </a:xfrm>
+          <a:prstGeom prst="rect">
+            <a:avLst/>
+          </a:prstGeom>
+          <a:solidFill>
+            <a:srgbClr val="D6D6D6"/>
+          </a:solidFill>
+          <a:ln>
+            <a:noFill/>
+          </a:ln>
+          <a:effectLst/>
+        </p:spPr>
+        <p:style>
+          <a:lnRef idx="1">
+            <a:schemeClr val="accent1"/>
+          </a:lnRef>
+          <a:fillRef idx="3">
+            <a:schemeClr val="accent1"/>
+          </a:fillRef>
+          <a:effectRef idx="2">
+            <a:schemeClr val="accent1"/>
+          </a:effectRef>
+          <a:fontRef idx="minor">
+            <a:schemeClr val="lt1"/>
+          </a:fontRef>
+        </p:style>
+        <p:txBody>
+          <a:bodyPr rtlCol="0" anchor="ctr"/>
+          <a:lstStyle/>
+          <a:p>
+            <a:pPr algn="ctr"/>
+          </a:p>
+        </p:txBody>
+      </p:sp>
+      <p:sp>
+        <p:nvSpPr>
+          <p:cNvPr id="10" name="TextBox 9"/>
+          <p:cNvSpPr txBox="1"/>
+          <p:nvPr/>
+        </p:nvSpPr>
+        <p:spPr>
+          <a:xfrm>
+            <a:off x="777240" y="4480559"/>
+            <a:ext cx="3931920" cy="1188719"/>
+          </a:xfrm>
+          <a:prstGeom prst="rect">
+            <a:avLst/>
+          </a:prstGeom>
+          <a:noFill/>
+        </p:spPr>
+        <p:txBody>
+          <a:bodyPr wrap="square" lIns="0" rIns="0" tIns="0" bIns="0">
+            <a:spAutoFit/>
+          </a:bodyPr>
+          <a:lstStyle/>
+          <a:p>
+            <a:pPr algn="l">
+              <a:lnSpc>
+                <a:spcPct val="105000"/>
+              </a:lnSpc>
+              <a:spcBef>
+                <a:spcPts val="0"/>
+              </a:spcBef>
+              <a:spcAft>
+                <a:spcPts val="0"/>
+              </a:spcAft>
+            </a:pPr>
+            <a:r>
+              <a:rPr sz="2100" b="1">
+                <a:solidFill>
+                  <a:srgbClr val="9A6A00"/>
+                </a:solidFill>
+                <a:latin typeface="Roboto"/>
+              </a:rPr>
+              <a:t>O que não mudou</a:t>
+            </a:r>
+          </a:p>
+        </p:txBody>
+      </p:sp>
+      <p:sp>
+        <p:nvSpPr>
+          <p:cNvPr id="11" name="TextBox 10"/>
+          <p:cNvSpPr txBox="1"/>
+          <p:nvPr/>
+        </p:nvSpPr>
+        <p:spPr>
+          <a:xfrm>
+            <a:off x="5029199" y="4480559"/>
+            <a:ext cx="6385255" cy="1188719"/>
+          </a:xfrm>
+          <a:prstGeom prst="rect">
+            <a:avLst/>
+          </a:prstGeom>
+          <a:noFill/>
+        </p:spPr>
+        <p:txBody>
+          <a:bodyPr wrap="square" lIns="0" rIns="0" tIns="0" bIns="0">
+            <a:spAutoFit/>
+          </a:bodyPr>
+          <a:lstStyle/>
+          <a:p>
+            <a:pPr algn="l">
+              <a:lnSpc>
+                <a:spcPct val="105000"/>
+              </a:lnSpc>
+              <a:spcBef>
+                <a:spcPts val="0"/>
+              </a:spcBef>
+              <a:spcAft>
+                <a:spcPts val="0"/>
+              </a:spcAft>
+            </a:pPr>
+            <a:r>
+              <a:rPr sz="2100" b="0">
+                <a:solidFill>
+                  <a:srgbClr val="1E1E1E"/>
+                </a:solidFill>
+                <a:latin typeface="Roboto"/>
+              </a:rPr>
+              <a:t>Quem não entende o problema não sabe dizer se a resposta está certa.</a:t>
+            </a:r>
+          </a:p>
+        </p:txBody>
+      </p:sp>
+      <p:sp>
+        <p:nvSpPr>
+          <p:cNvPr id="12" name="Rectangle 11"/>
+          <p:cNvSpPr/>
+          <p:nvPr/>
+        </p:nvSpPr>
+        <p:spPr>
+          <a:xfrm>
+            <a:off x="777240" y="5907024"/>
+            <a:ext cx="10637215" cy="9525"/>
+          </a:xfrm>
+          <a:prstGeom prst="rect">
+            <a:avLst/>
+          </a:prstGeom>
+          <a:solidFill>
+            <a:srgbClr val="D6D6D6"/>
+          </a:solidFill>
+          <a:ln>
+            <a:noFill/>
+          </a:ln>
+          <a:effectLst/>
+        </p:spPr>
+        <p:style>
+          <a:lnRef idx="1">
+            <a:schemeClr val="accent1"/>
+          </a:lnRef>
+          <a:fillRef idx="3">
+            <a:schemeClr val="accent1"/>
+          </a:fillRef>
+          <a:effectRef idx="2">
+            <a:schemeClr val="accent1"/>
+          </a:effectRef>
+          <a:fontRef idx="minor">
+            <a:schemeClr val="lt1"/>
+          </a:fontRef>
+        </p:style>
+        <p:txBody>
+          <a:bodyPr rtlCol="0" anchor="ctr"/>
+          <a:lstStyle/>
+          <a:p>
+            <a:pPr algn="ctr"/>
+          </a:p>
+        </p:txBody>
+      </p:sp>
+      <p:sp>
+        <p:nvSpPr>
           <p:cNvPr id="13" name="TextBox 12"/>
           <p:cNvSpPr txBox="1"/>
           <p:nvPr/>
@@ -16206,13 +14032,13 @@
               </a:spcAft>
             </a:pPr>
             <a:r>
-              <a:rPr sz="1900" b="0">
-                <a:solidFill>
-                  <a:srgbClr val="6E6E6E"/>
-                </a:solidFill>
-                <a:latin typeface="Roboto"/>
-              </a:rPr>
-              <a:t>Quinze minutos por dia, durante trinta dias, mudam mais que um curso de quarenta horas.</a:t>
+              <a:rPr sz="1900" b="1">
+                <a:solidFill>
+                  <a:srgbClr val="9A6A00"/>
+                </a:solidFill>
+                <a:latin typeface="Roboto"/>
+              </a:rPr>
+              <a:t>Vale igual para Administração: a entrega ficou barata, o julgamento ficou caro.</a:t>
             </a:r>
           </a:p>
         </p:txBody>
@@ -16320,7 +14146,7 @@
                 </a:solidFill>
                 <a:latin typeface="Roboto"/>
               </a:rPr>
-              <a:t>O que treinar nos próximos doze meses</a:t>
+              <a:t>O novo papel da universidade, e o que a cidade ganha</a:t>
             </a:r>
           </a:p>
         </p:txBody>
@@ -16333,407 +14159,7 @@
         </p:nvSpPr>
         <p:spPr>
           <a:xfrm>
-            <a:off x="777240" y="1920240"/>
-            <a:ext cx="5067147" cy="57150"/>
-          </a:xfrm>
-          <a:prstGeom prst="rect">
-            <a:avLst/>
-          </a:prstGeom>
-          <a:solidFill>
-            <a:srgbClr val="E0A100"/>
-          </a:solidFill>
-          <a:ln>
-            <a:noFill/>
-          </a:ln>
-          <a:effectLst/>
-        </p:spPr>
-        <p:style>
-          <a:lnRef idx="1">
-            <a:schemeClr val="accent1"/>
-          </a:lnRef>
-          <a:fillRef idx="3">
-            <a:schemeClr val="accent1"/>
-          </a:fillRef>
-          <a:effectRef idx="2">
-            <a:schemeClr val="accent1"/>
-          </a:effectRef>
-          <a:fontRef idx="minor">
-            <a:schemeClr val="lt1"/>
-          </a:fontRef>
-        </p:style>
-        <p:txBody>
-          <a:bodyPr rtlCol="0" anchor="ctr"/>
-          <a:lstStyle/>
-          <a:p>
-            <a:pPr algn="ctr"/>
-          </a:p>
-        </p:txBody>
-      </p:sp>
-      <p:sp>
-        <p:nvSpPr>
-          <p:cNvPr id="4" name="TextBox 3"/>
-          <p:cNvSpPr txBox="1"/>
-          <p:nvPr/>
-        </p:nvSpPr>
-        <p:spPr>
-          <a:xfrm>
-            <a:off x="777240" y="2121408"/>
-            <a:ext cx="5067147" cy="378659"/>
-          </a:xfrm>
-          <a:prstGeom prst="rect">
-            <a:avLst/>
-          </a:prstGeom>
-          <a:noFill/>
-        </p:spPr>
-        <p:txBody>
-          <a:bodyPr wrap="square" lIns="0" rIns="0" tIns="0" bIns="0">
-            <a:spAutoFit/>
-          </a:bodyPr>
-          <a:lstStyle/>
-          <a:p>
-            <a:pPr algn="l">
-              <a:lnSpc>
-                <a:spcPct val="106000"/>
-              </a:lnSpc>
-              <a:spcBef>
-                <a:spcPts val="0"/>
-              </a:spcBef>
-              <a:spcAft>
-                <a:spcPts val="0"/>
-              </a:spcAft>
-            </a:pPr>
-            <a:r>
-              <a:rPr sz="2400" b="1">
-                <a:solidFill>
-                  <a:srgbClr val="1E1E1E"/>
-                </a:solidFill>
-                <a:latin typeface="Roboto"/>
-              </a:rPr>
-              <a:t>Se você é estudante</a:t>
-            </a:r>
-          </a:p>
-        </p:txBody>
-      </p:sp>
-      <p:sp>
-        <p:nvSpPr>
-          <p:cNvPr id="5" name="TextBox 4"/>
-          <p:cNvSpPr txBox="1"/>
-          <p:nvPr/>
-        </p:nvSpPr>
-        <p:spPr>
-          <a:xfrm>
-            <a:off x="777240" y="2737811"/>
-            <a:ext cx="5067147" cy="3022908"/>
-          </a:xfrm>
-          <a:prstGeom prst="rect">
-            <a:avLst/>
-          </a:prstGeom>
-          <a:noFill/>
-        </p:spPr>
-        <p:txBody>
-          <a:bodyPr wrap="square" lIns="0" rIns="0" tIns="0" bIns="0">
-            <a:spAutoFit/>
-          </a:bodyPr>
-          <a:lstStyle/>
-          <a:p>
-            <a:pPr algn="l">
-              <a:lnSpc>
-                <a:spcPct val="105000"/>
-              </a:lnSpc>
-              <a:spcBef>
-                <a:spcPts val="0"/>
-              </a:spcBef>
-              <a:spcAft>
-                <a:spcPts val="0"/>
-              </a:spcAft>
-            </a:pPr>
-            <a:r>
-              <a:rPr sz="2000" b="0">
-                <a:solidFill>
-                  <a:srgbClr val="1E1E1E"/>
-                </a:solidFill>
-                <a:latin typeface="Roboto"/>
-              </a:rPr>
-              <a:t>Use IA em toda disciplina e registre onde ela errou</a:t>
-            </a:r>
-          </a:p>
-          <a:p>
-            <a:pPr algn="l">
-              <a:lnSpc>
-                <a:spcPct val="105000"/>
-              </a:lnSpc>
-              <a:spcBef>
-                <a:spcPts val="1600"/>
-              </a:spcBef>
-              <a:spcAft>
-                <a:spcPts val="0"/>
-              </a:spcAft>
-            </a:pPr>
-            <a:r>
-              <a:rPr sz="2000" b="0">
-                <a:solidFill>
-                  <a:srgbClr val="1E1E1E"/>
-                </a:solidFill>
-                <a:latin typeface="Roboto"/>
-              </a:rPr>
-              <a:t>Aprenda dado: planilha e estatística</a:t>
-            </a:r>
-          </a:p>
-          <a:p>
-            <a:pPr algn="l">
-              <a:lnSpc>
-                <a:spcPct val="105000"/>
-              </a:lnSpc>
-              <a:spcBef>
-                <a:spcPts val="1600"/>
-              </a:spcBef>
-              <a:spcAft>
-                <a:spcPts val="0"/>
-              </a:spcAft>
-            </a:pPr>
-            <a:r>
-              <a:rPr sz="2000" b="0">
-                <a:solidFill>
-                  <a:srgbClr val="1E1E1E"/>
-                </a:solidFill>
-                <a:latin typeface="Roboto"/>
-              </a:rPr>
-              <a:t>Faça um projeto real, do início ao fim</a:t>
-            </a:r>
-          </a:p>
-          <a:p>
-            <a:pPr algn="l">
-              <a:lnSpc>
-                <a:spcPct val="105000"/>
-              </a:lnSpc>
-              <a:spcBef>
-                <a:spcPts val="1600"/>
-              </a:spcBef>
-              <a:spcAft>
-                <a:spcPts val="0"/>
-              </a:spcAft>
-            </a:pPr>
-            <a:r>
-              <a:rPr sz="2000" b="0">
-                <a:solidFill>
-                  <a:srgbClr val="1E1E1E"/>
-                </a:solidFill>
-                <a:latin typeface="Roboto"/>
-              </a:rPr>
-              <a:t>Escreva mais. Quem escreve mal, pergunta mal</a:t>
-            </a:r>
-          </a:p>
-        </p:txBody>
-      </p:sp>
-      <p:sp>
-        <p:nvSpPr>
-          <p:cNvPr id="6" name="Rectangle 5"/>
-          <p:cNvSpPr/>
-          <p:nvPr/>
-        </p:nvSpPr>
-        <p:spPr>
-          <a:xfrm>
-            <a:off x="6347307" y="1920240"/>
-            <a:ext cx="5067147" cy="57150"/>
-          </a:xfrm>
-          <a:prstGeom prst="rect">
-            <a:avLst/>
-          </a:prstGeom>
-          <a:solidFill>
-            <a:srgbClr val="1E1E1E"/>
-          </a:solidFill>
-          <a:ln>
-            <a:noFill/>
-          </a:ln>
-          <a:effectLst/>
-        </p:spPr>
-        <p:style>
-          <a:lnRef idx="1">
-            <a:schemeClr val="accent1"/>
-          </a:lnRef>
-          <a:fillRef idx="3">
-            <a:schemeClr val="accent1"/>
-          </a:fillRef>
-          <a:effectRef idx="2">
-            <a:schemeClr val="accent1"/>
-          </a:effectRef>
-          <a:fontRef idx="minor">
-            <a:schemeClr val="lt1"/>
-          </a:fontRef>
-        </p:style>
-        <p:txBody>
-          <a:bodyPr rtlCol="0" anchor="ctr"/>
-          <a:lstStyle/>
-          <a:p>
-            <a:pPr algn="ctr"/>
-          </a:p>
-        </p:txBody>
-      </p:sp>
-      <p:sp>
-        <p:nvSpPr>
-          <p:cNvPr id="7" name="TextBox 6"/>
-          <p:cNvSpPr txBox="1"/>
-          <p:nvPr/>
-        </p:nvSpPr>
-        <p:spPr>
-          <a:xfrm>
-            <a:off x="6347307" y="2121408"/>
-            <a:ext cx="5067147" cy="378659"/>
-          </a:xfrm>
-          <a:prstGeom prst="rect">
-            <a:avLst/>
-          </a:prstGeom>
-          <a:noFill/>
-        </p:spPr>
-        <p:txBody>
-          <a:bodyPr wrap="square" lIns="0" rIns="0" tIns="0" bIns="0">
-            <a:spAutoFit/>
-          </a:bodyPr>
-          <a:lstStyle/>
-          <a:p>
-            <a:pPr algn="l">
-              <a:lnSpc>
-                <a:spcPct val="106000"/>
-              </a:lnSpc>
-              <a:spcBef>
-                <a:spcPts val="0"/>
-              </a:spcBef>
-              <a:spcAft>
-                <a:spcPts val="0"/>
-              </a:spcAft>
-            </a:pPr>
-            <a:r>
-              <a:rPr sz="2400" b="1">
-                <a:solidFill>
-                  <a:srgbClr val="1E1E1E"/>
-                </a:solidFill>
-                <a:latin typeface="Roboto"/>
-              </a:rPr>
-              <a:t>Se você é docente</a:t>
-            </a:r>
-          </a:p>
-        </p:txBody>
-      </p:sp>
-      <p:sp>
-        <p:nvSpPr>
-          <p:cNvPr id="8" name="TextBox 7"/>
-          <p:cNvSpPr txBox="1"/>
-          <p:nvPr/>
-        </p:nvSpPr>
-        <p:spPr>
-          <a:xfrm>
-            <a:off x="6347307" y="2737811"/>
-            <a:ext cx="5067147" cy="3022908"/>
-          </a:xfrm>
-          <a:prstGeom prst="rect">
-            <a:avLst/>
-          </a:prstGeom>
-          <a:noFill/>
-        </p:spPr>
-        <p:txBody>
-          <a:bodyPr wrap="square" lIns="0" rIns="0" tIns="0" bIns="0">
-            <a:spAutoFit/>
-          </a:bodyPr>
-          <a:lstStyle/>
-          <a:p>
-            <a:pPr algn="l">
-              <a:lnSpc>
-                <a:spcPct val="105000"/>
-              </a:lnSpc>
-              <a:spcBef>
-                <a:spcPts val="0"/>
-              </a:spcBef>
-              <a:spcAft>
-                <a:spcPts val="0"/>
-              </a:spcAft>
-            </a:pPr>
-            <a:r>
-              <a:rPr sz="2000" b="0">
-                <a:solidFill>
-                  <a:srgbClr val="1E1E1E"/>
-                </a:solidFill>
-                <a:latin typeface="Roboto"/>
-              </a:rPr>
-              <a:t>Avalie processo e defesa oral, não só o produto entregue</a:t>
-            </a:r>
-          </a:p>
-          <a:p>
-            <a:pPr algn="l">
-              <a:lnSpc>
-                <a:spcPct val="105000"/>
-              </a:lnSpc>
-              <a:spcBef>
-                <a:spcPts val="1600"/>
-              </a:spcBef>
-              <a:spcAft>
-                <a:spcPts val="0"/>
-              </a:spcAft>
-            </a:pPr>
-            <a:r>
-              <a:rPr sz="2000" b="0">
-                <a:solidFill>
-                  <a:srgbClr val="1E1E1E"/>
-                </a:solidFill>
-                <a:latin typeface="Roboto"/>
-              </a:rPr>
-              <a:t>Traga caso real da região para dentro da sala</a:t>
-            </a:r>
-          </a:p>
-          <a:p>
-            <a:pPr algn="l">
-              <a:lnSpc>
-                <a:spcPct val="105000"/>
-              </a:lnSpc>
-              <a:spcBef>
-                <a:spcPts val="1600"/>
-              </a:spcBef>
-              <a:spcAft>
-                <a:spcPts val="0"/>
-              </a:spcAft>
-            </a:pPr>
-            <a:r>
-              <a:rPr sz="2000" b="0">
-                <a:solidFill>
-                  <a:srgbClr val="1E1E1E"/>
-                </a:solidFill>
-                <a:latin typeface="Roboto"/>
-              </a:rPr>
-              <a:t>Exija que o aluno mostre onde a IA errou</a:t>
-            </a:r>
-          </a:p>
-          <a:p>
-            <a:pPr algn="l">
-              <a:lnSpc>
-                <a:spcPct val="105000"/>
-              </a:lnSpc>
-              <a:spcBef>
-                <a:spcPts val="1600"/>
-              </a:spcBef>
-              <a:spcAft>
-                <a:spcPts val="0"/>
-              </a:spcAft>
-            </a:pPr>
-            <a:r>
-              <a:rPr sz="2000" b="0">
-                <a:solidFill>
-                  <a:srgbClr val="1E1E1E"/>
-                </a:solidFill>
-                <a:latin typeface="Roboto"/>
-              </a:rPr>
-              <a:t>Use IA para preparar, corrigir e devolver mais rápido</a:t>
-            </a:r>
-          </a:p>
-        </p:txBody>
-      </p:sp>
-      <p:sp>
-        <p:nvSpPr>
-          <p:cNvPr id="9" name="Rectangle 8"/>
-          <p:cNvSpPr/>
-          <p:nvPr/>
-        </p:nvSpPr>
-        <p:spPr>
-          <a:xfrm>
-            <a:off x="777240" y="5907024"/>
+            <a:off x="777240" y="1783080"/>
             <a:ext cx="10637215" cy="9525"/>
           </a:xfrm>
           <a:prstGeom prst="rect">
@@ -16771,7 +14197,543 @@
       </p:sp>
       <p:sp>
         <p:nvSpPr>
+          <p:cNvPr id="4" name="TextBox 3"/>
+          <p:cNvSpPr txBox="1"/>
+          <p:nvPr/>
+        </p:nvSpPr>
+        <p:spPr>
+          <a:xfrm>
+            <a:off x="777240" y="1920240"/>
+            <a:ext cx="4206240" cy="868679"/>
+          </a:xfrm>
+          <a:prstGeom prst="rect">
+            <a:avLst/>
+          </a:prstGeom>
+          <a:noFill/>
+        </p:spPr>
+        <p:txBody>
+          <a:bodyPr wrap="square" lIns="0" rIns="0" tIns="0" bIns="0">
+            <a:spAutoFit/>
+          </a:bodyPr>
+          <a:lstStyle/>
+          <a:p>
+            <a:pPr algn="l">
+              <a:lnSpc>
+                <a:spcPct val="105000"/>
+              </a:lnSpc>
+              <a:spcBef>
+                <a:spcPts val="0"/>
+              </a:spcBef>
+              <a:spcAft>
+                <a:spcPts val="0"/>
+              </a:spcAft>
+            </a:pPr>
+            <a:r>
+              <a:rPr sz="2100" b="1">
+                <a:solidFill>
+                  <a:srgbClr val="9A6A00"/>
+                </a:solidFill>
+                <a:latin typeface="Roboto"/>
+              </a:rPr>
+              <a:t>Deixa de ser</a:t>
+            </a:r>
+          </a:p>
+        </p:txBody>
+      </p:sp>
+      <p:sp>
+        <p:nvSpPr>
+          <p:cNvPr id="5" name="TextBox 4"/>
+          <p:cNvSpPr txBox="1"/>
+          <p:nvPr/>
+        </p:nvSpPr>
+        <p:spPr>
+          <a:xfrm>
+            <a:off x="5303519" y="1920240"/>
+            <a:ext cx="6110935" cy="868679"/>
+          </a:xfrm>
+          <a:prstGeom prst="rect">
+            <a:avLst/>
+          </a:prstGeom>
+          <a:noFill/>
+        </p:spPr>
+        <p:txBody>
+          <a:bodyPr wrap="square" lIns="0" rIns="0" tIns="0" bIns="0">
+            <a:spAutoFit/>
+          </a:bodyPr>
+          <a:lstStyle/>
+          <a:p>
+            <a:pPr algn="l">
+              <a:lnSpc>
+                <a:spcPct val="105000"/>
+              </a:lnSpc>
+              <a:spcBef>
+                <a:spcPts val="0"/>
+              </a:spcBef>
+              <a:spcAft>
+                <a:spcPts val="0"/>
+              </a:spcAft>
+            </a:pPr>
+            <a:r>
+              <a:rPr sz="2100" b="0">
+                <a:solidFill>
+                  <a:srgbClr val="1E1E1E"/>
+                </a:solidFill>
+                <a:latin typeface="Roboto"/>
+              </a:rPr>
+              <a:t>O lugar que guarda o conteúdo e distribui a resposta certa.</a:t>
+            </a:r>
+          </a:p>
+        </p:txBody>
+      </p:sp>
+      <p:sp>
+        <p:nvSpPr>
+          <p:cNvPr id="6" name="Rectangle 5"/>
+          <p:cNvSpPr/>
+          <p:nvPr/>
+        </p:nvSpPr>
+        <p:spPr>
+          <a:xfrm>
+            <a:off x="777240" y="2765145"/>
+            <a:ext cx="10637215" cy="9525"/>
+          </a:xfrm>
+          <a:prstGeom prst="rect">
+            <a:avLst/>
+          </a:prstGeom>
+          <a:solidFill>
+            <a:srgbClr val="D6D6D6"/>
+          </a:solidFill>
+          <a:ln>
+            <a:noFill/>
+          </a:ln>
+          <a:effectLst/>
+        </p:spPr>
+        <p:style>
+          <a:lnRef idx="1">
+            <a:schemeClr val="accent1"/>
+          </a:lnRef>
+          <a:fillRef idx="3">
+            <a:schemeClr val="accent1"/>
+          </a:fillRef>
+          <a:effectRef idx="2">
+            <a:schemeClr val="accent1"/>
+          </a:effectRef>
+          <a:fontRef idx="minor">
+            <a:schemeClr val="lt1"/>
+          </a:fontRef>
+        </p:style>
+        <p:txBody>
+          <a:bodyPr rtlCol="0" anchor="ctr"/>
+          <a:lstStyle/>
+          <a:p>
+            <a:pPr algn="ctr"/>
+          </a:p>
+        </p:txBody>
+      </p:sp>
+      <p:sp>
+        <p:nvSpPr>
+          <p:cNvPr id="7" name="TextBox 6"/>
+          <p:cNvSpPr txBox="1"/>
+          <p:nvPr/>
+        </p:nvSpPr>
+        <p:spPr>
+          <a:xfrm>
+            <a:off x="777240" y="2880360"/>
+            <a:ext cx="4206240" cy="868679"/>
+          </a:xfrm>
+          <a:prstGeom prst="rect">
+            <a:avLst/>
+          </a:prstGeom>
+          <a:noFill/>
+        </p:spPr>
+        <p:txBody>
+          <a:bodyPr wrap="square" lIns="0" rIns="0" tIns="0" bIns="0">
+            <a:spAutoFit/>
+          </a:bodyPr>
+          <a:lstStyle/>
+          <a:p>
+            <a:pPr algn="l">
+              <a:lnSpc>
+                <a:spcPct val="105000"/>
+              </a:lnSpc>
+              <a:spcBef>
+                <a:spcPts val="0"/>
+              </a:spcBef>
+              <a:spcAft>
+                <a:spcPts val="0"/>
+              </a:spcAft>
+            </a:pPr>
+            <a:r>
+              <a:rPr sz="2100" b="1">
+                <a:solidFill>
+                  <a:srgbClr val="9A6A00"/>
+                </a:solidFill>
+                <a:latin typeface="Roboto"/>
+              </a:rPr>
+              <a:t>Passa a ser</a:t>
+            </a:r>
+          </a:p>
+        </p:txBody>
+      </p:sp>
+      <p:sp>
+        <p:nvSpPr>
+          <p:cNvPr id="8" name="TextBox 7"/>
+          <p:cNvSpPr txBox="1"/>
+          <p:nvPr/>
+        </p:nvSpPr>
+        <p:spPr>
+          <a:xfrm>
+            <a:off x="5303519" y="2880360"/>
+            <a:ext cx="6110935" cy="868679"/>
+          </a:xfrm>
+          <a:prstGeom prst="rect">
+            <a:avLst/>
+          </a:prstGeom>
+          <a:noFill/>
+        </p:spPr>
+        <p:txBody>
+          <a:bodyPr wrap="square" lIns="0" rIns="0" tIns="0" bIns="0">
+            <a:spAutoFit/>
+          </a:bodyPr>
+          <a:lstStyle/>
+          <a:p>
+            <a:pPr algn="l">
+              <a:lnSpc>
+                <a:spcPct val="105000"/>
+              </a:lnSpc>
+              <a:spcBef>
+                <a:spcPts val="0"/>
+              </a:spcBef>
+              <a:spcAft>
+                <a:spcPts val="0"/>
+              </a:spcAft>
+            </a:pPr>
+            <a:r>
+              <a:rPr sz="2100" b="0">
+                <a:solidFill>
+                  <a:srgbClr val="1E1E1E"/>
+                </a:solidFill>
+                <a:latin typeface="Roboto"/>
+              </a:rPr>
+              <a:t>O lugar que ensina a formular a pergunta, julgar a resposta e assumir a decisão.</a:t>
+            </a:r>
+          </a:p>
+        </p:txBody>
+      </p:sp>
+      <p:sp>
+        <p:nvSpPr>
+          <p:cNvPr id="9" name="Rectangle 8"/>
+          <p:cNvSpPr/>
+          <p:nvPr/>
+        </p:nvSpPr>
+        <p:spPr>
+          <a:xfrm>
+            <a:off x="777240" y="3725265"/>
+            <a:ext cx="10637215" cy="9525"/>
+          </a:xfrm>
+          <a:prstGeom prst="rect">
+            <a:avLst/>
+          </a:prstGeom>
+          <a:solidFill>
+            <a:srgbClr val="D6D6D6"/>
+          </a:solidFill>
+          <a:ln>
+            <a:noFill/>
+          </a:ln>
+          <a:effectLst/>
+        </p:spPr>
+        <p:style>
+          <a:lnRef idx="1">
+            <a:schemeClr val="accent1"/>
+          </a:lnRef>
+          <a:fillRef idx="3">
+            <a:schemeClr val="accent1"/>
+          </a:fillRef>
+          <a:effectRef idx="2">
+            <a:schemeClr val="accent1"/>
+          </a:effectRef>
+          <a:fontRef idx="minor">
+            <a:schemeClr val="lt1"/>
+          </a:fontRef>
+        </p:style>
+        <p:txBody>
+          <a:bodyPr rtlCol="0" anchor="ctr"/>
+          <a:lstStyle/>
+          <a:p>
+            <a:pPr algn="ctr"/>
+          </a:p>
+        </p:txBody>
+      </p:sp>
+      <p:sp>
+        <p:nvSpPr>
           <p:cNvPr id="10" name="TextBox 9"/>
+          <p:cNvSpPr txBox="1"/>
+          <p:nvPr/>
+        </p:nvSpPr>
+        <p:spPr>
+          <a:xfrm>
+            <a:off x="777240" y="3840479"/>
+            <a:ext cx="4206240" cy="868679"/>
+          </a:xfrm>
+          <a:prstGeom prst="rect">
+            <a:avLst/>
+          </a:prstGeom>
+          <a:noFill/>
+        </p:spPr>
+        <p:txBody>
+          <a:bodyPr wrap="square" lIns="0" rIns="0" tIns="0" bIns="0">
+            <a:spAutoFit/>
+          </a:bodyPr>
+          <a:lstStyle/>
+          <a:p>
+            <a:pPr algn="l">
+              <a:lnSpc>
+                <a:spcPct val="105000"/>
+              </a:lnSpc>
+              <a:spcBef>
+                <a:spcPts val="0"/>
+              </a:spcBef>
+              <a:spcAft>
+                <a:spcPts val="0"/>
+              </a:spcAft>
+            </a:pPr>
+            <a:r>
+              <a:rPr sz="2100" b="1">
+                <a:solidFill>
+                  <a:srgbClr val="9A6A00"/>
+                </a:solidFill>
+                <a:latin typeface="Roboto"/>
+              </a:rPr>
+              <a:t>A sociedade ganha</a:t>
+            </a:r>
+          </a:p>
+        </p:txBody>
+      </p:sp>
+      <p:sp>
+        <p:nvSpPr>
+          <p:cNvPr id="11" name="TextBox 10"/>
+          <p:cNvSpPr txBox="1"/>
+          <p:nvPr/>
+        </p:nvSpPr>
+        <p:spPr>
+          <a:xfrm>
+            <a:off x="5303519" y="3840479"/>
+            <a:ext cx="6110935" cy="868679"/>
+          </a:xfrm>
+          <a:prstGeom prst="rect">
+            <a:avLst/>
+          </a:prstGeom>
+          <a:noFill/>
+        </p:spPr>
+        <p:txBody>
+          <a:bodyPr wrap="square" lIns="0" rIns="0" tIns="0" bIns="0">
+            <a:spAutoFit/>
+          </a:bodyPr>
+          <a:lstStyle/>
+          <a:p>
+            <a:pPr algn="l">
+              <a:lnSpc>
+                <a:spcPct val="105000"/>
+              </a:lnSpc>
+              <a:spcBef>
+                <a:spcPts val="0"/>
+              </a:spcBef>
+              <a:spcAft>
+                <a:spcPts val="0"/>
+              </a:spcAft>
+            </a:pPr>
+            <a:r>
+              <a:rPr sz="2100" b="0">
+                <a:solidFill>
+                  <a:srgbClr val="1E1E1E"/>
+                </a:solidFill>
+                <a:latin typeface="Roboto"/>
+              </a:rPr>
+              <a:t>Problema real da região resolvido por aluno de primeiro semestre, e não daqui a quatro anos.</a:t>
+            </a:r>
+          </a:p>
+        </p:txBody>
+      </p:sp>
+      <p:sp>
+        <p:nvSpPr>
+          <p:cNvPr id="12" name="Rectangle 11"/>
+          <p:cNvSpPr/>
+          <p:nvPr/>
+        </p:nvSpPr>
+        <p:spPr>
+          <a:xfrm>
+            <a:off x="777240" y="4685385"/>
+            <a:ext cx="10637215" cy="9525"/>
+          </a:xfrm>
+          <a:prstGeom prst="rect">
+            <a:avLst/>
+          </a:prstGeom>
+          <a:solidFill>
+            <a:srgbClr val="D6D6D6"/>
+          </a:solidFill>
+          <a:ln>
+            <a:noFill/>
+          </a:ln>
+          <a:effectLst/>
+        </p:spPr>
+        <p:style>
+          <a:lnRef idx="1">
+            <a:schemeClr val="accent1"/>
+          </a:lnRef>
+          <a:fillRef idx="3">
+            <a:schemeClr val="accent1"/>
+          </a:fillRef>
+          <a:effectRef idx="2">
+            <a:schemeClr val="accent1"/>
+          </a:effectRef>
+          <a:fontRef idx="minor">
+            <a:schemeClr val="lt1"/>
+          </a:fontRef>
+        </p:style>
+        <p:txBody>
+          <a:bodyPr rtlCol="0" anchor="ctr"/>
+          <a:lstStyle/>
+          <a:p>
+            <a:pPr algn="ctr"/>
+          </a:p>
+        </p:txBody>
+      </p:sp>
+      <p:sp>
+        <p:nvSpPr>
+          <p:cNvPr id="13" name="TextBox 12"/>
+          <p:cNvSpPr txBox="1"/>
+          <p:nvPr/>
+        </p:nvSpPr>
+        <p:spPr>
+          <a:xfrm>
+            <a:off x="777240" y="4800599"/>
+            <a:ext cx="4206240" cy="868679"/>
+          </a:xfrm>
+          <a:prstGeom prst="rect">
+            <a:avLst/>
+          </a:prstGeom>
+          <a:noFill/>
+        </p:spPr>
+        <p:txBody>
+          <a:bodyPr wrap="square" lIns="0" rIns="0" tIns="0" bIns="0">
+            <a:spAutoFit/>
+          </a:bodyPr>
+          <a:lstStyle/>
+          <a:p>
+            <a:pPr algn="l">
+              <a:lnSpc>
+                <a:spcPct val="105000"/>
+              </a:lnSpc>
+              <a:spcBef>
+                <a:spcPts val="0"/>
+              </a:spcBef>
+              <a:spcAft>
+                <a:spcPts val="0"/>
+              </a:spcAft>
+            </a:pPr>
+            <a:r>
+              <a:rPr sz="2100" b="1">
+                <a:solidFill>
+                  <a:srgbClr val="9A6A00"/>
+                </a:solidFill>
+                <a:latin typeface="Roboto"/>
+              </a:rPr>
+              <a:t>A sociedade perde se nada mudar</a:t>
+            </a:r>
+          </a:p>
+        </p:txBody>
+      </p:sp>
+      <p:sp>
+        <p:nvSpPr>
+          <p:cNvPr id="14" name="TextBox 13"/>
+          <p:cNvSpPr txBox="1"/>
+          <p:nvPr/>
+        </p:nvSpPr>
+        <p:spPr>
+          <a:xfrm>
+            <a:off x="5303519" y="4800599"/>
+            <a:ext cx="6110935" cy="868679"/>
+          </a:xfrm>
+          <a:prstGeom prst="rect">
+            <a:avLst/>
+          </a:prstGeom>
+          <a:noFill/>
+        </p:spPr>
+        <p:txBody>
+          <a:bodyPr wrap="square" lIns="0" rIns="0" tIns="0" bIns="0">
+            <a:spAutoFit/>
+          </a:bodyPr>
+          <a:lstStyle/>
+          <a:p>
+            <a:pPr algn="l">
+              <a:lnSpc>
+                <a:spcPct val="105000"/>
+              </a:lnSpc>
+              <a:spcBef>
+                <a:spcPts val="0"/>
+              </a:spcBef>
+              <a:spcAft>
+                <a:spcPts val="0"/>
+              </a:spcAft>
+            </a:pPr>
+            <a:r>
+              <a:rPr sz="2100" b="0">
+                <a:solidFill>
+                  <a:srgbClr val="1E1E1E"/>
+                </a:solidFill>
+                <a:latin typeface="Roboto"/>
+              </a:rPr>
+              <a:t>Forma-se gente qualificada para a tarefa que a máquina já faz por centavos.</a:t>
+            </a:r>
+          </a:p>
+        </p:txBody>
+      </p:sp>
+      <p:sp>
+        <p:nvSpPr>
+          <p:cNvPr id="15" name="Rectangle 14"/>
+          <p:cNvSpPr/>
+          <p:nvPr/>
+        </p:nvSpPr>
+        <p:spPr>
+          <a:xfrm>
+            <a:off x="777240" y="5907024"/>
+            <a:ext cx="10637215" cy="9525"/>
+          </a:xfrm>
+          <a:prstGeom prst="rect">
+            <a:avLst/>
+          </a:prstGeom>
+          <a:solidFill>
+            <a:srgbClr val="D6D6D6"/>
+          </a:solidFill>
+          <a:ln>
+            <a:noFill/>
+          </a:ln>
+          <a:effectLst/>
+        </p:spPr>
+        <p:style>
+          <a:lnRef idx="1">
+            <a:schemeClr val="accent1"/>
+          </a:lnRef>
+          <a:fillRef idx="3">
+            <a:schemeClr val="accent1"/>
+          </a:fillRef>
+          <a:effectRef idx="2">
+            <a:schemeClr val="accent1"/>
+          </a:effectRef>
+          <a:fontRef idx="minor">
+            <a:schemeClr val="lt1"/>
+          </a:fontRef>
+        </p:style>
+        <p:txBody>
+          <a:bodyPr rtlCol="0" anchor="ctr"/>
+          <a:lstStyle/>
+          <a:p>
+            <a:pPr algn="ctr"/>
+          </a:p>
+        </p:txBody>
+      </p:sp>
+      <p:sp>
+        <p:nvSpPr>
+          <p:cNvPr id="16" name="TextBox 15"/>
           <p:cNvSpPr txBox="1"/>
           <p:nvPr/>
         </p:nvSpPr>
@@ -16809,14 +14771,14 @@
                 </a:solidFill>
                 <a:latin typeface="Roboto"/>
               </a:rPr>
-              <a:t>A tecnologia não vai esperar a região se preparar.</a:t>
-            </a:r>
-          </a:p>
-        </p:txBody>
-      </p:sp>
-      <p:sp>
-        <p:nvSpPr>
-          <p:cNvPr id="11" name="TextBox 10"/>
+              <a:t>Ou a universidade puxa a região, ou a região fica esperando.</a:t>
+            </a:r>
+          </a:p>
+        </p:txBody>
+      </p:sp>
+      <p:sp>
+        <p:nvSpPr>
+          <p:cNvPr id="17" name="TextBox 16"/>
           <p:cNvSpPr txBox="1"/>
           <p:nvPr/>
         </p:nvSpPr>
@@ -16868,6 +14830,1446 @@
 </file>
 
 <file path=ppt/slides/slide35.xml><?xml version="1.0" encoding="utf-8"?>
+<p:sld xmlns:a="http://schemas.openxmlformats.org/drawingml/2006/main" xmlns:p="http://schemas.openxmlformats.org/presentationml/2006/main" xmlns:r="http://schemas.openxmlformats.org/officeDocument/2006/relationships">
+  <p:cSld>
+    <p:spTree>
+      <p:nvGrpSpPr>
+        <p:cNvPr id="1" name=""/>
+        <p:cNvGrpSpPr/>
+        <p:nvPr/>
+      </p:nvGrpSpPr>
+      <p:grpSpPr/>
+      <p:sp>
+        <p:nvSpPr>
+          <p:cNvPr id="2" name="TextBox 1"/>
+          <p:cNvSpPr txBox="1"/>
+          <p:nvPr/>
+        </p:nvSpPr>
+        <p:spPr>
+          <a:xfrm>
+            <a:off x="777240" y="1051560"/>
+            <a:ext cx="10637215" cy="365760"/>
+          </a:xfrm>
+          <a:prstGeom prst="rect">
+            <a:avLst/>
+          </a:prstGeom>
+          <a:noFill/>
+        </p:spPr>
+        <p:txBody>
+          <a:bodyPr wrap="square" lIns="0" rIns="0" tIns="0" bIns="0">
+            <a:spAutoFit/>
+          </a:bodyPr>
+          <a:lstStyle/>
+          <a:p>
+            <a:pPr algn="l">
+              <a:lnSpc>
+                <a:spcPct val="105000"/>
+              </a:lnSpc>
+              <a:spcBef>
+                <a:spcPts val="0"/>
+              </a:spcBef>
+              <a:spcAft>
+                <a:spcPts val="0"/>
+              </a:spcAft>
+            </a:pPr>
+            <a:r>
+              <a:rPr sz="1900" b="1">
+                <a:solidFill>
+                  <a:srgbClr val="9A6A00"/>
+                </a:solidFill>
+                <a:latin typeface="Roboto"/>
+              </a:rPr>
+              <a:t>PERGUNTA 6 PARA A PLATEIA</a:t>
+            </a:r>
+          </a:p>
+        </p:txBody>
+      </p:sp>
+      <p:sp>
+        <p:nvSpPr>
+          <p:cNvPr id="3" name="Rectangle 2"/>
+          <p:cNvSpPr/>
+          <p:nvPr/>
+        </p:nvSpPr>
+        <p:spPr>
+          <a:xfrm>
+            <a:off x="777240" y="1627632"/>
+            <a:ext cx="2743200" cy="44450"/>
+          </a:xfrm>
+          <a:prstGeom prst="rect">
+            <a:avLst/>
+          </a:prstGeom>
+          <a:solidFill>
+            <a:srgbClr val="E0A100"/>
+          </a:solidFill>
+          <a:ln>
+            <a:noFill/>
+          </a:ln>
+          <a:effectLst/>
+        </p:spPr>
+        <p:style>
+          <a:lnRef idx="1">
+            <a:schemeClr val="accent1"/>
+          </a:lnRef>
+          <a:fillRef idx="3">
+            <a:schemeClr val="accent1"/>
+          </a:fillRef>
+          <a:effectRef idx="2">
+            <a:schemeClr val="accent1"/>
+          </a:effectRef>
+          <a:fontRef idx="minor">
+            <a:schemeClr val="lt1"/>
+          </a:fontRef>
+        </p:style>
+        <p:txBody>
+          <a:bodyPr rtlCol="0" anchor="ctr"/>
+          <a:lstStyle/>
+          <a:p>
+            <a:pPr algn="ctr"/>
+          </a:p>
+        </p:txBody>
+      </p:sp>
+      <p:sp>
+        <p:nvSpPr>
+          <p:cNvPr id="4" name="TextBox 3"/>
+          <p:cNvSpPr txBox="1"/>
+          <p:nvPr/>
+        </p:nvSpPr>
+        <p:spPr>
+          <a:xfrm>
+            <a:off x="777240" y="2057400"/>
+            <a:ext cx="10637215" cy="2743200"/>
+          </a:xfrm>
+          <a:prstGeom prst="rect">
+            <a:avLst/>
+          </a:prstGeom>
+          <a:noFill/>
+        </p:spPr>
+        <p:txBody>
+          <a:bodyPr wrap="square" lIns="0" rIns="0" tIns="0" bIns="0">
+            <a:spAutoFit/>
+          </a:bodyPr>
+          <a:lstStyle/>
+          <a:p>
+            <a:pPr algn="l">
+              <a:lnSpc>
+                <a:spcPct val="108000"/>
+              </a:lnSpc>
+              <a:spcBef>
+                <a:spcPts val="0"/>
+              </a:spcBef>
+              <a:spcAft>
+                <a:spcPts val="0"/>
+              </a:spcAft>
+            </a:pPr>
+            <a:r>
+              <a:rPr sz="4600" b="1">
+                <a:solidFill>
+                  <a:srgbClr val="1E1E1E"/>
+                </a:solidFill>
+                <a:latin typeface="Roboto"/>
+              </a:rPr>
+              <a:t>Se eu te devolvesse uma hora por dia, o que você faria com ela?</a:t>
+            </a:r>
+          </a:p>
+        </p:txBody>
+      </p:sp>
+      <p:sp>
+        <p:nvSpPr>
+          <p:cNvPr id="5" name="TextBox 4"/>
+          <p:cNvSpPr txBox="1"/>
+          <p:nvPr/>
+        </p:nvSpPr>
+        <p:spPr>
+          <a:xfrm>
+            <a:off x="777240" y="4983480"/>
+            <a:ext cx="10637215" cy="731520"/>
+          </a:xfrm>
+          <a:prstGeom prst="rect">
+            <a:avLst/>
+          </a:prstGeom>
+          <a:noFill/>
+        </p:spPr>
+        <p:txBody>
+          <a:bodyPr wrap="square" lIns="0" rIns="0" tIns="0" bIns="0">
+            <a:spAutoFit/>
+          </a:bodyPr>
+          <a:lstStyle/>
+          <a:p>
+            <a:pPr algn="l">
+              <a:lnSpc>
+                <a:spcPct val="105000"/>
+              </a:lnSpc>
+              <a:spcBef>
+                <a:spcPts val="0"/>
+              </a:spcBef>
+              <a:spcAft>
+                <a:spcPts val="0"/>
+              </a:spcAft>
+            </a:pPr>
+            <a:r>
+              <a:rPr sz="2400" b="0">
+                <a:solidFill>
+                  <a:srgbClr val="6E6E6E"/>
+                </a:solidFill>
+                <a:latin typeface="Roboto"/>
+              </a:rPr>
+              <a:t>Essa é a única pergunta que realmente importa sobre produtividade.</a:t>
+            </a:r>
+          </a:p>
+        </p:txBody>
+      </p:sp>
+      <p:sp>
+        <p:nvSpPr>
+          <p:cNvPr id="6" name="TextBox 5"/>
+          <p:cNvSpPr txBox="1"/>
+          <p:nvPr/>
+        </p:nvSpPr>
+        <p:spPr>
+          <a:xfrm>
+            <a:off x="10317175" y="6419088"/>
+            <a:ext cx="1097280" cy="274320"/>
+          </a:xfrm>
+          <a:prstGeom prst="rect">
+            <a:avLst/>
+          </a:prstGeom>
+          <a:noFill/>
+        </p:spPr>
+        <p:txBody>
+          <a:bodyPr wrap="square" lIns="0" rIns="0" tIns="0" bIns="0">
+            <a:spAutoFit/>
+          </a:bodyPr>
+          <a:lstStyle/>
+          <a:p>
+            <a:pPr algn="r">
+              <a:lnSpc>
+                <a:spcPct val="105000"/>
+              </a:lnSpc>
+              <a:spcBef>
+                <a:spcPts val="0"/>
+              </a:spcBef>
+              <a:spcAft>
+                <a:spcPts val="0"/>
+              </a:spcAft>
+            </a:pPr>
+            <a:r>
+              <a:rPr sz="1100" b="0">
+                <a:solidFill>
+                  <a:srgbClr val="6E6E6E"/>
+                </a:solidFill>
+                <a:latin typeface="Roboto"/>
+              </a:rPr>
+              <a:t>35</a:t>
+            </a:r>
+          </a:p>
+        </p:txBody>
+      </p:sp>
+    </p:spTree>
+  </p:cSld>
+  <p:clrMapOvr>
+    <a:masterClrMapping/>
+  </p:clrMapOvr>
+</p:sld>
+</file>
+
+<file path=ppt/slides/slide36.xml><?xml version="1.0" encoding="utf-8"?>
+<p:sld xmlns:a="http://schemas.openxmlformats.org/drawingml/2006/main" xmlns:p="http://schemas.openxmlformats.org/presentationml/2006/main" xmlns:r="http://schemas.openxmlformats.org/officeDocument/2006/relationships">
+  <p:cSld>
+    <p:spTree>
+      <p:nvGrpSpPr>
+        <p:cNvPr id="1" name=""/>
+        <p:cNvGrpSpPr/>
+        <p:nvPr/>
+      </p:nvGrpSpPr>
+      <p:grpSpPr/>
+      <p:sp>
+        <p:nvSpPr>
+          <p:cNvPr id="2" name="TextBox 1"/>
+          <p:cNvSpPr txBox="1"/>
+          <p:nvPr/>
+        </p:nvSpPr>
+        <p:spPr>
+          <a:xfrm>
+            <a:off x="777240" y="411480"/>
+            <a:ext cx="10637215" cy="1325880"/>
+          </a:xfrm>
+          <a:prstGeom prst="rect">
+            <a:avLst/>
+          </a:prstGeom>
+          <a:noFill/>
+        </p:spPr>
+        <p:txBody>
+          <a:bodyPr wrap="square" lIns="0" rIns="0" tIns="0" bIns="0">
+            <a:spAutoFit/>
+          </a:bodyPr>
+          <a:lstStyle/>
+          <a:p>
+            <a:pPr algn="l">
+              <a:lnSpc>
+                <a:spcPct val="104000"/>
+              </a:lnSpc>
+              <a:spcBef>
+                <a:spcPts val="0"/>
+              </a:spcBef>
+              <a:spcAft>
+                <a:spcPts val="0"/>
+              </a:spcAft>
+            </a:pPr>
+            <a:r>
+              <a:rPr sz="4000" b="1">
+                <a:solidFill>
+                  <a:srgbClr val="1E1E1E"/>
+                </a:solidFill>
+                <a:latin typeface="Roboto"/>
+              </a:rPr>
+              <a:t>Quatro hábitos para começar amanhã de manhã</a:t>
+            </a:r>
+          </a:p>
+        </p:txBody>
+      </p:sp>
+      <p:sp>
+        <p:nvSpPr>
+          <p:cNvPr id="3" name="Rectangle 2"/>
+          <p:cNvSpPr/>
+          <p:nvPr/>
+        </p:nvSpPr>
+        <p:spPr>
+          <a:xfrm>
+            <a:off x="777240" y="1783080"/>
+            <a:ext cx="10637215" cy="9525"/>
+          </a:xfrm>
+          <a:prstGeom prst="rect">
+            <a:avLst/>
+          </a:prstGeom>
+          <a:solidFill>
+            <a:srgbClr val="D6D6D6"/>
+          </a:solidFill>
+          <a:ln>
+            <a:noFill/>
+          </a:ln>
+          <a:effectLst/>
+        </p:spPr>
+        <p:style>
+          <a:lnRef idx="1">
+            <a:schemeClr val="accent1"/>
+          </a:lnRef>
+          <a:fillRef idx="3">
+            <a:schemeClr val="accent1"/>
+          </a:fillRef>
+          <a:effectRef idx="2">
+            <a:schemeClr val="accent1"/>
+          </a:effectRef>
+          <a:fontRef idx="minor">
+            <a:schemeClr val="lt1"/>
+          </a:fontRef>
+        </p:style>
+        <p:txBody>
+          <a:bodyPr rtlCol="0" anchor="ctr"/>
+          <a:lstStyle/>
+          <a:p>
+            <a:pPr algn="ctr"/>
+          </a:p>
+        </p:txBody>
+      </p:sp>
+      <p:sp>
+        <p:nvSpPr>
+          <p:cNvPr id="4" name="TextBox 3"/>
+          <p:cNvSpPr txBox="1"/>
+          <p:nvPr/>
+        </p:nvSpPr>
+        <p:spPr>
+          <a:xfrm>
+            <a:off x="777240" y="1920240"/>
+            <a:ext cx="1051560" cy="868679"/>
+          </a:xfrm>
+          <a:prstGeom prst="rect">
+            <a:avLst/>
+          </a:prstGeom>
+          <a:noFill/>
+        </p:spPr>
+        <p:txBody>
+          <a:bodyPr wrap="square" lIns="0" rIns="0" tIns="0" bIns="0">
+            <a:spAutoFit/>
+          </a:bodyPr>
+          <a:lstStyle/>
+          <a:p>
+            <a:pPr algn="l">
+              <a:lnSpc>
+                <a:spcPct val="105000"/>
+              </a:lnSpc>
+              <a:spcBef>
+                <a:spcPts val="0"/>
+              </a:spcBef>
+              <a:spcAft>
+                <a:spcPts val="0"/>
+              </a:spcAft>
+            </a:pPr>
+            <a:r>
+              <a:rPr sz="3400" b="1">
+                <a:solidFill>
+                  <a:srgbClr val="E0A100"/>
+                </a:solidFill>
+                <a:latin typeface="Roboto"/>
+              </a:rPr>
+              <a:t>01</a:t>
+            </a:r>
+          </a:p>
+        </p:txBody>
+      </p:sp>
+      <p:sp>
+        <p:nvSpPr>
+          <p:cNvPr id="5" name="TextBox 4"/>
+          <p:cNvSpPr txBox="1"/>
+          <p:nvPr/>
+        </p:nvSpPr>
+        <p:spPr>
+          <a:xfrm>
+            <a:off x="1920240" y="2022602"/>
+            <a:ext cx="9494215" cy="766317"/>
+          </a:xfrm>
+          <a:prstGeom prst="rect">
+            <a:avLst/>
+          </a:prstGeom>
+          <a:noFill/>
+        </p:spPr>
+        <p:txBody>
+          <a:bodyPr wrap="square" lIns="0" rIns="0" tIns="0" bIns="0">
+            <a:spAutoFit/>
+          </a:bodyPr>
+          <a:lstStyle/>
+          <a:p>
+            <a:pPr algn="l">
+              <a:lnSpc>
+                <a:spcPct val="105000"/>
+              </a:lnSpc>
+              <a:spcBef>
+                <a:spcPts val="0"/>
+              </a:spcBef>
+              <a:spcAft>
+                <a:spcPts val="0"/>
+              </a:spcAft>
+            </a:pPr>
+            <a:r>
+              <a:rPr sz="2100" b="0">
+                <a:solidFill>
+                  <a:srgbClr val="1E1E1E"/>
+                </a:solidFill>
+                <a:latin typeface="Roboto"/>
+              </a:rPr>
+              <a:t>Dê contexto: quem você é, para quem é, qual a restrição. Pedido vago, resposta vaga.</a:t>
+            </a:r>
+          </a:p>
+        </p:txBody>
+      </p:sp>
+      <p:sp>
+        <p:nvSpPr>
+          <p:cNvPr id="6" name="TextBox 5"/>
+          <p:cNvSpPr txBox="1"/>
+          <p:nvPr/>
+        </p:nvSpPr>
+        <p:spPr>
+          <a:xfrm>
+            <a:off x="777240" y="2880360"/>
+            <a:ext cx="1051560" cy="868679"/>
+          </a:xfrm>
+          <a:prstGeom prst="rect">
+            <a:avLst/>
+          </a:prstGeom>
+          <a:noFill/>
+        </p:spPr>
+        <p:txBody>
+          <a:bodyPr wrap="square" lIns="0" rIns="0" tIns="0" bIns="0">
+            <a:spAutoFit/>
+          </a:bodyPr>
+          <a:lstStyle/>
+          <a:p>
+            <a:pPr algn="l">
+              <a:lnSpc>
+                <a:spcPct val="105000"/>
+              </a:lnSpc>
+              <a:spcBef>
+                <a:spcPts val="0"/>
+              </a:spcBef>
+              <a:spcAft>
+                <a:spcPts val="0"/>
+              </a:spcAft>
+            </a:pPr>
+            <a:r>
+              <a:rPr sz="3400" b="1">
+                <a:solidFill>
+                  <a:srgbClr val="E0A100"/>
+                </a:solidFill>
+                <a:latin typeface="Roboto"/>
+              </a:rPr>
+              <a:t>02</a:t>
+            </a:r>
+          </a:p>
+        </p:txBody>
+      </p:sp>
+      <p:sp>
+        <p:nvSpPr>
+          <p:cNvPr id="7" name="TextBox 6"/>
+          <p:cNvSpPr txBox="1"/>
+          <p:nvPr/>
+        </p:nvSpPr>
+        <p:spPr>
+          <a:xfrm>
+            <a:off x="1920240" y="2982722"/>
+            <a:ext cx="9494215" cy="766317"/>
+          </a:xfrm>
+          <a:prstGeom prst="rect">
+            <a:avLst/>
+          </a:prstGeom>
+          <a:noFill/>
+        </p:spPr>
+        <p:txBody>
+          <a:bodyPr wrap="square" lIns="0" rIns="0" tIns="0" bIns="0">
+            <a:spAutoFit/>
+          </a:bodyPr>
+          <a:lstStyle/>
+          <a:p>
+            <a:pPr algn="l">
+              <a:lnSpc>
+                <a:spcPct val="105000"/>
+              </a:lnSpc>
+              <a:spcBef>
+                <a:spcPts val="0"/>
+              </a:spcBef>
+              <a:spcAft>
+                <a:spcPts val="0"/>
+              </a:spcAft>
+            </a:pPr>
+            <a:r>
+              <a:rPr sz="2100" b="0">
+                <a:solidFill>
+                  <a:srgbClr val="1E1E1E"/>
+                </a:solidFill>
+                <a:latin typeface="Roboto"/>
+              </a:rPr>
+              <a:t>Peça três versões, nunca uma. A primeira quase nunca é a melhor.</a:t>
+            </a:r>
+          </a:p>
+        </p:txBody>
+      </p:sp>
+      <p:sp>
+        <p:nvSpPr>
+          <p:cNvPr id="8" name="TextBox 7"/>
+          <p:cNvSpPr txBox="1"/>
+          <p:nvPr/>
+        </p:nvSpPr>
+        <p:spPr>
+          <a:xfrm>
+            <a:off x="777240" y="3840479"/>
+            <a:ext cx="1051560" cy="868679"/>
+          </a:xfrm>
+          <a:prstGeom prst="rect">
+            <a:avLst/>
+          </a:prstGeom>
+          <a:noFill/>
+        </p:spPr>
+        <p:txBody>
+          <a:bodyPr wrap="square" lIns="0" rIns="0" tIns="0" bIns="0">
+            <a:spAutoFit/>
+          </a:bodyPr>
+          <a:lstStyle/>
+          <a:p>
+            <a:pPr algn="l">
+              <a:lnSpc>
+                <a:spcPct val="105000"/>
+              </a:lnSpc>
+              <a:spcBef>
+                <a:spcPts val="0"/>
+              </a:spcBef>
+              <a:spcAft>
+                <a:spcPts val="0"/>
+              </a:spcAft>
+            </a:pPr>
+            <a:r>
+              <a:rPr sz="3400" b="1">
+                <a:solidFill>
+                  <a:srgbClr val="E0A100"/>
+                </a:solidFill>
+                <a:latin typeface="Roboto"/>
+              </a:rPr>
+              <a:t>03</a:t>
+            </a:r>
+          </a:p>
+        </p:txBody>
+      </p:sp>
+      <p:sp>
+        <p:nvSpPr>
+          <p:cNvPr id="9" name="TextBox 8"/>
+          <p:cNvSpPr txBox="1"/>
+          <p:nvPr/>
+        </p:nvSpPr>
+        <p:spPr>
+          <a:xfrm>
+            <a:off x="1920240" y="3942841"/>
+            <a:ext cx="9494215" cy="766317"/>
+          </a:xfrm>
+          <a:prstGeom prst="rect">
+            <a:avLst/>
+          </a:prstGeom>
+          <a:noFill/>
+        </p:spPr>
+        <p:txBody>
+          <a:bodyPr wrap="square" lIns="0" rIns="0" tIns="0" bIns="0">
+            <a:spAutoFit/>
+          </a:bodyPr>
+          <a:lstStyle/>
+          <a:p>
+            <a:pPr algn="l">
+              <a:lnSpc>
+                <a:spcPct val="105000"/>
+              </a:lnSpc>
+              <a:spcBef>
+                <a:spcPts val="0"/>
+              </a:spcBef>
+              <a:spcAft>
+                <a:spcPts val="0"/>
+              </a:spcAft>
+            </a:pPr>
+            <a:r>
+              <a:rPr sz="2100" b="0">
+                <a:solidFill>
+                  <a:srgbClr val="1E1E1E"/>
+                </a:solidFill>
+                <a:latin typeface="Roboto"/>
+              </a:rPr>
+              <a:t>Verifique tudo que tem número, nome próprio ou fonte. Sem exceção.</a:t>
+            </a:r>
+          </a:p>
+        </p:txBody>
+      </p:sp>
+      <p:sp>
+        <p:nvSpPr>
+          <p:cNvPr id="10" name="TextBox 9"/>
+          <p:cNvSpPr txBox="1"/>
+          <p:nvPr/>
+        </p:nvSpPr>
+        <p:spPr>
+          <a:xfrm>
+            <a:off x="777240" y="4800599"/>
+            <a:ext cx="1051560" cy="868679"/>
+          </a:xfrm>
+          <a:prstGeom prst="rect">
+            <a:avLst/>
+          </a:prstGeom>
+          <a:noFill/>
+        </p:spPr>
+        <p:txBody>
+          <a:bodyPr wrap="square" lIns="0" rIns="0" tIns="0" bIns="0">
+            <a:spAutoFit/>
+          </a:bodyPr>
+          <a:lstStyle/>
+          <a:p>
+            <a:pPr algn="l">
+              <a:lnSpc>
+                <a:spcPct val="105000"/>
+              </a:lnSpc>
+              <a:spcBef>
+                <a:spcPts val="0"/>
+              </a:spcBef>
+              <a:spcAft>
+                <a:spcPts val="0"/>
+              </a:spcAft>
+            </a:pPr>
+            <a:r>
+              <a:rPr sz="3400" b="1">
+                <a:solidFill>
+                  <a:srgbClr val="E0A100"/>
+                </a:solidFill>
+                <a:latin typeface="Roboto"/>
+              </a:rPr>
+              <a:t>04</a:t>
+            </a:r>
+          </a:p>
+        </p:txBody>
+      </p:sp>
+      <p:sp>
+        <p:nvSpPr>
+          <p:cNvPr id="11" name="TextBox 10"/>
+          <p:cNvSpPr txBox="1"/>
+          <p:nvPr/>
+        </p:nvSpPr>
+        <p:spPr>
+          <a:xfrm>
+            <a:off x="1920240" y="4902961"/>
+            <a:ext cx="9494215" cy="766317"/>
+          </a:xfrm>
+          <a:prstGeom prst="rect">
+            <a:avLst/>
+          </a:prstGeom>
+          <a:noFill/>
+        </p:spPr>
+        <p:txBody>
+          <a:bodyPr wrap="square" lIns="0" rIns="0" tIns="0" bIns="0">
+            <a:spAutoFit/>
+          </a:bodyPr>
+          <a:lstStyle/>
+          <a:p>
+            <a:pPr algn="l">
+              <a:lnSpc>
+                <a:spcPct val="105000"/>
+              </a:lnSpc>
+              <a:spcBef>
+                <a:spcPts val="0"/>
+              </a:spcBef>
+              <a:spcAft>
+                <a:spcPts val="0"/>
+              </a:spcAft>
+            </a:pPr>
+            <a:r>
+              <a:rPr sz="2100" b="0">
+                <a:solidFill>
+                  <a:srgbClr val="1E1E1E"/>
+                </a:solidFill>
+                <a:latin typeface="Roboto"/>
+              </a:rPr>
+              <a:t>Nunca entregue o que você não conseguiria defender sozinho na sala.</a:t>
+            </a:r>
+          </a:p>
+        </p:txBody>
+      </p:sp>
+      <p:sp>
+        <p:nvSpPr>
+          <p:cNvPr id="12" name="Rectangle 11"/>
+          <p:cNvSpPr/>
+          <p:nvPr/>
+        </p:nvSpPr>
+        <p:spPr>
+          <a:xfrm>
+            <a:off x="777240" y="5907024"/>
+            <a:ext cx="10637215" cy="9525"/>
+          </a:xfrm>
+          <a:prstGeom prst="rect">
+            <a:avLst/>
+          </a:prstGeom>
+          <a:solidFill>
+            <a:srgbClr val="D6D6D6"/>
+          </a:solidFill>
+          <a:ln>
+            <a:noFill/>
+          </a:ln>
+          <a:effectLst/>
+        </p:spPr>
+        <p:style>
+          <a:lnRef idx="1">
+            <a:schemeClr val="accent1"/>
+          </a:lnRef>
+          <a:fillRef idx="3">
+            <a:schemeClr val="accent1"/>
+          </a:fillRef>
+          <a:effectRef idx="2">
+            <a:schemeClr val="accent1"/>
+          </a:effectRef>
+          <a:fontRef idx="minor">
+            <a:schemeClr val="lt1"/>
+          </a:fontRef>
+        </p:style>
+        <p:txBody>
+          <a:bodyPr rtlCol="0" anchor="ctr"/>
+          <a:lstStyle/>
+          <a:p>
+            <a:pPr algn="ctr"/>
+          </a:p>
+        </p:txBody>
+      </p:sp>
+      <p:sp>
+        <p:nvSpPr>
+          <p:cNvPr id="13" name="TextBox 12"/>
+          <p:cNvSpPr txBox="1"/>
+          <p:nvPr/>
+        </p:nvSpPr>
+        <p:spPr>
+          <a:xfrm>
+            <a:off x="777240" y="6016752"/>
+            <a:ext cx="10637215" cy="502920"/>
+          </a:xfrm>
+          <a:prstGeom prst="rect">
+            <a:avLst/>
+          </a:prstGeom>
+          <a:noFill/>
+        </p:spPr>
+        <p:txBody>
+          <a:bodyPr wrap="square" lIns="0" rIns="0" tIns="0" bIns="0">
+            <a:spAutoFit/>
+          </a:bodyPr>
+          <a:lstStyle/>
+          <a:p>
+            <a:pPr algn="l">
+              <a:lnSpc>
+                <a:spcPct val="105000"/>
+              </a:lnSpc>
+              <a:spcBef>
+                <a:spcPts val="0"/>
+              </a:spcBef>
+              <a:spcAft>
+                <a:spcPts val="0"/>
+              </a:spcAft>
+            </a:pPr>
+            <a:r>
+              <a:rPr sz="1900" b="0">
+                <a:solidFill>
+                  <a:srgbClr val="6E6E6E"/>
+                </a:solidFill>
+                <a:latin typeface="Roboto"/>
+              </a:rPr>
+              <a:t>Quinze minutos por dia, durante trinta dias, mudam mais que um curso de quarenta horas.</a:t>
+            </a:r>
+          </a:p>
+        </p:txBody>
+      </p:sp>
+      <p:sp>
+        <p:nvSpPr>
+          <p:cNvPr id="14" name="TextBox 13"/>
+          <p:cNvSpPr txBox="1"/>
+          <p:nvPr/>
+        </p:nvSpPr>
+        <p:spPr>
+          <a:xfrm>
+            <a:off x="10317175" y="6419088"/>
+            <a:ext cx="1097280" cy="274320"/>
+          </a:xfrm>
+          <a:prstGeom prst="rect">
+            <a:avLst/>
+          </a:prstGeom>
+          <a:noFill/>
+        </p:spPr>
+        <p:txBody>
+          <a:bodyPr wrap="square" lIns="0" rIns="0" tIns="0" bIns="0">
+            <a:spAutoFit/>
+          </a:bodyPr>
+          <a:lstStyle/>
+          <a:p>
+            <a:pPr algn="r">
+              <a:lnSpc>
+                <a:spcPct val="105000"/>
+              </a:lnSpc>
+              <a:spcBef>
+                <a:spcPts val="0"/>
+              </a:spcBef>
+              <a:spcAft>
+                <a:spcPts val="0"/>
+              </a:spcAft>
+            </a:pPr>
+            <a:r>
+              <a:rPr sz="1100" b="0">
+                <a:solidFill>
+                  <a:srgbClr val="6E6E6E"/>
+                </a:solidFill>
+                <a:latin typeface="Roboto"/>
+              </a:rPr>
+              <a:t>36</a:t>
+            </a:r>
+          </a:p>
+        </p:txBody>
+      </p:sp>
+    </p:spTree>
+  </p:cSld>
+  <p:clrMapOvr>
+    <a:masterClrMapping/>
+  </p:clrMapOvr>
+</p:sld>
+</file>
+
+<file path=ppt/slides/slide37.xml><?xml version="1.0" encoding="utf-8"?>
+<p:sld xmlns:a="http://schemas.openxmlformats.org/drawingml/2006/main" xmlns:p="http://schemas.openxmlformats.org/presentationml/2006/main" xmlns:r="http://schemas.openxmlformats.org/officeDocument/2006/relationships">
+  <p:cSld>
+    <p:spTree>
+      <p:nvGrpSpPr>
+        <p:cNvPr id="1" name=""/>
+        <p:cNvGrpSpPr/>
+        <p:nvPr/>
+      </p:nvGrpSpPr>
+      <p:grpSpPr/>
+      <p:sp>
+        <p:nvSpPr>
+          <p:cNvPr id="2" name="TextBox 1"/>
+          <p:cNvSpPr txBox="1"/>
+          <p:nvPr/>
+        </p:nvSpPr>
+        <p:spPr>
+          <a:xfrm>
+            <a:off x="777240" y="411480"/>
+            <a:ext cx="10637215" cy="1325880"/>
+          </a:xfrm>
+          <a:prstGeom prst="rect">
+            <a:avLst/>
+          </a:prstGeom>
+          <a:noFill/>
+        </p:spPr>
+        <p:txBody>
+          <a:bodyPr wrap="square" lIns="0" rIns="0" tIns="0" bIns="0">
+            <a:spAutoFit/>
+          </a:bodyPr>
+          <a:lstStyle/>
+          <a:p>
+            <a:pPr algn="l">
+              <a:lnSpc>
+                <a:spcPct val="104000"/>
+              </a:lnSpc>
+              <a:spcBef>
+                <a:spcPts val="0"/>
+              </a:spcBef>
+              <a:spcAft>
+                <a:spcPts val="0"/>
+              </a:spcAft>
+            </a:pPr>
+            <a:r>
+              <a:rPr sz="4000" b="1">
+                <a:solidFill>
+                  <a:srgbClr val="1E1E1E"/>
+                </a:solidFill>
+                <a:latin typeface="Roboto"/>
+              </a:rPr>
+              <a:t>O que treinar nos próximos doze meses</a:t>
+            </a:r>
+          </a:p>
+        </p:txBody>
+      </p:sp>
+      <p:sp>
+        <p:nvSpPr>
+          <p:cNvPr id="3" name="Rectangle 2"/>
+          <p:cNvSpPr/>
+          <p:nvPr/>
+        </p:nvSpPr>
+        <p:spPr>
+          <a:xfrm>
+            <a:off x="777240" y="1920240"/>
+            <a:ext cx="5067147" cy="57150"/>
+          </a:xfrm>
+          <a:prstGeom prst="rect">
+            <a:avLst/>
+          </a:prstGeom>
+          <a:solidFill>
+            <a:srgbClr val="E0A100"/>
+          </a:solidFill>
+          <a:ln>
+            <a:noFill/>
+          </a:ln>
+          <a:effectLst/>
+        </p:spPr>
+        <p:style>
+          <a:lnRef idx="1">
+            <a:schemeClr val="accent1"/>
+          </a:lnRef>
+          <a:fillRef idx="3">
+            <a:schemeClr val="accent1"/>
+          </a:fillRef>
+          <a:effectRef idx="2">
+            <a:schemeClr val="accent1"/>
+          </a:effectRef>
+          <a:fontRef idx="minor">
+            <a:schemeClr val="lt1"/>
+          </a:fontRef>
+        </p:style>
+        <p:txBody>
+          <a:bodyPr rtlCol="0" anchor="ctr"/>
+          <a:lstStyle/>
+          <a:p>
+            <a:pPr algn="ctr"/>
+          </a:p>
+        </p:txBody>
+      </p:sp>
+      <p:sp>
+        <p:nvSpPr>
+          <p:cNvPr id="4" name="TextBox 3"/>
+          <p:cNvSpPr txBox="1"/>
+          <p:nvPr/>
+        </p:nvSpPr>
+        <p:spPr>
+          <a:xfrm>
+            <a:off x="777240" y="2121408"/>
+            <a:ext cx="5067147" cy="378659"/>
+          </a:xfrm>
+          <a:prstGeom prst="rect">
+            <a:avLst/>
+          </a:prstGeom>
+          <a:noFill/>
+        </p:spPr>
+        <p:txBody>
+          <a:bodyPr wrap="square" lIns="0" rIns="0" tIns="0" bIns="0">
+            <a:spAutoFit/>
+          </a:bodyPr>
+          <a:lstStyle/>
+          <a:p>
+            <a:pPr algn="l">
+              <a:lnSpc>
+                <a:spcPct val="106000"/>
+              </a:lnSpc>
+              <a:spcBef>
+                <a:spcPts val="0"/>
+              </a:spcBef>
+              <a:spcAft>
+                <a:spcPts val="0"/>
+              </a:spcAft>
+            </a:pPr>
+            <a:r>
+              <a:rPr sz="2400" b="1">
+                <a:solidFill>
+                  <a:srgbClr val="1E1E1E"/>
+                </a:solidFill>
+                <a:latin typeface="Roboto"/>
+              </a:rPr>
+              <a:t>Se você é estudante</a:t>
+            </a:r>
+          </a:p>
+        </p:txBody>
+      </p:sp>
+      <p:sp>
+        <p:nvSpPr>
+          <p:cNvPr id="5" name="TextBox 4"/>
+          <p:cNvSpPr txBox="1"/>
+          <p:nvPr/>
+        </p:nvSpPr>
+        <p:spPr>
+          <a:xfrm>
+            <a:off x="777240" y="2737811"/>
+            <a:ext cx="5067147" cy="3022908"/>
+          </a:xfrm>
+          <a:prstGeom prst="rect">
+            <a:avLst/>
+          </a:prstGeom>
+          <a:noFill/>
+        </p:spPr>
+        <p:txBody>
+          <a:bodyPr wrap="square" lIns="0" rIns="0" tIns="0" bIns="0">
+            <a:spAutoFit/>
+          </a:bodyPr>
+          <a:lstStyle/>
+          <a:p>
+            <a:pPr algn="l">
+              <a:lnSpc>
+                <a:spcPct val="105000"/>
+              </a:lnSpc>
+              <a:spcBef>
+                <a:spcPts val="0"/>
+              </a:spcBef>
+              <a:spcAft>
+                <a:spcPts val="0"/>
+              </a:spcAft>
+            </a:pPr>
+            <a:r>
+              <a:rPr sz="2000" b="0">
+                <a:solidFill>
+                  <a:srgbClr val="1E1E1E"/>
+                </a:solidFill>
+                <a:latin typeface="Roboto"/>
+              </a:rPr>
+              <a:t>Use IA em toda disciplina e registre onde ela errou</a:t>
+            </a:r>
+          </a:p>
+          <a:p>
+            <a:pPr algn="l">
+              <a:lnSpc>
+                <a:spcPct val="105000"/>
+              </a:lnSpc>
+              <a:spcBef>
+                <a:spcPts val="1600"/>
+              </a:spcBef>
+              <a:spcAft>
+                <a:spcPts val="0"/>
+              </a:spcAft>
+            </a:pPr>
+            <a:r>
+              <a:rPr sz="2000" b="0">
+                <a:solidFill>
+                  <a:srgbClr val="1E1E1E"/>
+                </a:solidFill>
+                <a:latin typeface="Roboto"/>
+              </a:rPr>
+              <a:t>Aprenda dado: planilha e estatística</a:t>
+            </a:r>
+          </a:p>
+          <a:p>
+            <a:pPr algn="l">
+              <a:lnSpc>
+                <a:spcPct val="105000"/>
+              </a:lnSpc>
+              <a:spcBef>
+                <a:spcPts val="1600"/>
+              </a:spcBef>
+              <a:spcAft>
+                <a:spcPts val="0"/>
+              </a:spcAft>
+            </a:pPr>
+            <a:r>
+              <a:rPr sz="2000" b="0">
+                <a:solidFill>
+                  <a:srgbClr val="1E1E1E"/>
+                </a:solidFill>
+                <a:latin typeface="Roboto"/>
+              </a:rPr>
+              <a:t>Faça um projeto real, do início ao fim</a:t>
+            </a:r>
+          </a:p>
+          <a:p>
+            <a:pPr algn="l">
+              <a:lnSpc>
+                <a:spcPct val="105000"/>
+              </a:lnSpc>
+              <a:spcBef>
+                <a:spcPts val="1600"/>
+              </a:spcBef>
+              <a:spcAft>
+                <a:spcPts val="0"/>
+              </a:spcAft>
+            </a:pPr>
+            <a:r>
+              <a:rPr sz="2000" b="0">
+                <a:solidFill>
+                  <a:srgbClr val="1E1E1E"/>
+                </a:solidFill>
+                <a:latin typeface="Roboto"/>
+              </a:rPr>
+              <a:t>Escreva mais. Quem escreve mal, pergunta mal</a:t>
+            </a:r>
+          </a:p>
+        </p:txBody>
+      </p:sp>
+      <p:sp>
+        <p:nvSpPr>
+          <p:cNvPr id="6" name="Rectangle 5"/>
+          <p:cNvSpPr/>
+          <p:nvPr/>
+        </p:nvSpPr>
+        <p:spPr>
+          <a:xfrm>
+            <a:off x="6347307" y="1920240"/>
+            <a:ext cx="5067147" cy="57150"/>
+          </a:xfrm>
+          <a:prstGeom prst="rect">
+            <a:avLst/>
+          </a:prstGeom>
+          <a:solidFill>
+            <a:srgbClr val="1E1E1E"/>
+          </a:solidFill>
+          <a:ln>
+            <a:noFill/>
+          </a:ln>
+          <a:effectLst/>
+        </p:spPr>
+        <p:style>
+          <a:lnRef idx="1">
+            <a:schemeClr val="accent1"/>
+          </a:lnRef>
+          <a:fillRef idx="3">
+            <a:schemeClr val="accent1"/>
+          </a:fillRef>
+          <a:effectRef idx="2">
+            <a:schemeClr val="accent1"/>
+          </a:effectRef>
+          <a:fontRef idx="minor">
+            <a:schemeClr val="lt1"/>
+          </a:fontRef>
+        </p:style>
+        <p:txBody>
+          <a:bodyPr rtlCol="0" anchor="ctr"/>
+          <a:lstStyle/>
+          <a:p>
+            <a:pPr algn="ctr"/>
+          </a:p>
+        </p:txBody>
+      </p:sp>
+      <p:sp>
+        <p:nvSpPr>
+          <p:cNvPr id="7" name="TextBox 6"/>
+          <p:cNvSpPr txBox="1"/>
+          <p:nvPr/>
+        </p:nvSpPr>
+        <p:spPr>
+          <a:xfrm>
+            <a:off x="6347307" y="2121408"/>
+            <a:ext cx="5067147" cy="378659"/>
+          </a:xfrm>
+          <a:prstGeom prst="rect">
+            <a:avLst/>
+          </a:prstGeom>
+          <a:noFill/>
+        </p:spPr>
+        <p:txBody>
+          <a:bodyPr wrap="square" lIns="0" rIns="0" tIns="0" bIns="0">
+            <a:spAutoFit/>
+          </a:bodyPr>
+          <a:lstStyle/>
+          <a:p>
+            <a:pPr algn="l">
+              <a:lnSpc>
+                <a:spcPct val="106000"/>
+              </a:lnSpc>
+              <a:spcBef>
+                <a:spcPts val="0"/>
+              </a:spcBef>
+              <a:spcAft>
+                <a:spcPts val="0"/>
+              </a:spcAft>
+            </a:pPr>
+            <a:r>
+              <a:rPr sz="2400" b="1">
+                <a:solidFill>
+                  <a:srgbClr val="1E1E1E"/>
+                </a:solidFill>
+                <a:latin typeface="Roboto"/>
+              </a:rPr>
+              <a:t>Se você é docente</a:t>
+            </a:r>
+          </a:p>
+        </p:txBody>
+      </p:sp>
+      <p:sp>
+        <p:nvSpPr>
+          <p:cNvPr id="8" name="TextBox 7"/>
+          <p:cNvSpPr txBox="1"/>
+          <p:nvPr/>
+        </p:nvSpPr>
+        <p:spPr>
+          <a:xfrm>
+            <a:off x="6347307" y="2737811"/>
+            <a:ext cx="5067147" cy="3022908"/>
+          </a:xfrm>
+          <a:prstGeom prst="rect">
+            <a:avLst/>
+          </a:prstGeom>
+          <a:noFill/>
+        </p:spPr>
+        <p:txBody>
+          <a:bodyPr wrap="square" lIns="0" rIns="0" tIns="0" bIns="0">
+            <a:spAutoFit/>
+          </a:bodyPr>
+          <a:lstStyle/>
+          <a:p>
+            <a:pPr algn="l">
+              <a:lnSpc>
+                <a:spcPct val="105000"/>
+              </a:lnSpc>
+              <a:spcBef>
+                <a:spcPts val="0"/>
+              </a:spcBef>
+              <a:spcAft>
+                <a:spcPts val="0"/>
+              </a:spcAft>
+            </a:pPr>
+            <a:r>
+              <a:rPr sz="2000" b="0">
+                <a:solidFill>
+                  <a:srgbClr val="1E1E1E"/>
+                </a:solidFill>
+                <a:latin typeface="Roboto"/>
+              </a:rPr>
+              <a:t>Avalie processo e defesa oral, não só o produto entregue</a:t>
+            </a:r>
+          </a:p>
+          <a:p>
+            <a:pPr algn="l">
+              <a:lnSpc>
+                <a:spcPct val="105000"/>
+              </a:lnSpc>
+              <a:spcBef>
+                <a:spcPts val="1600"/>
+              </a:spcBef>
+              <a:spcAft>
+                <a:spcPts val="0"/>
+              </a:spcAft>
+            </a:pPr>
+            <a:r>
+              <a:rPr sz="2000" b="0">
+                <a:solidFill>
+                  <a:srgbClr val="1E1E1E"/>
+                </a:solidFill>
+                <a:latin typeface="Roboto"/>
+              </a:rPr>
+              <a:t>Traga caso real da região para dentro da sala</a:t>
+            </a:r>
+          </a:p>
+          <a:p>
+            <a:pPr algn="l">
+              <a:lnSpc>
+                <a:spcPct val="105000"/>
+              </a:lnSpc>
+              <a:spcBef>
+                <a:spcPts val="1600"/>
+              </a:spcBef>
+              <a:spcAft>
+                <a:spcPts val="0"/>
+              </a:spcAft>
+            </a:pPr>
+            <a:r>
+              <a:rPr sz="2000" b="0">
+                <a:solidFill>
+                  <a:srgbClr val="1E1E1E"/>
+                </a:solidFill>
+                <a:latin typeface="Roboto"/>
+              </a:rPr>
+              <a:t>Exija que o aluno mostre onde a IA errou</a:t>
+            </a:r>
+          </a:p>
+          <a:p>
+            <a:pPr algn="l">
+              <a:lnSpc>
+                <a:spcPct val="105000"/>
+              </a:lnSpc>
+              <a:spcBef>
+                <a:spcPts val="1600"/>
+              </a:spcBef>
+              <a:spcAft>
+                <a:spcPts val="0"/>
+              </a:spcAft>
+            </a:pPr>
+            <a:r>
+              <a:rPr sz="2000" b="0">
+                <a:solidFill>
+                  <a:srgbClr val="1E1E1E"/>
+                </a:solidFill>
+                <a:latin typeface="Roboto"/>
+              </a:rPr>
+              <a:t>Use IA para preparar, corrigir e devolver mais rápido</a:t>
+            </a:r>
+          </a:p>
+        </p:txBody>
+      </p:sp>
+      <p:sp>
+        <p:nvSpPr>
+          <p:cNvPr id="9" name="Rectangle 8"/>
+          <p:cNvSpPr/>
+          <p:nvPr/>
+        </p:nvSpPr>
+        <p:spPr>
+          <a:xfrm>
+            <a:off x="777240" y="5907024"/>
+            <a:ext cx="10637215" cy="9525"/>
+          </a:xfrm>
+          <a:prstGeom prst="rect">
+            <a:avLst/>
+          </a:prstGeom>
+          <a:solidFill>
+            <a:srgbClr val="D6D6D6"/>
+          </a:solidFill>
+          <a:ln>
+            <a:noFill/>
+          </a:ln>
+          <a:effectLst/>
+        </p:spPr>
+        <p:style>
+          <a:lnRef idx="1">
+            <a:schemeClr val="accent1"/>
+          </a:lnRef>
+          <a:fillRef idx="3">
+            <a:schemeClr val="accent1"/>
+          </a:fillRef>
+          <a:effectRef idx="2">
+            <a:schemeClr val="accent1"/>
+          </a:effectRef>
+          <a:fontRef idx="minor">
+            <a:schemeClr val="lt1"/>
+          </a:fontRef>
+        </p:style>
+        <p:txBody>
+          <a:bodyPr rtlCol="0" anchor="ctr"/>
+          <a:lstStyle/>
+          <a:p>
+            <a:pPr algn="ctr"/>
+          </a:p>
+        </p:txBody>
+      </p:sp>
+      <p:sp>
+        <p:nvSpPr>
+          <p:cNvPr id="10" name="TextBox 9"/>
+          <p:cNvSpPr txBox="1"/>
+          <p:nvPr/>
+        </p:nvSpPr>
+        <p:spPr>
+          <a:xfrm>
+            <a:off x="777240" y="6016752"/>
+            <a:ext cx="10637215" cy="502920"/>
+          </a:xfrm>
+          <a:prstGeom prst="rect">
+            <a:avLst/>
+          </a:prstGeom>
+          <a:noFill/>
+        </p:spPr>
+        <p:txBody>
+          <a:bodyPr wrap="square" lIns="0" rIns="0" tIns="0" bIns="0">
+            <a:spAutoFit/>
+          </a:bodyPr>
+          <a:lstStyle/>
+          <a:p>
+            <a:pPr algn="l">
+              <a:lnSpc>
+                <a:spcPct val="105000"/>
+              </a:lnSpc>
+              <a:spcBef>
+                <a:spcPts val="0"/>
+              </a:spcBef>
+              <a:spcAft>
+                <a:spcPts val="0"/>
+              </a:spcAft>
+            </a:pPr>
+            <a:r>
+              <a:rPr sz="1900" b="1">
+                <a:solidFill>
+                  <a:srgbClr val="9A6A00"/>
+                </a:solidFill>
+                <a:latin typeface="Roboto"/>
+              </a:rPr>
+              <a:t>A tecnologia não vai esperar a região se preparar.</a:t>
+            </a:r>
+          </a:p>
+        </p:txBody>
+      </p:sp>
+      <p:sp>
+        <p:nvSpPr>
+          <p:cNvPr id="11" name="TextBox 10"/>
+          <p:cNvSpPr txBox="1"/>
+          <p:nvPr/>
+        </p:nvSpPr>
+        <p:spPr>
+          <a:xfrm>
+            <a:off x="10317175" y="6419088"/>
+            <a:ext cx="1097280" cy="274320"/>
+          </a:xfrm>
+          <a:prstGeom prst="rect">
+            <a:avLst/>
+          </a:prstGeom>
+          <a:noFill/>
+        </p:spPr>
+        <p:txBody>
+          <a:bodyPr wrap="square" lIns="0" rIns="0" tIns="0" bIns="0">
+            <a:spAutoFit/>
+          </a:bodyPr>
+          <a:lstStyle/>
+          <a:p>
+            <a:pPr algn="r">
+              <a:lnSpc>
+                <a:spcPct val="105000"/>
+              </a:lnSpc>
+              <a:spcBef>
+                <a:spcPts val="0"/>
+              </a:spcBef>
+              <a:spcAft>
+                <a:spcPts val="0"/>
+              </a:spcAft>
+            </a:pPr>
+            <a:r>
+              <a:rPr sz="1100" b="0">
+                <a:solidFill>
+                  <a:srgbClr val="6E6E6E"/>
+                </a:solidFill>
+                <a:latin typeface="Roboto"/>
+              </a:rPr>
+              <a:t>37</a:t>
+            </a:r>
+          </a:p>
+        </p:txBody>
+      </p:sp>
+    </p:spTree>
+  </p:cSld>
+  <p:clrMapOvr>
+    <a:masterClrMapping/>
+  </p:clrMapOvr>
+</p:sld>
+</file>
+
+<file path=ppt/slides/slide38.xml><?xml version="1.0" encoding="utf-8"?>
 <p:sld xmlns:a="http://schemas.openxmlformats.org/drawingml/2006/main" xmlns:p="http://schemas.openxmlformats.org/presentationml/2006/main" xmlns:r="http://schemas.openxmlformats.org/officeDocument/2006/relationships">
   <p:cSld>
     <p:spTree>
